--- a/notas_unidades/unidad1/1_intermediacion_financiera.pptx
+++ b/notas_unidades/unidad1/1_intermediacion_financiera.pptx
@@ -11,12 +11,12 @@
     <p:sldId id="274" r:id="rId2"/>
     <p:sldId id="275" r:id="rId3"/>
     <p:sldId id="276" r:id="rId4"/>
-    <p:sldId id="278" r:id="rId5"/>
-    <p:sldId id="277" r:id="rId6"/>
-    <p:sldId id="279" r:id="rId7"/>
-    <p:sldId id="280" r:id="rId8"/>
-    <p:sldId id="281" r:id="rId9"/>
-    <p:sldId id="282" r:id="rId10"/>
+    <p:sldId id="279" r:id="rId5"/>
+    <p:sldId id="280" r:id="rId6"/>
+    <p:sldId id="281" r:id="rId7"/>
+    <p:sldId id="282" r:id="rId8"/>
+    <p:sldId id="278" r:id="rId9"/>
+    <p:sldId id="285" r:id="rId10"/>
     <p:sldId id="284" r:id="rId11"/>
     <p:sldId id="283" r:id="rId12"/>
   </p:sldIdLst>
@@ -732,7 +732,7 @@
           <a:p>
             <a:fld id="{F7021451-1387-4CA6-816F-3879F97B5CBC}" type="slidenum">
               <a:rPr lang="en-US"/>
-              <a:t>6</a:t>
+              <a:t>8</a:t>
             </a:fld>
             <a:endParaRPr lang="en-US"/>
           </a:p>
@@ -741,7 +741,7 @@
     </p:spTree>
     <p:extLst>
       <p:ext uri="{BB962C8B-B14F-4D97-AF65-F5344CB8AC3E}">
-        <p14:creationId xmlns:p14="http://schemas.microsoft.com/office/powerpoint/2010/main" val="1024086991"/>
+        <p14:creationId xmlns:p14="http://schemas.microsoft.com/office/powerpoint/2010/main" val="4043335371"/>
       </p:ext>
     </p:extLst>
   </p:cSld>
@@ -816,7 +816,7 @@
           <a:p>
             <a:fld id="{F7021451-1387-4CA6-816F-3879F97B5CBC}" type="slidenum">
               <a:rPr lang="en-US"/>
-              <a:t>7</a:t>
+              <a:t>9</a:t>
             </a:fld>
             <a:endParaRPr lang="en-US"/>
           </a:p>
@@ -825,7 +825,7 @@
     </p:spTree>
     <p:extLst>
       <p:ext uri="{BB962C8B-B14F-4D97-AF65-F5344CB8AC3E}">
-        <p14:creationId xmlns:p14="http://schemas.microsoft.com/office/powerpoint/2010/main" val="1024086991"/>
+        <p14:creationId xmlns:p14="http://schemas.microsoft.com/office/powerpoint/2010/main" val="1724895337"/>
       </p:ext>
     </p:extLst>
   </p:cSld>
@@ -1487,15 +1487,26 @@
               <a:buNone/>
             </a:pPr>
             <a:r>
-              <a:rPr lang="en-US" sz="4000" b="1" dirty="0">
-                <a:solidFill>
-                  <a:srgbClr val="FFFFFF"/>
+              <a:rPr lang="en-US" sz="4000" b="1" dirty="0" err="1">
+                <a:solidFill>
+                  <a:srgbClr val="141B4D"/>
                 </a:solidFill>
                 <a:latin typeface="Cambria" pitchFamily="34" charset="0"/>
                 <a:ea typeface="Cambria" pitchFamily="34" charset="-122"/>
                 <a:cs typeface="Cambria" pitchFamily="34" charset="-120"/>
               </a:rPr>
-              <a:t>Activo Financiero e Intermediación Financiera</a:t>
+              <a:t>Intermediación</a:t>
+            </a:r>
+            <a:r>
+              <a:rPr lang="en-US" sz="4000" b="1" dirty="0">
+                <a:solidFill>
+                  <a:srgbClr val="141B4D"/>
+                </a:solidFill>
+                <a:latin typeface="Cambria" pitchFamily="34" charset="0"/>
+                <a:ea typeface="Cambria" pitchFamily="34" charset="-122"/>
+                <a:cs typeface="Cambria" pitchFamily="34" charset="-120"/>
+              </a:rPr>
+              <a:t> Financiera</a:t>
             </a:r>
             <a:endParaRPr lang="en-US" sz="4000" dirty="0"/>
           </a:p>
@@ -1573,7 +1584,7 @@
                 <a:ea typeface="Calibri" pitchFamily="34" charset="-122"/>
                 <a:cs typeface="Calibri" pitchFamily="34" charset="-120"/>
               </a:rPr>
-              <a:t>Fuentes: Linton (2019), Fabozzi y Peterson Drake (2009), Mántey de Anguiano (2024)</a:t>
+              <a:t>Fuentes: Mántey de Anguiano (2024), Mishkin y Eakins (2014)</a:t>
             </a:r>
             <a:endParaRPr lang="en-US" sz="1050" dirty="0"/>
           </a:p>
@@ -1664,7 +1675,7 @@
                 <a:ea typeface="Calibri" pitchFamily="34" charset="-122"/>
                 <a:cs typeface="Calibri" pitchFamily="34" charset="-120"/>
               </a:rPr>
-              <a:t>CIERRE · ACTIVO FINANCIERO E INTERMEDIACIÓN</a:t>
+              <a:t>CIERRE · INTERMEDIACIÓN FINANCIERA</a:t>
             </a:r>
             <a:endParaRPr lang="en-US" sz="1300" dirty="0"/>
           </a:p>
@@ -1704,7 +1715,7 @@
                 </a:solidFill>
                 <a:latin typeface="Calibri"/>
               </a:rPr>
-              <a:t>Un activo financiero es un derecho sobre flujos futuros que vincula a un emisor (unidad deficitaria) con un inversionista (unidad superavitaria).</a:t>
+              <a:t>El mercado de dinero (corto plazo, liquidez) y el mercado de capitales (largo plazo, inversión productiva) canalizan el ahorro según el plazo; los derivados son un tercer segmento.</a:t>
             </a:r>
           </a:p>
         </p:txBody>
@@ -1821,7 +1832,7 @@
                 </a:solidFill>
                 <a:latin typeface="Calibri"/>
               </a:rPr>
-              <a:t>Ambos caminos resuelven el mismo problema — conectar a quien ahorra con quien necesita financiamiento — pero difieren en quién asume el riesgo de crédito.</a:t>
+              <a:t>Cada agente económico accede de forma distinta a ambos mercados, y plazo y tipo de emisor son clasificaciones independientes entre sí.</a:t>
             </a:r>
           </a:p>
         </p:txBody>
@@ -2053,7 +2064,7 @@
                 </a:solidFill>
                 <a:latin typeface="Calibri"/>
               </a:rPr>
-              <a:t>Linton, O. (2019). Financial Econometrics: Models and Methods. Cambridge University Press.</a:t>
+              <a:t>Mántey de Anguiano, G. (2024). Lecciones de Economía Monetaria. UNAM.</a:t>
             </a:r>
           </a:p>
           <a:p>
@@ -2069,97 +2080,7 @@
                 </a:solidFill>
                 <a:latin typeface="Calibri"/>
               </a:rPr>
-              <a:t>Cap. 1 §1.1: </a:t>
-            </a:r>
-            <a:r>
-              <a:rPr sz="1100" b="0" i="0" dirty="0" err="1">
-                <a:solidFill>
-                  <a:srgbClr val="5B6482"/>
-                </a:solidFill>
-                <a:latin typeface="Calibri"/>
-              </a:rPr>
-              <a:t>por</a:t>
-            </a:r>
-            <a:r>
-              <a:rPr sz="1100" b="0" i="0" dirty="0">
-                <a:solidFill>
-                  <a:srgbClr val="5B6482"/>
-                </a:solidFill>
-                <a:latin typeface="Calibri"/>
-              </a:rPr>
-              <a:t> </a:t>
-            </a:r>
-            <a:r>
-              <a:rPr sz="1100" b="0" i="0" dirty="0" err="1">
-                <a:solidFill>
-                  <a:srgbClr val="5B6482"/>
-                </a:solidFill>
-                <a:latin typeface="Calibri"/>
-              </a:rPr>
-              <a:t>qué</a:t>
-            </a:r>
-            <a:r>
-              <a:rPr sz="1100" b="0" i="0" dirty="0">
-                <a:solidFill>
-                  <a:srgbClr val="5B6482"/>
-                </a:solidFill>
-                <a:latin typeface="Calibri"/>
-              </a:rPr>
-              <a:t> </a:t>
-            </a:r>
-            <a:r>
-              <a:rPr sz="1100" b="0" i="0" dirty="0" err="1">
-                <a:solidFill>
-                  <a:srgbClr val="5B6482"/>
-                </a:solidFill>
-                <a:latin typeface="Calibri"/>
-              </a:rPr>
-              <a:t>existen</a:t>
-            </a:r>
-            <a:r>
-              <a:rPr sz="1100" b="0" i="0" dirty="0">
-                <a:solidFill>
-                  <a:srgbClr val="5B6482"/>
-                </a:solidFill>
-                <a:latin typeface="Calibri"/>
-              </a:rPr>
-              <a:t> </a:t>
-            </a:r>
-            <a:r>
-              <a:rPr sz="1100" b="0" i="0" dirty="0" err="1">
-                <a:solidFill>
-                  <a:srgbClr val="5B6482"/>
-                </a:solidFill>
-                <a:latin typeface="Calibri"/>
-              </a:rPr>
-              <a:t>los</a:t>
-            </a:r>
-            <a:r>
-              <a:rPr sz="1100" b="0" i="0" dirty="0">
-                <a:solidFill>
-                  <a:srgbClr val="5B6482"/>
-                </a:solidFill>
-                <a:latin typeface="Calibri"/>
-              </a:rPr>
-              <a:t> mercados </a:t>
-            </a:r>
-            <a:r>
-              <a:rPr sz="1100" b="0" i="0" dirty="0" err="1">
-                <a:solidFill>
-                  <a:srgbClr val="5B6482"/>
-                </a:solidFill>
-                <a:latin typeface="Calibri"/>
-              </a:rPr>
-              <a:t>financieros</a:t>
-            </a:r>
-            <a:r>
-              <a:rPr sz="1100" b="0" i="0" dirty="0">
-                <a:solidFill>
-                  <a:srgbClr val="5B6482"/>
-                </a:solidFill>
-                <a:latin typeface="Calibri"/>
-              </a:rPr>
-              <a:t>.</a:t>
+              <a:t>Lección 2: intermediación financiera, ciclos de crédito directo/indirecto y clasificación de mercado de dinero/capitales.</a:t>
             </a:r>
           </a:p>
         </p:txBody>
@@ -2198,7 +2119,7 @@
                 </a:solidFill>
                 <a:latin typeface="Calibri"/>
               </a:rPr>
-              <a:t>Fabozzi, F. J. y Peterson Drake, P. (2009). Finance. Wiley.</a:t>
+              <a:t>Mishkin, F. S. y Eakins, S. G. (2014). Financial Markets and Institutions (8ª ed.). Pearson.</a:t>
             </a:r>
           </a:p>
           <a:p>
@@ -2214,314 +2135,7 @@
                 </a:solidFill>
                 <a:latin typeface="Calibri"/>
               </a:rPr>
-              <a:t>Cap. 4, "The Financial System": </a:t>
-            </a:r>
-            <a:r>
-              <a:rPr sz="1100" b="0" i="0" dirty="0" err="1">
-                <a:solidFill>
-                  <a:srgbClr val="5B6482"/>
-                </a:solidFill>
-                <a:latin typeface="Calibri"/>
-              </a:rPr>
-              <a:t>qué</a:t>
-            </a:r>
-            <a:r>
-              <a:rPr sz="1100" b="0" i="0" dirty="0">
-                <a:solidFill>
-                  <a:srgbClr val="5B6482"/>
-                </a:solidFill>
-                <a:latin typeface="Calibri"/>
-              </a:rPr>
-              <a:t> es un </a:t>
-            </a:r>
-            <a:r>
-              <a:rPr sz="1100" b="0" i="0" dirty="0" err="1">
-                <a:solidFill>
-                  <a:srgbClr val="5B6482"/>
-                </a:solidFill>
-                <a:latin typeface="Calibri"/>
-              </a:rPr>
-              <a:t>activo</a:t>
-            </a:r>
-            <a:r>
-              <a:rPr sz="1100" b="0" i="0" dirty="0">
-                <a:solidFill>
-                  <a:srgbClr val="5B6482"/>
-                </a:solidFill>
-                <a:latin typeface="Calibri"/>
-              </a:rPr>
-              <a:t> </a:t>
-            </a:r>
-            <a:r>
-              <a:rPr sz="1100" b="0" i="0" dirty="0" err="1">
-                <a:solidFill>
-                  <a:srgbClr val="5B6482"/>
-                </a:solidFill>
-                <a:latin typeface="Calibri"/>
-              </a:rPr>
-              <a:t>financiero</a:t>
-            </a:r>
-            <a:r>
-              <a:rPr sz="1100" b="0" i="0" dirty="0">
-                <a:solidFill>
-                  <a:srgbClr val="5B6482"/>
-                </a:solidFill>
-                <a:latin typeface="Calibri"/>
-              </a:rPr>
-              <a:t> y </a:t>
-            </a:r>
-            <a:r>
-              <a:rPr sz="1100" b="0" i="0" dirty="0" err="1">
-                <a:solidFill>
-                  <a:srgbClr val="5B6482"/>
-                </a:solidFill>
-                <a:latin typeface="Calibri"/>
-              </a:rPr>
-              <a:t>funciones</a:t>
-            </a:r>
-            <a:r>
-              <a:rPr sz="1100" b="0" i="0" dirty="0">
-                <a:solidFill>
-                  <a:srgbClr val="5B6482"/>
-                </a:solidFill>
-                <a:latin typeface="Calibri"/>
-              </a:rPr>
-              <a:t> del mercado.</a:t>
-            </a:r>
-          </a:p>
-        </p:txBody>
-      </p:sp>
-      <p:sp>
-        <p:nvSpPr>
-          <p:cNvPr id="39" name="TextBox 38"/>
-          <p:cNvSpPr txBox="1"/>
-          <p:nvPr/>
-        </p:nvSpPr>
-        <p:spPr>
-          <a:xfrm>
-            <a:off x="746759" y="1527048"/>
-            <a:ext cx="9443987" cy="512961"/>
-          </a:xfrm>
-          <a:prstGeom prst="rect">
-            <a:avLst/>
-          </a:prstGeom>
-          <a:noFill/>
-        </p:spPr>
-        <p:txBody>
-          <a:bodyPr wrap="square">
-            <a:spAutoFit/>
-          </a:bodyPr>
-          <a:lstStyle/>
-          <a:p>
-            <a:pPr>
-              <a:spcAft>
-                <a:spcPts val="400"/>
-              </a:spcAft>
-            </a:pPr>
-            <a:r>
-              <a:rPr sz="1300" b="1" i="0" dirty="0" err="1">
-                <a:solidFill>
-                  <a:srgbClr val="1E2761"/>
-                </a:solidFill>
-                <a:latin typeface="Calibri"/>
-              </a:rPr>
-              <a:t>Mántey</a:t>
-            </a:r>
-            <a:r>
-              <a:rPr sz="1300" b="1" i="0" dirty="0">
-                <a:solidFill>
-                  <a:srgbClr val="1E2761"/>
-                </a:solidFill>
-                <a:latin typeface="Calibri"/>
-              </a:rPr>
-              <a:t> de Anguiano, G. (2024). </a:t>
-            </a:r>
-            <a:r>
-              <a:rPr sz="1300" b="1" i="0" dirty="0" err="1">
-                <a:solidFill>
-                  <a:srgbClr val="1E2761"/>
-                </a:solidFill>
-                <a:latin typeface="Calibri"/>
-              </a:rPr>
-              <a:t>Lecciones</a:t>
-            </a:r>
-            <a:r>
-              <a:rPr sz="1300" b="1" i="0" dirty="0">
-                <a:solidFill>
-                  <a:srgbClr val="1E2761"/>
-                </a:solidFill>
-                <a:latin typeface="Calibri"/>
-              </a:rPr>
-              <a:t> de Economía </a:t>
-            </a:r>
-            <a:r>
-              <a:rPr sz="1300" b="1" i="0" dirty="0" err="1">
-                <a:solidFill>
-                  <a:srgbClr val="1E2761"/>
-                </a:solidFill>
-                <a:latin typeface="Calibri"/>
-              </a:rPr>
-              <a:t>Monetaria</a:t>
-            </a:r>
-            <a:r>
-              <a:rPr sz="1300" b="1" i="0" dirty="0">
-                <a:solidFill>
-                  <a:srgbClr val="1E2761"/>
-                </a:solidFill>
-                <a:latin typeface="Calibri"/>
-              </a:rPr>
-              <a:t>. UNAM.</a:t>
-            </a:r>
-          </a:p>
-          <a:p>
-            <a:pPr>
-              <a:spcAft>
-                <a:spcPts val="400"/>
-              </a:spcAft>
-            </a:pPr>
-            <a:r>
-              <a:rPr sz="1100" b="0" i="0" dirty="0" err="1">
-                <a:solidFill>
-                  <a:srgbClr val="5B6482"/>
-                </a:solidFill>
-                <a:latin typeface="Calibri"/>
-              </a:rPr>
-              <a:t>Lección</a:t>
-            </a:r>
-            <a:r>
-              <a:rPr sz="1100" b="0" i="0" dirty="0">
-                <a:solidFill>
-                  <a:srgbClr val="5B6482"/>
-                </a:solidFill>
-                <a:latin typeface="Calibri"/>
-              </a:rPr>
-              <a:t> 2: </a:t>
-            </a:r>
-            <a:r>
-              <a:rPr sz="1100" b="0" i="0" dirty="0" err="1">
-                <a:solidFill>
-                  <a:srgbClr val="5B6482"/>
-                </a:solidFill>
-                <a:latin typeface="Calibri"/>
-              </a:rPr>
-              <a:t>intermediación</a:t>
-            </a:r>
-            <a:r>
-              <a:rPr sz="1100" b="0" i="0" dirty="0">
-                <a:solidFill>
-                  <a:srgbClr val="5B6482"/>
-                </a:solidFill>
-                <a:latin typeface="Calibri"/>
-              </a:rPr>
-              <a:t> </a:t>
-            </a:r>
-            <a:r>
-              <a:rPr sz="1100" b="0" i="0" dirty="0" err="1">
-                <a:solidFill>
-                  <a:srgbClr val="5B6482"/>
-                </a:solidFill>
-                <a:latin typeface="Calibri"/>
-              </a:rPr>
-              <a:t>financiera</a:t>
-            </a:r>
-            <a:r>
-              <a:rPr sz="1100" b="0" i="0" dirty="0">
-                <a:solidFill>
-                  <a:srgbClr val="5B6482"/>
-                </a:solidFill>
-                <a:latin typeface="Calibri"/>
-              </a:rPr>
-              <a:t> y </a:t>
-            </a:r>
-            <a:r>
-              <a:rPr sz="1100" b="0" i="0" dirty="0" err="1">
-                <a:solidFill>
-                  <a:srgbClr val="5B6482"/>
-                </a:solidFill>
-                <a:latin typeface="Calibri"/>
-              </a:rPr>
-              <a:t>los</a:t>
-            </a:r>
-            <a:r>
-              <a:rPr sz="1100" b="0" i="0" dirty="0">
-                <a:solidFill>
-                  <a:srgbClr val="5B6482"/>
-                </a:solidFill>
-                <a:latin typeface="Calibri"/>
-              </a:rPr>
-              <a:t> </a:t>
-            </a:r>
-            <a:r>
-              <a:rPr sz="1100" b="0" i="0" dirty="0" err="1">
-                <a:solidFill>
-                  <a:srgbClr val="5B6482"/>
-                </a:solidFill>
-                <a:latin typeface="Calibri"/>
-              </a:rPr>
-              <a:t>ciclos</a:t>
-            </a:r>
-            <a:r>
-              <a:rPr sz="1100" b="0" i="0" dirty="0">
-                <a:solidFill>
-                  <a:srgbClr val="5B6482"/>
-                </a:solidFill>
-                <a:latin typeface="Calibri"/>
-              </a:rPr>
-              <a:t> de </a:t>
-            </a:r>
-            <a:r>
-              <a:rPr sz="1100" b="0" i="0" dirty="0" err="1">
-                <a:solidFill>
-                  <a:srgbClr val="5B6482"/>
-                </a:solidFill>
-                <a:latin typeface="Calibri"/>
-              </a:rPr>
-              <a:t>crédito</a:t>
-            </a:r>
-            <a:r>
-              <a:rPr sz="1100" b="0" i="0" dirty="0">
-                <a:solidFill>
-                  <a:srgbClr val="5B6482"/>
-                </a:solidFill>
-                <a:latin typeface="Calibri"/>
-              </a:rPr>
-              <a:t> </a:t>
-            </a:r>
-            <a:r>
-              <a:rPr sz="1100" b="0" i="0" dirty="0" err="1">
-                <a:solidFill>
-                  <a:srgbClr val="5B6482"/>
-                </a:solidFill>
-                <a:latin typeface="Calibri"/>
-              </a:rPr>
-              <a:t>indirecto</a:t>
-            </a:r>
-            <a:r>
-              <a:rPr sz="1100" b="0" i="0" dirty="0">
-                <a:solidFill>
-                  <a:srgbClr val="5B6482"/>
-                </a:solidFill>
-                <a:latin typeface="Calibri"/>
-              </a:rPr>
-              <a:t> y </a:t>
-            </a:r>
-            <a:r>
-              <a:rPr sz="1100" b="0" i="0" dirty="0" err="1">
-                <a:solidFill>
-                  <a:srgbClr val="5B6482"/>
-                </a:solidFill>
-                <a:latin typeface="Calibri"/>
-              </a:rPr>
-              <a:t>directo</a:t>
-            </a:r>
-            <a:r>
-              <a:rPr sz="1100" b="0" i="0" dirty="0">
-                <a:solidFill>
-                  <a:srgbClr val="5B6482"/>
-                </a:solidFill>
-                <a:latin typeface="Calibri"/>
-              </a:rPr>
-              <a:t>.</a:t>
+              <a:t>Cap. 11, "The Money Markets".</a:t>
             </a:r>
           </a:p>
         </p:txBody>
@@ -2584,7 +2198,7 @@
                 <a:ea typeface="Calibri" pitchFamily="34" charset="-122"/>
                 <a:cs typeface="Calibri" pitchFamily="34" charset="-120"/>
               </a:rPr>
-              <a:t>ACTIVO FINANCIERO · PANORAMA GENERAL</a:t>
+              <a:t>INTERMEDIACIÓN FINANCIERA · PANORAMA GENERAL</a:t>
             </a:r>
             <a:endParaRPr lang="en-US" sz="1200" dirty="0"/>
           </a:p>
@@ -2745,7 +2359,7 @@
                 <a:ea typeface="Cambria" pitchFamily="34" charset="-122"/>
                 <a:cs typeface="Cambria" pitchFamily="34" charset="-120"/>
               </a:rPr>
-              <a:t>Que el estudiante distinga un activo financiero de otros tipos de activo, y al emisor del inversionista en una transacción dada.</a:t>
+              <a:t>Que el estudiante explique la intermediación financiera y clasifique un activo financiero según su plazo, en mercado de dinero o de capitales.</a:t>
             </a:r>
             <a:endParaRPr lang="en-US" sz="2400" dirty="0"/>
           </a:p>
@@ -2848,7 +2462,7 @@
                 <a:ea typeface="Calibri" pitchFamily="34" charset="-122"/>
                 <a:cs typeface="Calibri" pitchFamily="34" charset="-120"/>
               </a:rPr>
-              <a:t>ACTIVO FINANCIERO · PANORAMA GENERAL</a:t>
+              <a:t>INTERMEDIACIÓN FINANCIERA · PANORAMA GENERAL</a:t>
             </a:r>
             <a:endParaRPr lang="en-US" sz="1200" dirty="0"/>
           </a:p>
@@ -2961,16 +2575,7 @@
                 </a:solidFill>
                 <a:latin typeface="Calibri"/>
               </a:rPr>
-              <a:t>I.   </a:t>
-            </a:r>
-            <a:r>
-              <a:rPr sz="1500" b="1" i="0">
-                <a:solidFill>
-                  <a:srgbClr val="1E2761"/>
-                </a:solidFill>
-                <a:latin typeface="Calibri"/>
-              </a:rPr>
-              <a:t>¿Por qué existen los mercados financieros?</a:t>
+              <a:t>I.   Intermediación financiera</a:t>
             </a:r>
           </a:p>
         </p:txBody>
@@ -3039,16 +2644,7 @@
                 </a:solidFill>
                 <a:latin typeface="Calibri"/>
               </a:rPr>
-              <a:t>II.   </a:t>
-            </a:r>
-            <a:r>
-              <a:rPr sz="1500" b="1" i="0">
-                <a:solidFill>
-                  <a:srgbClr val="1E2761"/>
-                </a:solidFill>
-                <a:latin typeface="Calibri"/>
-              </a:rPr>
-              <a:t>¿Qué es un activo financiero?</a:t>
+              <a:t>II.   Dos caminos para el crédito</a:t>
             </a:r>
           </a:p>
         </p:txBody>
@@ -3117,16 +2713,7 @@
                 </a:solidFill>
                 <a:latin typeface="Calibri"/>
               </a:rPr>
-              <a:t>III.   </a:t>
-            </a:r>
-            <a:r>
-              <a:rPr sz="1500" b="1" i="0">
-                <a:solidFill>
-                  <a:srgbClr val="1E2761"/>
-                </a:solidFill>
-                <a:latin typeface="Calibri"/>
-              </a:rPr>
-              <a:t>Intermediación financiera</a:t>
+              <a:t>III.   El ciclo de captación-colocación</a:t>
             </a:r>
           </a:p>
         </p:txBody>
@@ -3195,16 +2782,7 @@
                 </a:solidFill>
                 <a:latin typeface="Calibri"/>
               </a:rPr>
-              <a:t>IV.   </a:t>
-            </a:r>
-            <a:r>
-              <a:rPr sz="1500" b="1" i="0">
-                <a:solidFill>
-                  <a:srgbClr val="1E2761"/>
-                </a:solidFill>
-                <a:latin typeface="Calibri"/>
-              </a:rPr>
-              <a:t>Dos caminos para el crédito</a:t>
+              <a:t>IV.   El ciclo del crédito directo</a:t>
             </a:r>
           </a:p>
         </p:txBody>
@@ -3273,16 +2851,7 @@
                 </a:solidFill>
                 <a:latin typeface="Calibri"/>
               </a:rPr>
-              <a:t>V.   </a:t>
-            </a:r>
-            <a:r>
-              <a:rPr sz="1500" b="1" i="0">
-                <a:solidFill>
-                  <a:srgbClr val="1E2761"/>
-                </a:solidFill>
-                <a:latin typeface="Calibri"/>
-              </a:rPr>
-              <a:t>El ciclo de captación-colocación</a:t>
+              <a:t>V.   Mercado de dinero y mercado de capitales</a:t>
             </a:r>
           </a:p>
         </p:txBody>
@@ -3351,16 +2920,7 @@
                 </a:solidFill>
                 <a:latin typeface="Calibri"/>
               </a:rPr>
-              <a:t>VI.   </a:t>
-            </a:r>
-            <a:r>
-              <a:rPr sz="1500" b="1" i="0">
-                <a:solidFill>
-                  <a:srgbClr val="1E2761"/>
-                </a:solidFill>
-                <a:latin typeface="Calibri"/>
-              </a:rPr>
-              <a:t>El ciclo del crédito directo</a:t>
+              <a:t>VI.   Agentes económicos y su acceso a los mercados</a:t>
             </a:r>
           </a:p>
         </p:txBody>
@@ -3429,16 +2989,7 @@
                 </a:solidFill>
                 <a:latin typeface="Calibri"/>
               </a:rPr>
-              <a:t>VII.   </a:t>
-            </a:r>
-            <a:r>
-              <a:rPr sz="1500" b="1" i="0">
-                <a:solidFill>
-                  <a:srgbClr val="1E2761"/>
-                </a:solidFill>
-                <a:latin typeface="Calibri"/>
-              </a:rPr>
-              <a:t>Fuentes y referencias</a:t>
+              <a:t>VII.   Fuentes y referencias</a:t>
             </a:r>
           </a:p>
         </p:txBody>
@@ -3536,7 +3087,7 @@
                 <a:ea typeface="Calibri" pitchFamily="34" charset="-122"/>
                 <a:cs typeface="Calibri" pitchFamily="34" charset="-120"/>
               </a:rPr>
-              <a:t>ACTIVO FINANCIERO E INTERMEDIACIÓN · 8 MIN</a:t>
+              <a:t>INTERMEDIACIÓN FINANCIERA · 12 MIN</a:t>
             </a:r>
             <a:endParaRPr lang="en-US" sz="1200" dirty="0"/>
           </a:p>
@@ -3571,7 +3122,7 @@
       </p:sp>
       <p:pic>
         <p:nvPicPr>
-          <p:cNvPr id="4" name="Image 0" descr="/tmp/work/deck/icons/coins_navy.png"/>
+          <p:cNvPr id="4" name="Image 0" descr="/tmp/work/deck/icons/exchange_navy.png"/>
           <p:cNvPicPr>
             <a:picLocks noChangeAspect="1"/>
           </p:cNvPicPr>
@@ -3626,7 +3177,7 @@
                 <a:ea typeface="Cambria" pitchFamily="34" charset="-122"/>
                 <a:cs typeface="Cambria" pitchFamily="34" charset="-120"/>
               </a:rPr>
-              <a:t>¿Qué es un activo financiero?</a:t>
+              <a:t>Intermediación financiera</a:t>
             </a:r>
             <a:endParaRPr lang="en-US" sz="3200" dirty="0"/>
           </a:p>
@@ -3665,7 +3216,7 @@
                 <a:ea typeface="Calibri" pitchFamily="34" charset="-122"/>
                 <a:cs typeface="Calibri" pitchFamily="34" charset="-120"/>
               </a:rPr>
-              <a:t>Antes de hablar de mercados, hay que definir qué es lo que en ellos se intercambia.</a:t>
+              <a:t>El mercado financiero canaliza recursos de quienes ahorran hacia quienes los necesitan.</a:t>
             </a:r>
             <a:endParaRPr lang="en-US" sz="1400" dirty="0"/>
           </a:p>
@@ -3680,11 +3231,11 @@
         <p:spPr>
           <a:xfrm>
             <a:off x="640080" y="1965960"/>
-            <a:ext cx="4937760" cy="3063240"/>
+            <a:ext cx="4114800" cy="2926080"/>
           </a:xfrm>
           <a:prstGeom prst="roundRect">
             <a:avLst>
-              <a:gd name="adj" fmla="val 2985"/>
+              <a:gd name="adj" fmla="val 3125"/>
             </a:avLst>
           </a:prstGeom>
           <a:solidFill>
@@ -3708,8 +3259,8 @@
         </p:nvSpPr>
         <p:spPr>
           <a:xfrm>
-            <a:off x="932688" y="2240280"/>
-            <a:ext cx="566928" cy="566928"/>
+            <a:off x="1005840" y="2286000"/>
+            <a:ext cx="621792" cy="621792"/>
           </a:xfrm>
           <a:prstGeom prst="ellipse">
             <a:avLst/>
@@ -3729,7 +3280,7 @@
       </p:sp>
       <p:pic>
         <p:nvPicPr>
-          <p:cNvPr id="9" name="Image 1" descr="/tmp/work/deck/icons/landmark_navy.png"/>
+          <p:cNvPr id="9" name="Image 1" descr="/tmp/work/deck/icons/piggy_white.png"/>
           <p:cNvPicPr>
             <a:picLocks noChangeAspect="1"/>
           </p:cNvPicPr>
@@ -3743,8 +3294,8 @@
         </p:blipFill>
         <p:spPr>
           <a:xfrm>
-            <a:off x="1068751" y="2376343"/>
-            <a:ext cx="294803" cy="294803"/>
+            <a:off x="1155070" y="2435230"/>
+            <a:ext cx="323332" cy="323332"/>
           </a:xfrm>
           <a:prstGeom prst="rect">
             <a:avLst/>
@@ -3759,8 +3310,8 @@
         </p:nvSpPr>
         <p:spPr>
           <a:xfrm>
-            <a:off x="1645920" y="2267712"/>
-            <a:ext cx="3657600" cy="310896"/>
+            <a:off x="1005840" y="3063240"/>
+            <a:ext cx="3383280" cy="457200"/>
           </a:xfrm>
           <a:prstGeom prst="rect">
             <a:avLst/>
@@ -3776,7 +3327,7 @@
               <a:buNone/>
             </a:pPr>
             <a:r>
-              <a:rPr lang="en-US" sz="1650" b="1" dirty="0">
+              <a:rPr lang="en-US" sz="1600" b="1" dirty="0">
                 <a:solidFill>
                   <a:srgbClr val="1E2761"/>
                 </a:solidFill>
@@ -3784,9 +3335,9 @@
                 <a:ea typeface="Cambria" pitchFamily="34" charset="-122"/>
                 <a:cs typeface="Cambria" pitchFamily="34" charset="-120"/>
               </a:rPr>
-              <a:t>Activo</a:t>
-            </a:r>
-            <a:endParaRPr lang="en-US" sz="1650" dirty="0"/>
+              <a:t>Unidades superavitarias</a:t>
+            </a:r>
+            <a:endParaRPr lang="en-US" sz="1600" dirty="0"/>
           </a:p>
         </p:txBody>
       </p:sp>
@@ -3798,8 +3349,8 @@
         </p:nvSpPr>
         <p:spPr>
           <a:xfrm>
-            <a:off x="1645920" y="2578608"/>
-            <a:ext cx="3657600" cy="237744"/>
+            <a:off x="1005840" y="3538728"/>
+            <a:ext cx="3383280" cy="1234440"/>
           </a:xfrm>
           <a:prstGeom prst="rect">
             <a:avLst/>
@@ -3812,20 +3363,23 @@
           <a:lstStyle/>
           <a:p>
             <a:pPr marL="0" indent="0">
-              <a:buNone/>
-            </a:pPr>
-            <a:r>
-              <a:rPr lang="en-US" sz="900" b="1" kern="0" spc="100" dirty="0">
-                <a:solidFill>
-                  <a:srgbClr val="C9A227"/>
+              <a:lnSpc>
+                <a:spcPct val="120000"/>
+              </a:lnSpc>
+              <a:buNone/>
+            </a:pPr>
+            <a:r>
+              <a:rPr lang="en-US" sz="1200" dirty="0">
+                <a:solidFill>
+                  <a:srgbClr val="27314D"/>
                 </a:solidFill>
                 <a:latin typeface="Calibri" pitchFamily="34" charset="0"/>
                 <a:ea typeface="Calibri" pitchFamily="34" charset="-122"/>
                 <a:cs typeface="Calibri" pitchFamily="34" charset="-120"/>
               </a:rPr>
-              <a:t>RECURSO CON VALOR ECONÓMICO</a:t>
-            </a:r>
-            <a:endParaRPr lang="en-US" sz="900" dirty="0"/>
+              <a:t>Ahorradores e inversionistas: agentes que generan excedentes de recursos y buscan colocarlos con seguridad y liquidez.</a:t>
+            </a:r>
+            <a:endParaRPr lang="en-US" sz="1200" dirty="0"/>
           </a:p>
         </p:txBody>
       </p:sp>
@@ -3837,8 +3391,8 @@
         </p:nvSpPr>
         <p:spPr>
           <a:xfrm>
-            <a:off x="932688" y="2953512"/>
-            <a:ext cx="4352544" cy="640080"/>
+            <a:off x="4892040" y="2350008"/>
+            <a:ext cx="1691640" cy="566928"/>
           </a:xfrm>
           <a:prstGeom prst="rect">
             <a:avLst/>
@@ -3850,37 +3404,226 @@
           <a:bodyPr wrap="square" lIns="0" tIns="0" rIns="0" bIns="0" rtlCol="0" anchor="ctr"/>
           <a:lstStyle/>
           <a:p>
-            <a:pPr marL="0" indent="0">
-              <a:lnSpc>
-                <a:spcPct val="115000"/>
-              </a:lnSpc>
-              <a:buNone/>
-            </a:pPr>
-            <a:r>
-              <a:rPr lang="en-US" sz="1080" dirty="0">
-                <a:solidFill>
-                  <a:srgbClr val="27314D"/>
+            <a:pPr marL="0" indent="0" algn="ctr">
+              <a:buNone/>
+            </a:pPr>
+            <a:r>
+              <a:rPr lang="en-US" sz="2600" b="1" dirty="0">
+                <a:solidFill>
+                  <a:srgbClr val="C9A227"/>
                 </a:solidFill>
                 <a:latin typeface="Calibri" pitchFamily="34" charset="0"/>
                 <a:ea typeface="Calibri" pitchFamily="34" charset="-122"/>
                 <a:cs typeface="Calibri" pitchFamily="34" charset="-120"/>
               </a:rPr>
-              <a:t>Cualquier recurso del que se espera obtener beneficios económicos futuros.</a:t>
-            </a:r>
-            <a:endParaRPr lang="en-US" sz="1080" dirty="0"/>
-          </a:p>
-        </p:txBody>
-      </p:sp>
-      <p:sp>
-        <p:nvSpPr>
-          <p:cNvPr id="13" name="Shape 9"/>
-          <p:cNvSpPr/>
-          <p:nvPr/>
-        </p:nvSpPr>
-        <p:spPr>
-          <a:xfrm>
-            <a:off x="932688" y="3730752"/>
-            <a:ext cx="82296" cy="82296"/>
+              <a:t>→</a:t>
+            </a:r>
+            <a:endParaRPr lang="en-US" sz="2600" dirty="0"/>
+          </a:p>
+        </p:txBody>
+      </p:sp>
+      <p:sp>
+        <p:nvSpPr>
+          <p:cNvPr id="13" name="Text 9"/>
+          <p:cNvSpPr/>
+          <p:nvPr/>
+        </p:nvSpPr>
+        <p:spPr>
+          <a:xfrm>
+            <a:off x="4617720" y="2880360"/>
+            <a:ext cx="2148840" cy="457200"/>
+          </a:xfrm>
+          <a:prstGeom prst="rect">
+            <a:avLst/>
+          </a:prstGeom>
+          <a:noFill/>
+          <a:ln/>
+        </p:spPr>
+        <p:txBody>
+          <a:bodyPr wrap="square" lIns="0" tIns="0" rIns="0" bIns="0" rtlCol="0" anchor="ctr"/>
+          <a:lstStyle/>
+          <a:p>
+            <a:pPr marL="0" indent="0" algn="ctr">
+              <a:lnSpc>
+                <a:spcPct val="105000"/>
+              </a:lnSpc>
+              <a:buNone/>
+            </a:pPr>
+            <a:r>
+              <a:rPr lang="en-US" sz="950" b="1" dirty="0">
+                <a:solidFill>
+                  <a:srgbClr val="5B6482"/>
+                </a:solidFill>
+                <a:latin typeface="Calibri" pitchFamily="34" charset="0"/>
+                <a:ea typeface="Calibri" pitchFamily="34" charset="-122"/>
+                <a:cs typeface="Calibri" pitchFamily="34" charset="-120"/>
+              </a:rPr>
+              <a:t>recursos</a:t>
+            </a:r>
+            <a:endParaRPr lang="en-US" sz="950" dirty="0"/>
+          </a:p>
+          <a:p>
+            <a:pPr marL="0" indent="0" algn="ctr">
+              <a:lnSpc>
+                <a:spcPct val="105000"/>
+              </a:lnSpc>
+              <a:buNone/>
+            </a:pPr>
+            <a:r>
+              <a:rPr lang="en-US" sz="950" b="1" dirty="0">
+                <a:solidFill>
+                  <a:srgbClr val="5B6482"/>
+                </a:solidFill>
+                <a:latin typeface="Calibri" pitchFamily="34" charset="0"/>
+                <a:ea typeface="Calibri" pitchFamily="34" charset="-122"/>
+                <a:cs typeface="Calibri" pitchFamily="34" charset="-120"/>
+              </a:rPr>
+              <a:t>(dinero)</a:t>
+            </a:r>
+            <a:endParaRPr lang="en-US" sz="950" dirty="0"/>
+          </a:p>
+        </p:txBody>
+      </p:sp>
+      <p:sp>
+        <p:nvSpPr>
+          <p:cNvPr id="14" name="Text 10"/>
+          <p:cNvSpPr/>
+          <p:nvPr/>
+        </p:nvSpPr>
+        <p:spPr>
+          <a:xfrm>
+            <a:off x="4892040" y="3447288"/>
+            <a:ext cx="1691640" cy="566928"/>
+          </a:xfrm>
+          <a:prstGeom prst="rect">
+            <a:avLst/>
+          </a:prstGeom>
+          <a:noFill/>
+          <a:ln/>
+        </p:spPr>
+        <p:txBody>
+          <a:bodyPr wrap="square" lIns="0" tIns="0" rIns="0" bIns="0" rtlCol="0" anchor="ctr"/>
+          <a:lstStyle/>
+          <a:p>
+            <a:pPr marL="0" indent="0" algn="ctr">
+              <a:buNone/>
+            </a:pPr>
+            <a:r>
+              <a:rPr lang="en-US" sz="2600" b="1" dirty="0">
+                <a:solidFill>
+                  <a:srgbClr val="1E2761"/>
+                </a:solidFill>
+                <a:latin typeface="Calibri" pitchFamily="34" charset="0"/>
+                <a:ea typeface="Calibri" pitchFamily="34" charset="-122"/>
+                <a:cs typeface="Calibri" pitchFamily="34" charset="-120"/>
+              </a:rPr>
+              <a:t>←</a:t>
+            </a:r>
+            <a:endParaRPr lang="en-US" sz="2600" dirty="0"/>
+          </a:p>
+        </p:txBody>
+      </p:sp>
+      <p:sp>
+        <p:nvSpPr>
+          <p:cNvPr id="15" name="Text 11"/>
+          <p:cNvSpPr/>
+          <p:nvPr/>
+        </p:nvSpPr>
+        <p:spPr>
+          <a:xfrm>
+            <a:off x="4617720" y="3977640"/>
+            <a:ext cx="2148840" cy="457200"/>
+          </a:xfrm>
+          <a:prstGeom prst="rect">
+            <a:avLst/>
+          </a:prstGeom>
+          <a:noFill/>
+          <a:ln/>
+        </p:spPr>
+        <p:txBody>
+          <a:bodyPr wrap="square" lIns="0" tIns="0" rIns="0" bIns="0" rtlCol="0" anchor="ctr"/>
+          <a:lstStyle/>
+          <a:p>
+            <a:pPr marL="0" indent="0" algn="ctr">
+              <a:lnSpc>
+                <a:spcPct val="105000"/>
+              </a:lnSpc>
+              <a:buNone/>
+            </a:pPr>
+            <a:r>
+              <a:rPr lang="en-US" sz="950" b="1" dirty="0">
+                <a:solidFill>
+                  <a:srgbClr val="5B6482"/>
+                </a:solidFill>
+                <a:latin typeface="Calibri" pitchFamily="34" charset="0"/>
+                <a:ea typeface="Calibri" pitchFamily="34" charset="-122"/>
+                <a:cs typeface="Calibri" pitchFamily="34" charset="-120"/>
+              </a:rPr>
+              <a:t>a cambio de un</a:t>
+            </a:r>
+            <a:endParaRPr lang="en-US" sz="950" dirty="0"/>
+          </a:p>
+          <a:p>
+            <a:pPr marL="0" indent="0" algn="ctr">
+              <a:lnSpc>
+                <a:spcPct val="105000"/>
+              </a:lnSpc>
+              <a:buNone/>
+            </a:pPr>
+            <a:r>
+              <a:rPr lang="en-US" sz="950" b="1" dirty="0">
+                <a:solidFill>
+                  <a:srgbClr val="5B6482"/>
+                </a:solidFill>
+                <a:latin typeface="Calibri" pitchFamily="34" charset="0"/>
+                <a:ea typeface="Calibri" pitchFamily="34" charset="-122"/>
+                <a:cs typeface="Calibri" pitchFamily="34" charset="-120"/>
+              </a:rPr>
+              <a:t>activo financiero</a:t>
+            </a:r>
+            <a:endParaRPr lang="en-US" sz="950" dirty="0"/>
+          </a:p>
+        </p:txBody>
+      </p:sp>
+      <p:sp>
+        <p:nvSpPr>
+          <p:cNvPr id="16" name="Shape 12"/>
+          <p:cNvSpPr/>
+          <p:nvPr/>
+        </p:nvSpPr>
+        <p:spPr>
+          <a:xfrm>
+            <a:off x="7452360" y="1965960"/>
+            <a:ext cx="4114800" cy="2926080"/>
+          </a:xfrm>
+          <a:prstGeom prst="roundRect">
+            <a:avLst>
+              <a:gd name="adj" fmla="val 3125"/>
+            </a:avLst>
+          </a:prstGeom>
+          <a:solidFill>
+            <a:srgbClr val="1E2761"/>
+          </a:solidFill>
+          <a:ln/>
+        </p:spPr>
+        <p:txBody>
+          <a:bodyPr/>
+          <a:lstStyle/>
+          <a:p>
+            <a:endParaRPr/>
+          </a:p>
+        </p:txBody>
+      </p:sp>
+      <p:sp>
+        <p:nvSpPr>
+          <p:cNvPr id="17" name="Shape 13"/>
+          <p:cNvSpPr/>
+          <p:nvPr/>
+        </p:nvSpPr>
+        <p:spPr>
+          <a:xfrm>
+            <a:off x="7818120" y="2286000"/>
+            <a:ext cx="621792" cy="621792"/>
           </a:xfrm>
           <a:prstGeom prst="ellipse">
             <a:avLst/>
@@ -3898,198 +3641,9 @@
           </a:p>
         </p:txBody>
       </p:sp>
-      <p:sp>
-        <p:nvSpPr>
-          <p:cNvPr id="14" name="Text 10"/>
-          <p:cNvSpPr/>
-          <p:nvPr/>
-        </p:nvSpPr>
-        <p:spPr>
-          <a:xfrm>
-            <a:off x="1143000" y="3593592"/>
-            <a:ext cx="4069080" cy="658368"/>
-          </a:xfrm>
-          <a:prstGeom prst="rect">
-            <a:avLst/>
-          </a:prstGeom>
-          <a:noFill/>
-          <a:ln/>
-        </p:spPr>
-        <p:txBody>
-          <a:bodyPr wrap="square" lIns="0" tIns="0" rIns="0" bIns="0" rtlCol="0" anchor="t"/>
-          <a:lstStyle/>
-          <a:p>
-            <a:pPr marL="0" indent="0">
-              <a:lnSpc>
-                <a:spcPct val="110000"/>
-              </a:lnSpc>
-              <a:buNone/>
-            </a:pPr>
-            <a:r>
-              <a:rPr lang="en-US" sz="1030" b="1" dirty="0">
-                <a:solidFill>
-                  <a:srgbClr val="1E2761"/>
-                </a:solidFill>
-                <a:latin typeface="Calibri" pitchFamily="34" charset="0"/>
-                <a:ea typeface="Calibri" pitchFamily="34" charset="-122"/>
-                <a:cs typeface="Calibri" pitchFamily="34" charset="-120"/>
-              </a:rPr>
-              <a:t>Tangible: </a:t>
-            </a:r>
-            <a:r>
-              <a:rPr lang="en-US" sz="1030" dirty="0">
-                <a:solidFill>
-                  <a:srgbClr val="27314D"/>
-                </a:solidFill>
-                <a:latin typeface="Calibri" pitchFamily="34" charset="0"/>
-                <a:ea typeface="Calibri" pitchFamily="34" charset="-122"/>
-                <a:cs typeface="Calibri" pitchFamily="34" charset="-120"/>
-              </a:rPr>
-              <a:t>su valor depende de sus propiedades físicas (inmuebles, maquinaria, equipo).</a:t>
-            </a:r>
-            <a:endParaRPr lang="en-US" sz="1030" dirty="0"/>
-          </a:p>
-        </p:txBody>
-      </p:sp>
-      <p:sp>
-        <p:nvSpPr>
-          <p:cNvPr id="15" name="Shape 11"/>
-          <p:cNvSpPr/>
-          <p:nvPr/>
-        </p:nvSpPr>
-        <p:spPr>
-          <a:xfrm>
-            <a:off x="932688" y="4407408"/>
-            <a:ext cx="82296" cy="82296"/>
-          </a:xfrm>
-          <a:prstGeom prst="ellipse">
-            <a:avLst/>
-          </a:prstGeom>
-          <a:solidFill>
-            <a:srgbClr val="C9A227"/>
-          </a:solidFill>
-          <a:ln/>
-        </p:spPr>
-        <p:txBody>
-          <a:bodyPr/>
-          <a:lstStyle/>
-          <a:p>
-            <a:endParaRPr/>
-          </a:p>
-        </p:txBody>
-      </p:sp>
-      <p:sp>
-        <p:nvSpPr>
-          <p:cNvPr id="16" name="Text 12"/>
-          <p:cNvSpPr/>
-          <p:nvPr/>
-        </p:nvSpPr>
-        <p:spPr>
-          <a:xfrm>
-            <a:off x="1143000" y="4270248"/>
-            <a:ext cx="4069080" cy="658368"/>
-          </a:xfrm>
-          <a:prstGeom prst="rect">
-            <a:avLst/>
-          </a:prstGeom>
-          <a:noFill/>
-          <a:ln/>
-        </p:spPr>
-        <p:txBody>
-          <a:bodyPr wrap="square" lIns="0" tIns="0" rIns="0" bIns="0" rtlCol="0" anchor="t"/>
-          <a:lstStyle/>
-          <a:p>
-            <a:pPr marL="0" indent="0">
-              <a:lnSpc>
-                <a:spcPct val="110000"/>
-              </a:lnSpc>
-              <a:buNone/>
-            </a:pPr>
-            <a:r>
-              <a:rPr lang="en-US" sz="1030" b="1" dirty="0">
-                <a:solidFill>
-                  <a:srgbClr val="1E2761"/>
-                </a:solidFill>
-                <a:latin typeface="Calibri" pitchFamily="34" charset="0"/>
-                <a:ea typeface="Calibri" pitchFamily="34" charset="-122"/>
-                <a:cs typeface="Calibri" pitchFamily="34" charset="-120"/>
-              </a:rPr>
-              <a:t>Intangible: </a:t>
-            </a:r>
-            <a:r>
-              <a:rPr lang="en-US" sz="1030" dirty="0">
-                <a:solidFill>
-                  <a:srgbClr val="27314D"/>
-                </a:solidFill>
-                <a:latin typeface="Calibri" pitchFamily="34" charset="0"/>
-                <a:ea typeface="Calibri" pitchFamily="34" charset="-122"/>
-                <a:cs typeface="Calibri" pitchFamily="34" charset="-120"/>
-              </a:rPr>
-              <a:t>es un derecho legal sobre beneficios futuros, sin relación con una forma física.</a:t>
-            </a:r>
-            <a:endParaRPr lang="en-US" sz="1030" dirty="0"/>
-          </a:p>
-        </p:txBody>
-      </p:sp>
-      <p:sp>
-        <p:nvSpPr>
-          <p:cNvPr id="17" name="Shape 13"/>
-          <p:cNvSpPr/>
-          <p:nvPr/>
-        </p:nvSpPr>
-        <p:spPr>
-          <a:xfrm>
-            <a:off x="6611112" y="1965960"/>
-            <a:ext cx="4937760" cy="3063240"/>
-          </a:xfrm>
-          <a:prstGeom prst="roundRect">
-            <a:avLst>
-              <a:gd name="adj" fmla="val 2985"/>
-            </a:avLst>
-          </a:prstGeom>
-          <a:solidFill>
-            <a:srgbClr val="1E2761"/>
-          </a:solidFill>
-          <a:ln/>
-        </p:spPr>
-        <p:txBody>
-          <a:bodyPr/>
-          <a:lstStyle/>
-          <a:p>
-            <a:endParaRPr/>
-          </a:p>
-        </p:txBody>
-      </p:sp>
-      <p:sp>
-        <p:nvSpPr>
-          <p:cNvPr id="18" name="Shape 14"/>
-          <p:cNvSpPr/>
-          <p:nvPr/>
-        </p:nvSpPr>
-        <p:spPr>
-          <a:xfrm>
-            <a:off x="6903720" y="2240280"/>
-            <a:ext cx="566928" cy="566928"/>
-          </a:xfrm>
-          <a:prstGeom prst="ellipse">
-            <a:avLst/>
-          </a:prstGeom>
-          <a:solidFill>
-            <a:srgbClr val="C9A227"/>
-          </a:solidFill>
-          <a:ln/>
-        </p:spPr>
-        <p:txBody>
-          <a:bodyPr/>
-          <a:lstStyle/>
-          <a:p>
-            <a:endParaRPr/>
-          </a:p>
-        </p:txBody>
-      </p:sp>
       <p:pic>
         <p:nvPicPr>
-          <p:cNvPr id="19" name="Image 2" descr="/tmp/work/deck/icons/exchange_navy.png"/>
+          <p:cNvPr id="18" name="Image 2" descr="/tmp/work/deck/icons/handholding_navy.png"/>
           <p:cNvPicPr>
             <a:picLocks noChangeAspect="1"/>
           </p:cNvPicPr>
@@ -4103,8 +3657,8 @@
         </p:blipFill>
         <p:spPr>
           <a:xfrm>
-            <a:off x="7039783" y="2376343"/>
-            <a:ext cx="294803" cy="294803"/>
+            <a:off x="7967350" y="2435230"/>
+            <a:ext cx="323332" cy="323332"/>
           </a:xfrm>
           <a:prstGeom prst="rect">
             <a:avLst/>
@@ -4113,14 +3667,14 @@
       </p:pic>
       <p:sp>
         <p:nvSpPr>
-          <p:cNvPr id="20" name="Text 15"/>
-          <p:cNvSpPr/>
-          <p:nvPr/>
-        </p:nvSpPr>
-        <p:spPr>
-          <a:xfrm>
-            <a:off x="7616952" y="2267712"/>
-            <a:ext cx="3657600" cy="310896"/>
+          <p:cNvPr id="19" name="Text 14"/>
+          <p:cNvSpPr/>
+          <p:nvPr/>
+        </p:nvSpPr>
+        <p:spPr>
+          <a:xfrm>
+            <a:off x="7818120" y="3063240"/>
+            <a:ext cx="3383280" cy="457200"/>
           </a:xfrm>
           <a:prstGeom prst="rect">
             <a:avLst/>
@@ -4136,7 +3690,7 @@
               <a:buNone/>
             </a:pPr>
             <a:r>
-              <a:rPr lang="en-US" sz="1650" b="1" dirty="0">
+              <a:rPr lang="en-US" sz="1600" b="1" dirty="0">
                 <a:solidFill>
                   <a:srgbClr val="FFFFFF"/>
                 </a:solidFill>
@@ -4144,22 +3698,22 @@
                 <a:ea typeface="Cambria" pitchFamily="34" charset="-122"/>
                 <a:cs typeface="Cambria" pitchFamily="34" charset="-120"/>
               </a:rPr>
-              <a:t>Activo financiero</a:t>
-            </a:r>
-            <a:endParaRPr lang="en-US" sz="1650" dirty="0"/>
-          </a:p>
-        </p:txBody>
-      </p:sp>
-      <p:sp>
-        <p:nvSpPr>
-          <p:cNvPr id="21" name="Text 16"/>
-          <p:cNvSpPr/>
-          <p:nvPr/>
-        </p:nvSpPr>
-        <p:spPr>
-          <a:xfrm>
-            <a:off x="7616952" y="2578608"/>
-            <a:ext cx="3657600" cy="237744"/>
+              <a:t>Unidades deficitarias</a:t>
+            </a:r>
+            <a:endParaRPr lang="en-US" sz="1600" dirty="0"/>
+          </a:p>
+        </p:txBody>
+      </p:sp>
+      <p:sp>
+        <p:nvSpPr>
+          <p:cNvPr id="20" name="Text 15"/>
+          <p:cNvSpPr/>
+          <p:nvPr/>
+        </p:nvSpPr>
+        <p:spPr>
+          <a:xfrm>
+            <a:off x="7818120" y="3538728"/>
+            <a:ext cx="3383280" cy="1234440"/>
           </a:xfrm>
           <a:prstGeom prst="rect">
             <a:avLst/>
@@ -4172,20 +3726,52 @@
           <a:lstStyle/>
           <a:p>
             <a:pPr marL="0" indent="0">
-              <a:buNone/>
-            </a:pPr>
-            <a:r>
-              <a:rPr lang="en-US" sz="900" b="1" kern="0" spc="100" dirty="0">
-                <a:solidFill>
-                  <a:srgbClr val="C9A227"/>
+              <a:lnSpc>
+                <a:spcPct val="120000"/>
+              </a:lnSpc>
+              <a:buNone/>
+            </a:pPr>
+            <a:r>
+              <a:rPr lang="en-US" sz="1200" dirty="0">
+                <a:solidFill>
+                  <a:srgbClr val="CADCFC"/>
                 </a:solidFill>
                 <a:latin typeface="Calibri" pitchFamily="34" charset="0"/>
                 <a:ea typeface="Calibri" pitchFamily="34" charset="-122"/>
                 <a:cs typeface="Calibri" pitchFamily="34" charset="-120"/>
               </a:rPr>
-              <a:t>ACTIVO INTANGIBLE · INSTRUMENTO FINANCIERO</a:t>
-            </a:r>
-            <a:endParaRPr lang="en-US" sz="900" dirty="0"/>
+              <a:t>Empresas, gobierno y personas que necesitan financiamiento para operar, invertir o consumir.</a:t>
+            </a:r>
+            <a:endParaRPr lang="en-US" sz="1200" dirty="0"/>
+          </a:p>
+        </p:txBody>
+      </p:sp>
+      <p:sp>
+        <p:nvSpPr>
+          <p:cNvPr id="21" name="Shape 16"/>
+          <p:cNvSpPr/>
+          <p:nvPr/>
+        </p:nvSpPr>
+        <p:spPr>
+          <a:xfrm>
+            <a:off x="640080" y="5120640"/>
+            <a:ext cx="10908792" cy="914400"/>
+          </a:xfrm>
+          <a:prstGeom prst="roundRect">
+            <a:avLst>
+              <a:gd name="adj" fmla="val 8000"/>
+            </a:avLst>
+          </a:prstGeom>
+          <a:solidFill>
+            <a:srgbClr val="EEF3FC"/>
+          </a:solidFill>
+          <a:ln/>
+        </p:spPr>
+        <p:txBody>
+          <a:bodyPr/>
+          <a:lstStyle/>
+          <a:p>
+            <a:endParaRPr/>
           </a:p>
         </p:txBody>
       </p:sp>
@@ -4197,8 +3783,47 @@
         </p:nvSpPr>
         <p:spPr>
           <a:xfrm>
-            <a:off x="6903720" y="2953512"/>
-            <a:ext cx="4352544" cy="640080"/>
+            <a:off x="777240" y="5010912"/>
+            <a:ext cx="548640" cy="822960"/>
+          </a:xfrm>
+          <a:prstGeom prst="rect">
+            <a:avLst/>
+          </a:prstGeom>
+          <a:noFill/>
+          <a:ln/>
+        </p:spPr>
+        <p:txBody>
+          <a:bodyPr wrap="square" lIns="0" tIns="0" rIns="0" bIns="0" rtlCol="0" anchor="ctr"/>
+          <a:lstStyle/>
+          <a:p>
+            <a:pPr marL="0" indent="0">
+              <a:buNone/>
+            </a:pPr>
+            <a:r>
+              <a:rPr lang="en-US" sz="4600" b="1" dirty="0">
+                <a:solidFill>
+                  <a:srgbClr val="C9A227"/>
+                </a:solidFill>
+                <a:latin typeface="Cambria" pitchFamily="34" charset="0"/>
+                <a:ea typeface="Cambria" pitchFamily="34" charset="-122"/>
+                <a:cs typeface="Cambria" pitchFamily="34" charset="-120"/>
+              </a:rPr>
+              <a:t>“</a:t>
+            </a:r>
+            <a:endParaRPr lang="en-US" sz="4600" dirty="0"/>
+          </a:p>
+        </p:txBody>
+      </p:sp>
+      <p:sp>
+        <p:nvSpPr>
+          <p:cNvPr id="23" name="Text 18"/>
+          <p:cNvSpPr/>
+          <p:nvPr/>
+        </p:nvSpPr>
+        <p:spPr>
+          <a:xfrm>
+            <a:off x="1325880" y="5212080"/>
+            <a:ext cx="9966960" cy="731520"/>
           </a:xfrm>
           <a:prstGeom prst="rect">
             <a:avLst/>
@@ -4217,372 +3842,65 @@
               <a:buNone/>
             </a:pPr>
             <a:r>
-              <a:rPr lang="en-US" sz="1080" dirty="0">
-                <a:solidFill>
-                  <a:srgbClr val="CADCFC"/>
+              <a:rPr lang="en-US" sz="1200" i="1" dirty="0">
+                <a:solidFill>
+                  <a:srgbClr val="1E2761"/>
                 </a:solidFill>
                 <a:latin typeface="Calibri" pitchFamily="34" charset="0"/>
                 <a:ea typeface="Calibri" pitchFamily="34" charset="-122"/>
                 <a:cs typeface="Calibri" pitchFamily="34" charset="-120"/>
               </a:rPr>
-              <a:t>Activo intangible cuyo beneficio futuro es un derecho sobre efectivo futuro. Si se negocia en mercados organizados, se le llama valor (security).</a:t>
-            </a:r>
-            <a:endParaRPr lang="en-US" sz="1080" dirty="0"/>
-          </a:p>
-        </p:txBody>
-      </p:sp>
-      <p:sp>
-        <p:nvSpPr>
-          <p:cNvPr id="23" name="Shape 18"/>
-          <p:cNvSpPr/>
-          <p:nvPr/>
-        </p:nvSpPr>
-        <p:spPr>
-          <a:xfrm>
-            <a:off x="6903720" y="3730752"/>
-            <a:ext cx="82296" cy="82296"/>
-          </a:xfrm>
-          <a:prstGeom prst="ellipse">
-            <a:avLst/>
-          </a:prstGeom>
-          <a:solidFill>
-            <a:srgbClr val="C9A227"/>
-          </a:solidFill>
-          <a:ln/>
-        </p:spPr>
-        <p:txBody>
-          <a:bodyPr/>
-          <a:lstStyle/>
-          <a:p>
-            <a:endParaRPr/>
-          </a:p>
-        </p:txBody>
-      </p:sp>
-      <p:sp>
-        <p:nvSpPr>
-          <p:cNvPr id="24" name="Text 19"/>
-          <p:cNvSpPr/>
-          <p:nvPr/>
-        </p:nvSpPr>
-        <p:spPr>
-          <a:xfrm>
-            <a:off x="7114032" y="3593592"/>
-            <a:ext cx="4069080" cy="658368"/>
-          </a:xfrm>
-          <a:prstGeom prst="rect">
-            <a:avLst/>
-          </a:prstGeom>
-          <a:noFill/>
-          <a:ln/>
-        </p:spPr>
-        <p:txBody>
-          <a:bodyPr wrap="square" lIns="0" tIns="0" rIns="0" bIns="0" rtlCol="0" anchor="t"/>
-          <a:lstStyle/>
-          <a:p>
-            <a:pPr marL="0" indent="0">
-              <a:lnSpc>
-                <a:spcPct val="110000"/>
-              </a:lnSpc>
-              <a:buNone/>
-            </a:pPr>
-            <a:r>
-              <a:rPr lang="en-US" sz="1030" b="1" dirty="0">
-                <a:solidFill>
-                  <a:srgbClr val="C9A227"/>
+              <a:t>El mercado financiero tiene por objeto canalizar recursos de las unidades superavitarias de la economía a las unidades deficitarias.</a:t>
+            </a:r>
+            <a:r>
+              <a:rPr lang="en-US" sz="1200" b="1" dirty="0">
+                <a:solidFill>
+                  <a:srgbClr val="5B6482"/>
                 </a:solidFill>
                 <a:latin typeface="Calibri" pitchFamily="34" charset="0"/>
                 <a:ea typeface="Calibri" pitchFamily="34" charset="-122"/>
                 <a:cs typeface="Calibri" pitchFamily="34" charset="-120"/>
               </a:rPr>
-              <a:t>Emisor: </a:t>
-            </a:r>
-            <a:r>
-              <a:rPr lang="en-US" sz="1030" dirty="0">
-                <a:solidFill>
-                  <a:srgbClr val="CADCFC"/>
+              <a:t>  — Mántey de Anguiano (2024), Lección 2</a:t>
+            </a:r>
+            <a:endParaRPr lang="en-US" sz="1200" dirty="0"/>
+          </a:p>
+        </p:txBody>
+      </p:sp>
+      <p:sp>
+        <p:nvSpPr>
+          <p:cNvPr id="24" name="Text 19"/>
+          <p:cNvSpPr/>
+          <p:nvPr/>
+        </p:nvSpPr>
+        <p:spPr>
+          <a:xfrm>
+            <a:off x="11365992" y="6446520"/>
+            <a:ext cx="548640" cy="274320"/>
+          </a:xfrm>
+          <a:prstGeom prst="rect">
+            <a:avLst/>
+          </a:prstGeom>
+          <a:noFill/>
+          <a:ln/>
+        </p:spPr>
+        <p:txBody>
+          <a:bodyPr wrap="square" rtlCol="0" anchor="ctr"/>
+          <a:lstStyle/>
+          <a:p>
+            <a:pPr marL="0" indent="0" algn="r">
+              <a:buNone/>
+            </a:pPr>
+            <a:r>
+              <a:rPr lang="en-US" sz="1000" dirty="0">
+                <a:solidFill>
+                  <a:srgbClr val="A6ADC7"/>
                 </a:solidFill>
                 <a:latin typeface="Calibri" pitchFamily="34" charset="0"/>
                 <a:ea typeface="Calibri" pitchFamily="34" charset="-122"/>
                 <a:cs typeface="Calibri" pitchFamily="34" charset="-120"/>
               </a:rPr>
-              <a:t>se compromete a realizar los pagos futuros.</a:t>
-            </a:r>
-            <a:endParaRPr lang="en-US" sz="1030" dirty="0"/>
-          </a:p>
-        </p:txBody>
-      </p:sp>
-      <p:sp>
-        <p:nvSpPr>
-          <p:cNvPr id="25" name="Shape 20"/>
-          <p:cNvSpPr/>
-          <p:nvPr/>
-        </p:nvSpPr>
-        <p:spPr>
-          <a:xfrm>
-            <a:off x="6903720" y="4407408"/>
-            <a:ext cx="82296" cy="82296"/>
-          </a:xfrm>
-          <a:prstGeom prst="ellipse">
-            <a:avLst/>
-          </a:prstGeom>
-          <a:solidFill>
-            <a:srgbClr val="C9A227"/>
-          </a:solidFill>
-          <a:ln/>
-        </p:spPr>
-        <p:txBody>
-          <a:bodyPr/>
-          <a:lstStyle/>
-          <a:p>
-            <a:endParaRPr/>
-          </a:p>
-        </p:txBody>
-      </p:sp>
-      <p:sp>
-        <p:nvSpPr>
-          <p:cNvPr id="26" name="Text 21"/>
-          <p:cNvSpPr/>
-          <p:nvPr/>
-        </p:nvSpPr>
-        <p:spPr>
-          <a:xfrm>
-            <a:off x="7114032" y="4270248"/>
-            <a:ext cx="4069080" cy="658368"/>
-          </a:xfrm>
-          <a:prstGeom prst="rect">
-            <a:avLst/>
-          </a:prstGeom>
-          <a:noFill/>
-          <a:ln/>
-        </p:spPr>
-        <p:txBody>
-          <a:bodyPr wrap="square" lIns="0" tIns="0" rIns="0" bIns="0" rtlCol="0" anchor="t"/>
-          <a:lstStyle/>
-          <a:p>
-            <a:pPr marL="0" indent="0">
-              <a:lnSpc>
-                <a:spcPct val="110000"/>
-              </a:lnSpc>
-              <a:buNone/>
-            </a:pPr>
-            <a:r>
-              <a:rPr lang="en-US" sz="1030" b="1" dirty="0">
-                <a:solidFill>
-                  <a:srgbClr val="C9A227"/>
-                </a:solidFill>
-                <a:latin typeface="Calibri" pitchFamily="34" charset="0"/>
-                <a:ea typeface="Calibri" pitchFamily="34" charset="-122"/>
-                <a:cs typeface="Calibri" pitchFamily="34" charset="-120"/>
-              </a:rPr>
-              <a:t>Inversionista: </a:t>
-            </a:r>
-            <a:r>
-              <a:rPr lang="en-US" sz="1030" dirty="0">
-                <a:solidFill>
-                  <a:srgbClr val="CADCFC"/>
-                </a:solidFill>
-                <a:latin typeface="Calibri" pitchFamily="34" charset="0"/>
-                <a:ea typeface="Calibri" pitchFamily="34" charset="-122"/>
-                <a:cs typeface="Calibri" pitchFamily="34" charset="-120"/>
-              </a:rPr>
-              <a:t>posee el instrumento y tiene derecho a recibir esos pagos.</a:t>
-            </a:r>
-            <a:endParaRPr lang="en-US" sz="1030" dirty="0"/>
-          </a:p>
-        </p:txBody>
-      </p:sp>
-      <p:sp>
-        <p:nvSpPr>
-          <p:cNvPr id="27" name="Shape 22"/>
-          <p:cNvSpPr/>
-          <p:nvPr/>
-        </p:nvSpPr>
-        <p:spPr>
-          <a:xfrm>
-            <a:off x="640080" y="5212080"/>
-            <a:ext cx="10908792" cy="548640"/>
-          </a:xfrm>
-          <a:prstGeom prst="roundRect">
-            <a:avLst>
-              <a:gd name="adj" fmla="val 13333"/>
-            </a:avLst>
-          </a:prstGeom>
-          <a:solidFill>
-            <a:srgbClr val="EEF3FC"/>
-          </a:solidFill>
-          <a:ln/>
-        </p:spPr>
-        <p:txBody>
-          <a:bodyPr/>
-          <a:lstStyle/>
-          <a:p>
-            <a:endParaRPr/>
-          </a:p>
-        </p:txBody>
-      </p:sp>
-      <p:sp>
-        <p:nvSpPr>
-          <p:cNvPr id="28" name="Shape 23"/>
-          <p:cNvSpPr/>
-          <p:nvPr/>
-        </p:nvSpPr>
-        <p:spPr>
-          <a:xfrm>
-            <a:off x="777240" y="5312664"/>
-            <a:ext cx="347472" cy="347472"/>
-          </a:xfrm>
-          <a:prstGeom prst="ellipse">
-            <a:avLst/>
-          </a:prstGeom>
-          <a:solidFill>
-            <a:srgbClr val="1E2761"/>
-          </a:solidFill>
-          <a:ln/>
-        </p:spPr>
-        <p:txBody>
-          <a:bodyPr/>
-          <a:lstStyle/>
-          <a:p>
-            <a:endParaRPr/>
-          </a:p>
-        </p:txBody>
-      </p:sp>
-      <p:pic>
-        <p:nvPicPr>
-          <p:cNvPr id="29" name="Image 3" descr="/tmp/work/deck/icons/balance_navy.png"/>
-          <p:cNvPicPr>
-            <a:picLocks noChangeAspect="1"/>
-          </p:cNvPicPr>
-          <p:nvPr/>
-        </p:nvPicPr>
-        <p:blipFill>
-          <a:blip r:embed="rId6"/>
-          <a:stretch>
-            <a:fillRect/>
-          </a:stretch>
-        </p:blipFill>
-        <p:spPr>
-          <a:xfrm>
-            <a:off x="860633" y="5396057"/>
-            <a:ext cx="180685" cy="180685"/>
-          </a:xfrm>
-          <a:prstGeom prst="rect">
-            <a:avLst/>
-          </a:prstGeom>
-        </p:spPr>
-      </p:pic>
-      <p:sp>
-        <p:nvSpPr>
-          <p:cNvPr id="30" name="Text 24"/>
-          <p:cNvSpPr/>
-          <p:nvPr/>
-        </p:nvSpPr>
-        <p:spPr>
-          <a:xfrm>
-            <a:off x="1280160" y="5212080"/>
-            <a:ext cx="10058400" cy="548640"/>
-          </a:xfrm>
-          <a:prstGeom prst="rect">
-            <a:avLst/>
-          </a:prstGeom>
-          <a:noFill/>
-          <a:ln/>
-        </p:spPr>
-        <p:txBody>
-          <a:bodyPr wrap="square" lIns="0" tIns="0" rIns="0" bIns="0" rtlCol="0" anchor="ctr"/>
-          <a:lstStyle/>
-          <a:p>
-            <a:pPr marL="0" indent="0">
-              <a:buNone/>
-            </a:pPr>
-            <a:r>
-              <a:rPr lang="en-US" sz="1080" i="1" dirty="0">
-                <a:solidFill>
-                  <a:srgbClr val="1E2761"/>
-                </a:solidFill>
-                <a:latin typeface="Calibri" pitchFamily="34" charset="0"/>
-                <a:ea typeface="Calibri" pitchFamily="34" charset="-122"/>
-                <a:cs typeface="Calibri" pitchFamily="34" charset="-120"/>
-              </a:rPr>
-              <a:t>Todo instrumento financiero involucra, como mínimo, dos partes: el emisor (unidad deficitaria) y el inversionista (unidad superavitaria).</a:t>
-            </a:r>
-            <a:endParaRPr lang="en-US" sz="1080" dirty="0"/>
-          </a:p>
-        </p:txBody>
-      </p:sp>
-      <p:sp>
-        <p:nvSpPr>
-          <p:cNvPr id="31" name="Text 25"/>
-          <p:cNvSpPr/>
-          <p:nvPr/>
-        </p:nvSpPr>
-        <p:spPr>
-          <a:xfrm>
-            <a:off x="640080" y="6400800"/>
-            <a:ext cx="9418320" cy="274320"/>
-          </a:xfrm>
-          <a:prstGeom prst="rect">
-            <a:avLst/>
-          </a:prstGeom>
-          <a:noFill/>
-          <a:ln/>
-        </p:spPr>
-        <p:txBody>
-          <a:bodyPr wrap="square" rtlCol="0" anchor="ctr"/>
-          <a:lstStyle/>
-          <a:p>
-            <a:pPr marL="0" indent="0">
-              <a:buNone/>
-            </a:pPr>
-            <a:r>
-              <a:rPr lang="en-US" sz="950" i="1" dirty="0">
-                <a:solidFill>
-                  <a:srgbClr val="5B6482"/>
-                </a:solidFill>
-                <a:latin typeface="Calibri" pitchFamily="34" charset="0"/>
-                <a:ea typeface="Calibri" pitchFamily="34" charset="-122"/>
-                <a:cs typeface="Calibri" pitchFamily="34" charset="-120"/>
-              </a:rPr>
-              <a:t>Fuente: Fabozzi, F. J. y Peterson Drake, P. (2009). Finance: Capital Markets, Financial Management, and Investment Management, Cap. 4, Wiley.</a:t>
-            </a:r>
-            <a:endParaRPr lang="en-US" sz="950" dirty="0"/>
-          </a:p>
-        </p:txBody>
-      </p:sp>
-      <p:sp>
-        <p:nvSpPr>
-          <p:cNvPr id="32" name="Text 26"/>
-          <p:cNvSpPr/>
-          <p:nvPr/>
-        </p:nvSpPr>
-        <p:spPr>
-          <a:xfrm>
-            <a:off x="11365992" y="6446520"/>
-            <a:ext cx="548640" cy="274320"/>
-          </a:xfrm>
-          <a:prstGeom prst="rect">
-            <a:avLst/>
-          </a:prstGeom>
-          <a:noFill/>
-          <a:ln/>
-        </p:spPr>
-        <p:txBody>
-          <a:bodyPr wrap="square" rtlCol="0" anchor="ctr"/>
-          <a:lstStyle/>
-          <a:p>
-            <a:pPr marL="0" indent="0" algn="r">
-              <a:buNone/>
-            </a:pPr>
-            <a:r>
-              <a:rPr lang="en-US" sz="1000" dirty="0">
-                <a:solidFill>
-                  <a:srgbClr val="A6ADC7"/>
-                </a:solidFill>
-                <a:latin typeface="Calibri" pitchFamily="34" charset="0"/>
-                <a:ea typeface="Calibri" pitchFamily="34" charset="-122"/>
-                <a:cs typeface="Calibri" pitchFamily="34" charset="-120"/>
-              </a:rPr>
-              <a:t>05</a:t>
+              <a:t>04</a:t>
             </a:r>
             <a:endParaRPr lang="en-US" sz="1000" dirty="0"/>
           </a:p>
@@ -4646,7 +3964,7 @@
                 <a:ea typeface="Calibri" pitchFamily="34" charset="-122"/>
                 <a:cs typeface="Calibri" pitchFamily="34" charset="-120"/>
               </a:rPr>
-              <a:t>ACTIVO FINANCIERO E INTERMEDIACIÓN · 6 MIN</a:t>
+              <a:t>INTERMEDIACIÓN FINANCIERA · 11 MIN</a:t>
             </a:r>
             <a:endParaRPr lang="en-US" sz="1200" dirty="0"/>
           </a:p>
@@ -4654,20 +3972,132 @@
       </p:sp>
       <p:sp>
         <p:nvSpPr>
-          <p:cNvPr id="3" name="Shape 1"/>
-          <p:cNvSpPr/>
-          <p:nvPr/>
-        </p:nvSpPr>
-        <p:spPr>
-          <a:xfrm>
-            <a:off x="10771632" y="457200"/>
-            <a:ext cx="640080" cy="640080"/>
+          <p:cNvPr id="3" name="Text 1"/>
+          <p:cNvSpPr/>
+          <p:nvPr/>
+        </p:nvSpPr>
+        <p:spPr>
+          <a:xfrm>
+            <a:off x="640080" y="749808"/>
+            <a:ext cx="9601200" cy="777240"/>
+          </a:xfrm>
+          <a:prstGeom prst="rect">
+            <a:avLst/>
+          </a:prstGeom>
+          <a:noFill/>
+          <a:ln/>
+        </p:spPr>
+        <p:txBody>
+          <a:bodyPr wrap="square" lIns="0" tIns="0" rIns="0" bIns="0" rtlCol="0" anchor="ctr"/>
+          <a:lstStyle/>
+          <a:p>
+            <a:pPr marL="0" indent="0">
+              <a:buNone/>
+            </a:pPr>
+            <a:r>
+              <a:rPr lang="en-US" sz="3200" b="1" dirty="0">
+                <a:solidFill>
+                  <a:srgbClr val="1E2761"/>
+                </a:solidFill>
+                <a:latin typeface="Cambria" pitchFamily="34" charset="0"/>
+                <a:ea typeface="Cambria" pitchFamily="34" charset="-122"/>
+                <a:cs typeface="Cambria" pitchFamily="34" charset="-120"/>
+              </a:rPr>
+              <a:t>Dos caminos para el crédito</a:t>
+            </a:r>
+            <a:endParaRPr lang="en-US" sz="3200" dirty="0"/>
+          </a:p>
+        </p:txBody>
+      </p:sp>
+      <p:sp>
+        <p:nvSpPr>
+          <p:cNvPr id="4" name="Text 2"/>
+          <p:cNvSpPr/>
+          <p:nvPr/>
+        </p:nvSpPr>
+        <p:spPr>
+          <a:xfrm>
+            <a:off x="640080" y="1481328"/>
+            <a:ext cx="9692640" cy="365760"/>
+          </a:xfrm>
+          <a:prstGeom prst="rect">
+            <a:avLst/>
+          </a:prstGeom>
+          <a:noFill/>
+          <a:ln/>
+        </p:spPr>
+        <p:txBody>
+          <a:bodyPr wrap="square" lIns="0" tIns="0" rIns="0" bIns="0" rtlCol="0" anchor="ctr"/>
+          <a:lstStyle/>
+          <a:p>
+            <a:pPr marL="0" indent="0">
+              <a:buNone/>
+            </a:pPr>
+            <a:r>
+              <a:rPr lang="en-US" sz="1400" dirty="0">
+                <a:solidFill>
+                  <a:srgbClr val="5B6482"/>
+                </a:solidFill>
+                <a:latin typeface="Calibri" pitchFamily="34" charset="0"/>
+                <a:ea typeface="Calibri" pitchFamily="34" charset="-122"/>
+                <a:cs typeface="Calibri" pitchFamily="34" charset="-120"/>
+              </a:rPr>
+              <a:t>La intermediación bancaria y el mercado bursátil canalizan el ahorro de formas distintas.</a:t>
+            </a:r>
+            <a:endParaRPr lang="en-US" sz="1400" dirty="0"/>
+          </a:p>
+        </p:txBody>
+      </p:sp>
+      <p:sp>
+        <p:nvSpPr>
+          <p:cNvPr id="5" name="Shape 3"/>
+          <p:cNvSpPr/>
+          <p:nvPr/>
+        </p:nvSpPr>
+        <p:spPr>
+          <a:xfrm>
+            <a:off x="640080" y="2103120"/>
+            <a:ext cx="5257800" cy="3703320"/>
+          </a:xfrm>
+          <a:prstGeom prst="roundRect">
+            <a:avLst>
+              <a:gd name="adj" fmla="val 2469"/>
+            </a:avLst>
+          </a:prstGeom>
+          <a:solidFill>
+            <a:srgbClr val="FFFFFF"/>
+          </a:solidFill>
+          <a:ln w="15875">
+            <a:solidFill>
+              <a:srgbClr val="E1E7F5"/>
+            </a:solidFill>
+            <a:prstDash val="solid"/>
+          </a:ln>
+        </p:spPr>
+        <p:txBody>
+          <a:bodyPr/>
+          <a:lstStyle/>
+          <a:p>
+            <a:endParaRPr/>
+          </a:p>
+        </p:txBody>
+      </p:sp>
+      <p:sp>
+        <p:nvSpPr>
+          <p:cNvPr id="6" name="Shape 4"/>
+          <p:cNvSpPr/>
+          <p:nvPr/>
+        </p:nvSpPr>
+        <p:spPr>
+          <a:xfrm>
+            <a:off x="1005840" y="2468880"/>
+            <a:ext cx="621792" cy="621792"/>
           </a:xfrm>
           <a:prstGeom prst="ellipse">
             <a:avLst/>
           </a:prstGeom>
           <a:solidFill>
-            <a:srgbClr val="EEF3FC"/>
+            <a:srgbClr val="1E2761"/>
           </a:solidFill>
           <a:ln/>
         </p:spPr>
@@ -4681,7 +4111,7 @@
       </p:sp>
       <p:pic>
         <p:nvPicPr>
-          <p:cNvPr id="4" name="Image 0" descr="/tmp/work/deck/icons/coins_navy.png"/>
+          <p:cNvPr id="7" name="Image 0" descr="/tmp/work/deck/icons/university_navy.png"/>
           <p:cNvPicPr>
             <a:picLocks noChangeAspect="1"/>
           </p:cNvPicPr>
@@ -4695,8 +4125,8 @@
         </p:blipFill>
         <p:spPr>
           <a:xfrm>
-            <a:off x="10931652" y="617220"/>
-            <a:ext cx="320040" cy="320040"/>
+            <a:off x="1155070" y="2618110"/>
+            <a:ext cx="323332" cy="323332"/>
           </a:xfrm>
           <a:prstGeom prst="rect">
             <a:avLst/>
@@ -4705,14 +4135,14 @@
       </p:pic>
       <p:sp>
         <p:nvSpPr>
-          <p:cNvPr id="5" name="Text 2"/>
-          <p:cNvSpPr/>
-          <p:nvPr/>
-        </p:nvSpPr>
-        <p:spPr>
-          <a:xfrm>
-            <a:off x="640080" y="749808"/>
-            <a:ext cx="9601200" cy="777240"/>
+          <p:cNvPr id="8" name="Text 5"/>
+          <p:cNvSpPr/>
+          <p:nvPr/>
+        </p:nvSpPr>
+        <p:spPr>
+          <a:xfrm>
+            <a:off x="1783080" y="2487168"/>
+            <a:ext cx="3794760" cy="347472"/>
           </a:xfrm>
           <a:prstGeom prst="rect">
             <a:avLst/>
@@ -4728,7 +4158,7 @@
               <a:buNone/>
             </a:pPr>
             <a:r>
-              <a:rPr lang="en-US" sz="3200" b="1" dirty="0">
+              <a:rPr lang="en-US" sz="1700" b="1" dirty="0">
                 <a:solidFill>
                   <a:srgbClr val="1E2761"/>
                 </a:solidFill>
@@ -4736,22 +4166,22 @@
                 <a:ea typeface="Cambria" pitchFamily="34" charset="-122"/>
                 <a:cs typeface="Cambria" pitchFamily="34" charset="-120"/>
               </a:rPr>
-              <a:t>¿Por qué existen los mercados financieros?</a:t>
-            </a:r>
-            <a:endParaRPr lang="en-US" sz="3200" dirty="0"/>
-          </a:p>
-        </p:txBody>
-      </p:sp>
-      <p:sp>
-        <p:nvSpPr>
-          <p:cNvPr id="6" name="Text 3"/>
-          <p:cNvSpPr/>
-          <p:nvPr/>
-        </p:nvSpPr>
-        <p:spPr>
-          <a:xfrm>
-            <a:off x="640080" y="1481328"/>
-            <a:ext cx="9692640" cy="365760"/>
+              <a:t>Intermediación bancaria</a:t>
+            </a:r>
+            <a:endParaRPr lang="en-US" sz="1700" dirty="0"/>
+          </a:p>
+        </p:txBody>
+      </p:sp>
+      <p:sp>
+        <p:nvSpPr>
+          <p:cNvPr id="9" name="Text 6"/>
+          <p:cNvSpPr/>
+          <p:nvPr/>
+        </p:nvSpPr>
+        <p:spPr>
+          <a:xfrm>
+            <a:off x="1783080" y="2816352"/>
+            <a:ext cx="3794760" cy="256032"/>
           </a:xfrm>
           <a:prstGeom prst="rect">
             <a:avLst/>
@@ -4767,251 +4197,36 @@
               <a:buNone/>
             </a:pPr>
             <a:r>
-              <a:rPr lang="en-US" sz="1400" dirty="0">
-                <a:solidFill>
-                  <a:srgbClr val="5B6482"/>
+              <a:rPr lang="en-US" sz="1050" b="1" kern="0" spc="100" dirty="0">
+                <a:solidFill>
+                  <a:srgbClr val="C9A227"/>
                 </a:solidFill>
                 <a:latin typeface="Calibri" pitchFamily="34" charset="0"/>
                 <a:ea typeface="Calibri" pitchFamily="34" charset="-122"/>
                 <a:cs typeface="Calibri" pitchFamily="34" charset="-120"/>
               </a:rPr>
-              <a:t>El propósito de un mercado financiero es canalizar recursos de quienes ahorran hacia quienes los necesitan.</a:t>
-            </a:r>
-            <a:endParaRPr lang="en-US" sz="1400" dirty="0"/>
-          </a:p>
-        </p:txBody>
-      </p:sp>
-      <p:sp>
-        <p:nvSpPr>
-          <p:cNvPr id="31" name="Text 25"/>
-          <p:cNvSpPr/>
-          <p:nvPr/>
-        </p:nvSpPr>
-        <p:spPr>
-          <a:xfrm>
-            <a:off x="640080" y="6400800"/>
-            <a:ext cx="9418320" cy="274320"/>
-          </a:xfrm>
-          <a:prstGeom prst="rect">
-            <a:avLst/>
-          </a:prstGeom>
-          <a:noFill/>
-          <a:ln/>
-        </p:spPr>
-        <p:txBody>
-          <a:bodyPr wrap="square" rtlCol="0" anchor="ctr"/>
-          <a:lstStyle/>
-          <a:p>
-            <a:pPr marL="0" indent="0">
-              <a:buNone/>
-            </a:pPr>
-            <a:r>
-              <a:rPr lang="en-US" sz="950" i="1" dirty="0">
-                <a:solidFill>
-                  <a:srgbClr val="5B6482"/>
-                </a:solidFill>
-                <a:latin typeface="Calibri" pitchFamily="34" charset="0"/>
-                <a:ea typeface="Calibri" pitchFamily="34" charset="-122"/>
-                <a:cs typeface="Calibri" pitchFamily="34" charset="-120"/>
-              </a:rPr>
-              <a:t>Fuente: Linton, O. (2019). Financial Econometrics: Models and Methods, Cap. 1 "Introduction and Background", §1.1, p. 1, Cambridge University Press.</a:t>
-            </a:r>
-            <a:endParaRPr lang="en-US" sz="950" dirty="0"/>
-          </a:p>
-        </p:txBody>
-      </p:sp>
-      <p:sp>
-        <p:nvSpPr>
-          <p:cNvPr id="32" name="Text 26"/>
-          <p:cNvSpPr/>
-          <p:nvPr/>
-        </p:nvSpPr>
-        <p:spPr>
-          <a:xfrm>
-            <a:off x="11365992" y="6446520"/>
-            <a:ext cx="548640" cy="274320"/>
-          </a:xfrm>
-          <a:prstGeom prst="rect">
-            <a:avLst/>
-          </a:prstGeom>
-          <a:noFill/>
-          <a:ln/>
-        </p:spPr>
-        <p:txBody>
-          <a:bodyPr wrap="square" rtlCol="0" anchor="ctr"/>
-          <a:lstStyle/>
-          <a:p>
-            <a:pPr marL="0" indent="0" algn="r">
-              <a:buNone/>
-            </a:pPr>
-            <a:r>
-              <a:rPr lang="en-US" sz="1000" dirty="0">
-                <a:solidFill>
-                  <a:srgbClr val="A6ADC7"/>
-                </a:solidFill>
-                <a:latin typeface="Calibri" pitchFamily="34" charset="0"/>
-                <a:ea typeface="Calibri" pitchFamily="34" charset="-122"/>
-                <a:cs typeface="Calibri" pitchFamily="34" charset="-120"/>
-              </a:rPr>
-              <a:t>04</a:t>
-            </a:r>
-            <a:endParaRPr lang="en-US" sz="1000" dirty="0"/>
-          </a:p>
-        </p:txBody>
-      </p:sp>
-      <p:sp>
-        <p:nvSpPr>
-          <p:cNvPr id="33" name="TextBox 32"/>
-          <p:cNvSpPr txBox="1"/>
-          <p:nvPr/>
-        </p:nvSpPr>
-        <p:spPr>
-          <a:xfrm>
-            <a:off x="640080" y="2011680"/>
-            <a:ext cx="10908792" cy="2606040"/>
-          </a:xfrm>
-          <a:prstGeom prst="rect">
-            <a:avLst/>
-          </a:prstGeom>
-          <a:noFill/>
-        </p:spPr>
-        <p:txBody>
-          <a:bodyPr wrap="square">
-            <a:spAutoFit/>
-          </a:bodyPr>
-          <a:lstStyle/>
-          <a:p>
-            <a:pPr>
-              <a:lnSpc>
-                <a:spcPct val="115000"/>
-              </a:lnSpc>
-              <a:spcAft>
-                <a:spcPts val="1000"/>
-              </a:spcAft>
-            </a:pPr>
-            <a:r>
-              <a:rPr sz="1350" b="1" i="0">
-                <a:solidFill>
-                  <a:srgbClr val="1E2761"/>
-                </a:solidFill>
-                <a:latin typeface="Calibri"/>
-              </a:rPr>
-              <a:t>Suavizar el consumo: </a:t>
-            </a:r>
-            <a:r>
-              <a:rPr sz="1350" b="0" i="0">
-                <a:solidFill>
-                  <a:srgbClr val="5B6482"/>
-                </a:solidFill>
-                <a:latin typeface="Calibri"/>
-              </a:rPr>
-              <a:t>las personas prefieren mantener su consumo relativamente estable en el tiempo y ante eventos inesperados.</a:t>
-            </a:r>
-          </a:p>
-          <a:p>
-            <a:pPr>
-              <a:lnSpc>
-                <a:spcPct val="115000"/>
-              </a:lnSpc>
-              <a:spcAft>
-                <a:spcPts val="1000"/>
-              </a:spcAft>
-            </a:pPr>
-            <a:r>
-              <a:rPr sz="1350" b="1" i="0">
-                <a:solidFill>
-                  <a:srgbClr val="1E2761"/>
-                </a:solidFill>
-                <a:latin typeface="Calibri"/>
-              </a:rPr>
-              <a:t>Diversificar el riesgo individual: </a:t>
-            </a:r>
-            <a:r>
-              <a:rPr sz="1350" b="0" i="0">
-                <a:solidFill>
-                  <a:srgbClr val="5B6482"/>
-                </a:solidFill>
-                <a:latin typeface="Calibri"/>
-              </a:rPr>
-              <a:t>juntar los ahorros de muchas personas permite financiar proyectos grandes que nadie podría costear solo.</a:t>
-            </a:r>
-          </a:p>
-          <a:p>
-            <a:pPr>
-              <a:lnSpc>
-                <a:spcPct val="115000"/>
-              </a:lnSpc>
-              <a:spcAft>
-                <a:spcPts val="1000"/>
-              </a:spcAft>
-            </a:pPr>
-            <a:r>
-              <a:rPr sz="1350" b="1" i="0">
-                <a:solidFill>
-                  <a:srgbClr val="1E2761"/>
-                </a:solidFill>
-                <a:latin typeface="Calibri"/>
-              </a:rPr>
-              <a:t>Eficiencia y crecimiento económico: </a:t>
-            </a:r>
-            <a:r>
-              <a:rPr sz="1350" b="0" i="0">
-                <a:solidFill>
-                  <a:srgbClr val="5B6482"/>
-                </a:solidFill>
-                <a:latin typeface="Calibri"/>
-              </a:rPr>
-              <a:t>hay ganancia para la economía cuando quienes tienen proyectos productivos piden prestado a quienes ahorran.</a:t>
-            </a:r>
-          </a:p>
-          <a:p>
-            <a:pPr>
-              <a:lnSpc>
-                <a:spcPct val="115000"/>
-              </a:lnSpc>
-              <a:spcAft>
-                <a:spcPts val="1000"/>
-              </a:spcAft>
-            </a:pPr>
-            <a:r>
-              <a:rPr sz="1350" b="1" i="0">
-                <a:solidFill>
-                  <a:srgbClr val="1E2761"/>
-                </a:solidFill>
-                <a:latin typeface="Calibri"/>
-              </a:rPr>
-              <a:t>Transferencia de riesgo: </a:t>
-            </a:r>
-            <a:r>
-              <a:rPr sz="1350" b="0" i="0">
-                <a:solidFill>
-                  <a:srgbClr val="5B6482"/>
-                </a:solidFill>
-                <a:latin typeface="Calibri"/>
-              </a:rPr>
-              <a:t>los mercados permiten que quien no quiere un riesgo se lo transfiera a alguien dispuesto a tomarlo.</a:t>
-            </a:r>
-          </a:p>
-        </p:txBody>
-      </p:sp>
-      <p:sp>
-        <p:nvSpPr>
-          <p:cNvPr id="21" name="Shape 16"/>
-          <p:cNvSpPr/>
-          <p:nvPr/>
-        </p:nvSpPr>
-        <p:spPr>
-          <a:xfrm>
-            <a:off x="640080" y="5120640"/>
-            <a:ext cx="10908792" cy="914400"/>
-          </a:xfrm>
-          <a:prstGeom prst="roundRect">
-            <a:avLst>
-              <a:gd name="adj" fmla="val 8000"/>
-            </a:avLst>
+              <a:t>CRÉDITO INDIRECTO</a:t>
+            </a:r>
+            <a:endParaRPr lang="en-US" sz="1050" dirty="0"/>
+          </a:p>
+        </p:txBody>
+      </p:sp>
+      <p:sp>
+        <p:nvSpPr>
+          <p:cNvPr id="10" name="Shape 7"/>
+          <p:cNvSpPr/>
+          <p:nvPr/>
+        </p:nvSpPr>
+        <p:spPr>
+          <a:xfrm>
+            <a:off x="1024128" y="3465576"/>
+            <a:ext cx="82296" cy="82296"/>
+          </a:xfrm>
+          <a:prstGeom prst="ellipse">
+            <a:avLst/>
           </a:prstGeom>
           <a:solidFill>
-            <a:srgbClr val="EEF3FC"/>
+            <a:srgbClr val="C9A227"/>
           </a:solidFill>
           <a:ln/>
         </p:spPr>
@@ -5025,53 +4240,14 @@
       </p:sp>
       <p:sp>
         <p:nvSpPr>
-          <p:cNvPr id="22" name="Text 17"/>
-          <p:cNvSpPr/>
-          <p:nvPr/>
-        </p:nvSpPr>
-        <p:spPr>
-          <a:xfrm>
-            <a:off x="777240" y="5010912"/>
-            <a:ext cx="548640" cy="822960"/>
-          </a:xfrm>
-          <a:prstGeom prst="rect">
-            <a:avLst/>
-          </a:prstGeom>
-          <a:noFill/>
-          <a:ln/>
-        </p:spPr>
-        <p:txBody>
-          <a:bodyPr wrap="square" lIns="0" tIns="0" rIns="0" bIns="0" rtlCol="0" anchor="ctr"/>
-          <a:lstStyle/>
-          <a:p>
-            <a:pPr marL="0" indent="0">
-              <a:buNone/>
-            </a:pPr>
-            <a:r>
-              <a:rPr lang="en-US" sz="4600" b="1" dirty="0">
-                <a:solidFill>
-                  <a:srgbClr val="C9A227"/>
-                </a:solidFill>
-                <a:latin typeface="Cambria" pitchFamily="34" charset="0"/>
-                <a:ea typeface="Cambria" pitchFamily="34" charset="-122"/>
-                <a:cs typeface="Cambria" pitchFamily="34" charset="-120"/>
-              </a:rPr>
-              <a:t>“</a:t>
-            </a:r>
-            <a:endParaRPr lang="en-US" sz="4600" dirty="0"/>
-          </a:p>
-        </p:txBody>
-      </p:sp>
-      <p:sp>
-        <p:nvSpPr>
-          <p:cNvPr id="23" name="Text 18"/>
-          <p:cNvSpPr/>
-          <p:nvPr/>
-        </p:nvSpPr>
-        <p:spPr>
-          <a:xfrm>
-            <a:off x="1325880" y="5212080"/>
-            <a:ext cx="9966960" cy="731520"/>
+          <p:cNvPr id="11" name="Text 8"/>
+          <p:cNvSpPr/>
+          <p:nvPr/>
+        </p:nvSpPr>
+        <p:spPr>
+          <a:xfrm>
+            <a:off x="1234440" y="3328416"/>
+            <a:ext cx="4297680" cy="685800"/>
           </a:xfrm>
           <a:prstGeom prst="rect">
             <a:avLst/>
@@ -5090,28 +4266,603 @@
               <a:buNone/>
             </a:pPr>
             <a:r>
-              <a:rPr lang="en-US" sz="1200" i="1" dirty="0">
-                <a:solidFill>
-                  <a:srgbClr val="1E2761"/>
+              <a:rPr lang="en-US" sz="1200" dirty="0">
+                <a:solidFill>
+                  <a:srgbClr val="27314D"/>
                 </a:solidFill>
                 <a:latin typeface="Calibri" pitchFamily="34" charset="0"/>
                 <a:ea typeface="Calibri" pitchFamily="34" charset="-122"/>
                 <a:cs typeface="Calibri" pitchFamily="34" charset="-120"/>
               </a:rPr>
-              <a:t>Los activos financieros no son la riqueza real de una economía: son títulos sobre el ingreso que generan los activos reales.</a:t>
-            </a:r>
-            <a:r>
-              <a:rPr lang="en-US" sz="1200" b="1" dirty="0">
-                <a:solidFill>
-                  <a:srgbClr val="5B6482"/>
+              <a:t>El banco capta depósitos y emite deudas propias (indirectas): pagarés, certificados de depósito.</a:t>
+            </a:r>
+            <a:endParaRPr lang="en-US" sz="1200" dirty="0"/>
+          </a:p>
+        </p:txBody>
+      </p:sp>
+      <p:sp>
+        <p:nvSpPr>
+          <p:cNvPr id="12" name="Shape 9"/>
+          <p:cNvSpPr/>
+          <p:nvPr/>
+        </p:nvSpPr>
+        <p:spPr>
+          <a:xfrm>
+            <a:off x="1024128" y="4215384"/>
+            <a:ext cx="82296" cy="82296"/>
+          </a:xfrm>
+          <a:prstGeom prst="ellipse">
+            <a:avLst/>
+          </a:prstGeom>
+          <a:solidFill>
+            <a:srgbClr val="C9A227"/>
+          </a:solidFill>
+          <a:ln/>
+        </p:spPr>
+        <p:txBody>
+          <a:bodyPr/>
+          <a:lstStyle/>
+          <a:p>
+            <a:endParaRPr/>
+          </a:p>
+        </p:txBody>
+      </p:sp>
+      <p:sp>
+        <p:nvSpPr>
+          <p:cNvPr id="13" name="Text 10"/>
+          <p:cNvSpPr/>
+          <p:nvPr/>
+        </p:nvSpPr>
+        <p:spPr>
+          <a:xfrm>
+            <a:off x="1234440" y="4078224"/>
+            <a:ext cx="4297680" cy="685800"/>
+          </a:xfrm>
+          <a:prstGeom prst="rect">
+            <a:avLst/>
+          </a:prstGeom>
+          <a:noFill/>
+          <a:ln/>
+        </p:spPr>
+        <p:txBody>
+          <a:bodyPr wrap="square" lIns="0" tIns="0" rIns="0" bIns="0" rtlCol="0" anchor="ctr"/>
+          <a:lstStyle/>
+          <a:p>
+            <a:pPr marL="0" indent="0">
+              <a:lnSpc>
+                <a:spcPct val="115000"/>
+              </a:lnSpc>
+              <a:buNone/>
+            </a:pPr>
+            <a:r>
+              <a:rPr lang="en-US" sz="1200" dirty="0">
+                <a:solidFill>
+                  <a:srgbClr val="27314D"/>
                 </a:solidFill>
                 <a:latin typeface="Calibri" pitchFamily="34" charset="0"/>
                 <a:ea typeface="Calibri" pitchFamily="34" charset="-122"/>
                 <a:cs typeface="Calibri" pitchFamily="34" charset="-120"/>
               </a:rPr>
-              <a:t>  — Linton (2019), Cap. 1</a:t>
+              <a:t>El banco asume el riesgo y presta directamente a empresas, personas y gobierno.</a:t>
             </a:r>
             <a:endParaRPr lang="en-US" sz="1200" dirty="0"/>
+          </a:p>
+        </p:txBody>
+      </p:sp>
+      <p:sp>
+        <p:nvSpPr>
+          <p:cNvPr id="14" name="Shape 11"/>
+          <p:cNvSpPr/>
+          <p:nvPr/>
+        </p:nvSpPr>
+        <p:spPr>
+          <a:xfrm>
+            <a:off x="1024128" y="4965192"/>
+            <a:ext cx="82296" cy="82296"/>
+          </a:xfrm>
+          <a:prstGeom prst="ellipse">
+            <a:avLst/>
+          </a:prstGeom>
+          <a:solidFill>
+            <a:srgbClr val="C9A227"/>
+          </a:solidFill>
+          <a:ln/>
+        </p:spPr>
+        <p:txBody>
+          <a:bodyPr/>
+          <a:lstStyle/>
+          <a:p>
+            <a:endParaRPr/>
+          </a:p>
+        </p:txBody>
+      </p:sp>
+      <p:sp>
+        <p:nvSpPr>
+          <p:cNvPr id="15" name="Text 12"/>
+          <p:cNvSpPr/>
+          <p:nvPr/>
+        </p:nvSpPr>
+        <p:spPr>
+          <a:xfrm>
+            <a:off x="1234440" y="4828032"/>
+            <a:ext cx="4297680" cy="685800"/>
+          </a:xfrm>
+          <a:prstGeom prst="rect">
+            <a:avLst/>
+          </a:prstGeom>
+          <a:noFill/>
+          <a:ln/>
+        </p:spPr>
+        <p:txBody>
+          <a:bodyPr wrap="square" lIns="0" tIns="0" rIns="0" bIns="0" rtlCol="0" anchor="ctr"/>
+          <a:lstStyle/>
+          <a:p>
+            <a:pPr marL="0" indent="0">
+              <a:lnSpc>
+                <a:spcPct val="115000"/>
+              </a:lnSpc>
+              <a:buNone/>
+            </a:pPr>
+            <a:r>
+              <a:rPr lang="en-US" sz="1200" dirty="0">
+                <a:solidFill>
+                  <a:srgbClr val="27314D"/>
+                </a:solidFill>
+                <a:latin typeface="Calibri" pitchFamily="34" charset="0"/>
+                <a:ea typeface="Calibri" pitchFamily="34" charset="-122"/>
+                <a:cs typeface="Calibri" pitchFamily="34" charset="-120"/>
+              </a:rPr>
+              <a:t>Ejemplo: una persona ahorra en el banco y este otorga un crédito a una empresa.</a:t>
+            </a:r>
+            <a:endParaRPr lang="en-US" sz="1200" dirty="0"/>
+          </a:p>
+        </p:txBody>
+      </p:sp>
+      <p:sp>
+        <p:nvSpPr>
+          <p:cNvPr id="16" name="Shape 13"/>
+          <p:cNvSpPr/>
+          <p:nvPr/>
+        </p:nvSpPr>
+        <p:spPr>
+          <a:xfrm>
+            <a:off x="6263640" y="2103120"/>
+            <a:ext cx="5257800" cy="3703320"/>
+          </a:xfrm>
+          <a:prstGeom prst="roundRect">
+            <a:avLst>
+              <a:gd name="adj" fmla="val 2469"/>
+            </a:avLst>
+          </a:prstGeom>
+          <a:solidFill>
+            <a:srgbClr val="FFFFFF"/>
+          </a:solidFill>
+          <a:ln w="15875">
+            <a:solidFill>
+              <a:srgbClr val="E1E7F5"/>
+            </a:solidFill>
+            <a:prstDash val="solid"/>
+          </a:ln>
+        </p:spPr>
+        <p:txBody>
+          <a:bodyPr/>
+          <a:lstStyle/>
+          <a:p>
+            <a:endParaRPr/>
+          </a:p>
+        </p:txBody>
+      </p:sp>
+      <p:sp>
+        <p:nvSpPr>
+          <p:cNvPr id="17" name="Shape 14"/>
+          <p:cNvSpPr/>
+          <p:nvPr/>
+        </p:nvSpPr>
+        <p:spPr>
+          <a:xfrm>
+            <a:off x="6629400" y="2468880"/>
+            <a:ext cx="621792" cy="621792"/>
+          </a:xfrm>
+          <a:prstGeom prst="ellipse">
+            <a:avLst/>
+          </a:prstGeom>
+          <a:solidFill>
+            <a:srgbClr val="1E2761"/>
+          </a:solidFill>
+          <a:ln/>
+        </p:spPr>
+        <p:txBody>
+          <a:bodyPr/>
+          <a:lstStyle/>
+          <a:p>
+            <a:endParaRPr/>
+          </a:p>
+        </p:txBody>
+      </p:sp>
+      <p:pic>
+        <p:nvPicPr>
+          <p:cNvPr id="18" name="Image 1" descr="/tmp/work/deck/icons/chartline_navy.png"/>
+          <p:cNvPicPr>
+            <a:picLocks noChangeAspect="1"/>
+          </p:cNvPicPr>
+          <p:nvPr/>
+        </p:nvPicPr>
+        <p:blipFill>
+          <a:blip r:embed="rId4"/>
+          <a:stretch>
+            <a:fillRect/>
+          </a:stretch>
+        </p:blipFill>
+        <p:spPr>
+          <a:xfrm>
+            <a:off x="6778630" y="2618110"/>
+            <a:ext cx="323332" cy="323332"/>
+          </a:xfrm>
+          <a:prstGeom prst="rect">
+            <a:avLst/>
+          </a:prstGeom>
+        </p:spPr>
+      </p:pic>
+      <p:sp>
+        <p:nvSpPr>
+          <p:cNvPr id="19" name="Text 15"/>
+          <p:cNvSpPr/>
+          <p:nvPr/>
+        </p:nvSpPr>
+        <p:spPr>
+          <a:xfrm>
+            <a:off x="7406640" y="2487168"/>
+            <a:ext cx="3794760" cy="347472"/>
+          </a:xfrm>
+          <a:prstGeom prst="rect">
+            <a:avLst/>
+          </a:prstGeom>
+          <a:noFill/>
+          <a:ln/>
+        </p:spPr>
+        <p:txBody>
+          <a:bodyPr wrap="square" lIns="0" tIns="0" rIns="0" bIns="0" rtlCol="0" anchor="ctr"/>
+          <a:lstStyle/>
+          <a:p>
+            <a:pPr marL="0" indent="0">
+              <a:buNone/>
+            </a:pPr>
+            <a:r>
+              <a:rPr lang="en-US" sz="1700" b="1" dirty="0">
+                <a:solidFill>
+                  <a:srgbClr val="1E2761"/>
+                </a:solidFill>
+                <a:latin typeface="Cambria" pitchFamily="34" charset="0"/>
+                <a:ea typeface="Cambria" pitchFamily="34" charset="-122"/>
+                <a:cs typeface="Cambria" pitchFamily="34" charset="-120"/>
+              </a:rPr>
+              <a:t>Mercado bursátil</a:t>
+            </a:r>
+            <a:endParaRPr lang="en-US" sz="1700" dirty="0"/>
+          </a:p>
+        </p:txBody>
+      </p:sp>
+      <p:sp>
+        <p:nvSpPr>
+          <p:cNvPr id="20" name="Text 16"/>
+          <p:cNvSpPr/>
+          <p:nvPr/>
+        </p:nvSpPr>
+        <p:spPr>
+          <a:xfrm>
+            <a:off x="7406640" y="2816352"/>
+            <a:ext cx="3794760" cy="256032"/>
+          </a:xfrm>
+          <a:prstGeom prst="rect">
+            <a:avLst/>
+          </a:prstGeom>
+          <a:noFill/>
+          <a:ln/>
+        </p:spPr>
+        <p:txBody>
+          <a:bodyPr wrap="square" lIns="0" tIns="0" rIns="0" bIns="0" rtlCol="0" anchor="ctr"/>
+          <a:lstStyle/>
+          <a:p>
+            <a:pPr marL="0" indent="0">
+              <a:buNone/>
+            </a:pPr>
+            <a:r>
+              <a:rPr lang="en-US" sz="1050" b="1" kern="0" spc="100" dirty="0">
+                <a:solidFill>
+                  <a:srgbClr val="C9A227"/>
+                </a:solidFill>
+                <a:latin typeface="Calibri" pitchFamily="34" charset="0"/>
+                <a:ea typeface="Calibri" pitchFamily="34" charset="-122"/>
+                <a:cs typeface="Calibri" pitchFamily="34" charset="-120"/>
+              </a:rPr>
+              <a:t>CRÉDITO DIRECTO</a:t>
+            </a:r>
+            <a:endParaRPr lang="en-US" sz="1050" dirty="0"/>
+          </a:p>
+        </p:txBody>
+      </p:sp>
+      <p:sp>
+        <p:nvSpPr>
+          <p:cNvPr id="21" name="Shape 17"/>
+          <p:cNvSpPr/>
+          <p:nvPr/>
+        </p:nvSpPr>
+        <p:spPr>
+          <a:xfrm>
+            <a:off x="6647688" y="3465576"/>
+            <a:ext cx="82296" cy="82296"/>
+          </a:xfrm>
+          <a:prstGeom prst="ellipse">
+            <a:avLst/>
+          </a:prstGeom>
+          <a:solidFill>
+            <a:srgbClr val="C9A227"/>
+          </a:solidFill>
+          <a:ln/>
+        </p:spPr>
+        <p:txBody>
+          <a:bodyPr/>
+          <a:lstStyle/>
+          <a:p>
+            <a:endParaRPr/>
+          </a:p>
+        </p:txBody>
+      </p:sp>
+      <p:sp>
+        <p:nvSpPr>
+          <p:cNvPr id="22" name="Text 18"/>
+          <p:cNvSpPr/>
+          <p:nvPr/>
+        </p:nvSpPr>
+        <p:spPr>
+          <a:xfrm>
+            <a:off x="6858000" y="3328416"/>
+            <a:ext cx="4297680" cy="685800"/>
+          </a:xfrm>
+          <a:prstGeom prst="rect">
+            <a:avLst/>
+          </a:prstGeom>
+          <a:noFill/>
+          <a:ln/>
+        </p:spPr>
+        <p:txBody>
+          <a:bodyPr wrap="square" lIns="0" tIns="0" rIns="0" bIns="0" rtlCol="0" anchor="ctr"/>
+          <a:lstStyle/>
+          <a:p>
+            <a:pPr marL="0" indent="0">
+              <a:lnSpc>
+                <a:spcPct val="115000"/>
+              </a:lnSpc>
+              <a:buNone/>
+            </a:pPr>
+            <a:r>
+              <a:rPr lang="en-US" sz="1200" dirty="0">
+                <a:solidFill>
+                  <a:srgbClr val="27314D"/>
+                </a:solidFill>
+                <a:latin typeface="Calibri" pitchFamily="34" charset="0"/>
+                <a:ea typeface="Calibri" pitchFamily="34" charset="-122"/>
+                <a:cs typeface="Calibri" pitchFamily="34" charset="-120"/>
+              </a:rPr>
+              <a:t>Empresas y gobierno emiten deudas propias (directas): bonos, papel comercial, acciones.</a:t>
+            </a:r>
+            <a:endParaRPr lang="en-US" sz="1200" dirty="0"/>
+          </a:p>
+        </p:txBody>
+      </p:sp>
+      <p:sp>
+        <p:nvSpPr>
+          <p:cNvPr id="23" name="Shape 19"/>
+          <p:cNvSpPr/>
+          <p:nvPr/>
+        </p:nvSpPr>
+        <p:spPr>
+          <a:xfrm>
+            <a:off x="6647688" y="4215384"/>
+            <a:ext cx="82296" cy="82296"/>
+          </a:xfrm>
+          <a:prstGeom prst="ellipse">
+            <a:avLst/>
+          </a:prstGeom>
+          <a:solidFill>
+            <a:srgbClr val="C9A227"/>
+          </a:solidFill>
+          <a:ln/>
+        </p:spPr>
+        <p:txBody>
+          <a:bodyPr/>
+          <a:lstStyle/>
+          <a:p>
+            <a:endParaRPr/>
+          </a:p>
+        </p:txBody>
+      </p:sp>
+      <p:sp>
+        <p:nvSpPr>
+          <p:cNvPr id="24" name="Text 20"/>
+          <p:cNvSpPr/>
+          <p:nvPr/>
+        </p:nvSpPr>
+        <p:spPr>
+          <a:xfrm>
+            <a:off x="6858000" y="4078224"/>
+            <a:ext cx="4297680" cy="685800"/>
+          </a:xfrm>
+          <a:prstGeom prst="rect">
+            <a:avLst/>
+          </a:prstGeom>
+          <a:noFill/>
+          <a:ln/>
+        </p:spPr>
+        <p:txBody>
+          <a:bodyPr wrap="square" lIns="0" tIns="0" rIns="0" bIns="0" rtlCol="0" anchor="ctr"/>
+          <a:lstStyle/>
+          <a:p>
+            <a:pPr marL="0" indent="0">
+              <a:lnSpc>
+                <a:spcPct val="115000"/>
+              </a:lnSpc>
+              <a:buNone/>
+            </a:pPr>
+            <a:r>
+              <a:rPr lang="en-US" sz="1200" dirty="0">
+                <a:solidFill>
+                  <a:srgbClr val="27314D"/>
+                </a:solidFill>
+                <a:latin typeface="Calibri" pitchFamily="34" charset="0"/>
+                <a:ea typeface="Calibri" pitchFamily="34" charset="-122"/>
+                <a:cs typeface="Calibri" pitchFamily="34" charset="-120"/>
+              </a:rPr>
+              <a:t>El inversionista asume el riesgo directamente frente al emisor del título.</a:t>
+            </a:r>
+            <a:endParaRPr lang="en-US" sz="1200" dirty="0"/>
+          </a:p>
+        </p:txBody>
+      </p:sp>
+      <p:sp>
+        <p:nvSpPr>
+          <p:cNvPr id="25" name="Shape 21"/>
+          <p:cNvSpPr/>
+          <p:nvPr/>
+        </p:nvSpPr>
+        <p:spPr>
+          <a:xfrm>
+            <a:off x="6647688" y="4965192"/>
+            <a:ext cx="82296" cy="82296"/>
+          </a:xfrm>
+          <a:prstGeom prst="ellipse">
+            <a:avLst/>
+          </a:prstGeom>
+          <a:solidFill>
+            <a:srgbClr val="C9A227"/>
+          </a:solidFill>
+          <a:ln/>
+        </p:spPr>
+        <p:txBody>
+          <a:bodyPr/>
+          <a:lstStyle/>
+          <a:p>
+            <a:endParaRPr/>
+          </a:p>
+        </p:txBody>
+      </p:sp>
+      <p:sp>
+        <p:nvSpPr>
+          <p:cNvPr id="26" name="Text 22"/>
+          <p:cNvSpPr/>
+          <p:nvPr/>
+        </p:nvSpPr>
+        <p:spPr>
+          <a:xfrm>
+            <a:off x="6858000" y="4828032"/>
+            <a:ext cx="4297680" cy="685800"/>
+          </a:xfrm>
+          <a:prstGeom prst="rect">
+            <a:avLst/>
+          </a:prstGeom>
+          <a:noFill/>
+          <a:ln/>
+        </p:spPr>
+        <p:txBody>
+          <a:bodyPr wrap="square" lIns="0" tIns="0" rIns="0" bIns="0" rtlCol="0" anchor="ctr"/>
+          <a:lstStyle/>
+          <a:p>
+            <a:pPr marL="0" indent="0">
+              <a:lnSpc>
+                <a:spcPct val="115000"/>
+              </a:lnSpc>
+              <a:buNone/>
+            </a:pPr>
+            <a:r>
+              <a:rPr lang="en-US" sz="1200" dirty="0">
+                <a:solidFill>
+                  <a:srgbClr val="27314D"/>
+                </a:solidFill>
+                <a:latin typeface="Calibri" pitchFamily="34" charset="0"/>
+                <a:ea typeface="Calibri" pitchFamily="34" charset="-122"/>
+                <a:cs typeface="Calibri" pitchFamily="34" charset="-120"/>
+              </a:rPr>
+              <a:t>Ejemplo: una empresa coloca certificados de deuda en la bolsa de valores.</a:t>
+            </a:r>
+            <a:endParaRPr lang="en-US" sz="1200" dirty="0"/>
+          </a:p>
+        </p:txBody>
+      </p:sp>
+      <p:sp>
+        <p:nvSpPr>
+          <p:cNvPr id="27" name="Text 23"/>
+          <p:cNvSpPr/>
+          <p:nvPr/>
+        </p:nvSpPr>
+        <p:spPr>
+          <a:xfrm>
+            <a:off x="640080" y="6400800"/>
+            <a:ext cx="9418320" cy="274320"/>
+          </a:xfrm>
+          <a:prstGeom prst="rect">
+            <a:avLst/>
+          </a:prstGeom>
+          <a:noFill/>
+          <a:ln/>
+        </p:spPr>
+        <p:txBody>
+          <a:bodyPr wrap="square" rtlCol="0" anchor="ctr"/>
+          <a:lstStyle/>
+          <a:p>
+            <a:pPr marL="0" indent="0">
+              <a:buNone/>
+            </a:pPr>
+            <a:r>
+              <a:rPr lang="en-US" sz="950" i="1" dirty="0">
+                <a:solidFill>
+                  <a:srgbClr val="5B6482"/>
+                </a:solidFill>
+                <a:latin typeface="Calibri" pitchFamily="34" charset="0"/>
+                <a:ea typeface="Calibri" pitchFamily="34" charset="-122"/>
+                <a:cs typeface="Calibri" pitchFamily="34" charset="-120"/>
+              </a:rPr>
+              <a:t>Fuente: Mántey de Anguiano, G. (2024). Lecciones de Economía Monetaria, Lección 2, UNAM.</a:t>
+            </a:r>
+            <a:endParaRPr lang="en-US" sz="950" dirty="0"/>
+          </a:p>
+        </p:txBody>
+      </p:sp>
+      <p:sp>
+        <p:nvSpPr>
+          <p:cNvPr id="28" name="Text 24"/>
+          <p:cNvSpPr/>
+          <p:nvPr/>
+        </p:nvSpPr>
+        <p:spPr>
+          <a:xfrm>
+            <a:off x="11365992" y="6446520"/>
+            <a:ext cx="548640" cy="274320"/>
+          </a:xfrm>
+          <a:prstGeom prst="rect">
+            <a:avLst/>
+          </a:prstGeom>
+          <a:noFill/>
+          <a:ln/>
+        </p:spPr>
+        <p:txBody>
+          <a:bodyPr wrap="square" rtlCol="0" anchor="ctr"/>
+          <a:lstStyle/>
+          <a:p>
+            <a:pPr marL="0" indent="0" algn="r">
+              <a:buNone/>
+            </a:pPr>
+            <a:r>
+              <a:rPr lang="en-US" sz="1000" dirty="0">
+                <a:solidFill>
+                  <a:srgbClr val="A6ADC7"/>
+                </a:solidFill>
+                <a:latin typeface="Calibri" pitchFamily="34" charset="0"/>
+                <a:ea typeface="Calibri" pitchFamily="34" charset="-122"/>
+                <a:cs typeface="Calibri" pitchFamily="34" charset="-120"/>
+              </a:rPr>
+              <a:t>05</a:t>
+            </a:r>
+            <a:endParaRPr lang="en-US" sz="1000" dirty="0"/>
           </a:p>
         </p:txBody>
       </p:sp>
@@ -5173,7 +4924,7 @@
                 <a:ea typeface="Calibri" pitchFamily="34" charset="-122"/>
                 <a:cs typeface="Calibri" pitchFamily="34" charset="-120"/>
               </a:rPr>
-              <a:t>ACTIVO FINANCIERO E INTERMEDIACIÓN · 12 MIN</a:t>
+              <a:t>INTERMEDIACIÓN FINANCIERA · 10 MIN</a:t>
             </a:r>
             <a:endParaRPr lang="en-US" sz="1200" dirty="0"/>
           </a:p>
@@ -5181,17 +4932,97 @@
       </p:sp>
       <p:sp>
         <p:nvSpPr>
-          <p:cNvPr id="3" name="Shape 1"/>
-          <p:cNvSpPr/>
-          <p:nvPr/>
-        </p:nvSpPr>
-        <p:spPr>
-          <a:xfrm>
-            <a:off x="10771632" y="457200"/>
-            <a:ext cx="640080" cy="640080"/>
-          </a:xfrm>
-          <a:prstGeom prst="ellipse">
-            <a:avLst/>
+          <p:cNvPr id="5" name="Text 2"/>
+          <p:cNvSpPr/>
+          <p:nvPr/>
+        </p:nvSpPr>
+        <p:spPr>
+          <a:xfrm>
+            <a:off x="640080" y="749808"/>
+            <a:ext cx="9601200" cy="777240"/>
+          </a:xfrm>
+          <a:prstGeom prst="rect">
+            <a:avLst/>
+          </a:prstGeom>
+          <a:noFill/>
+          <a:ln/>
+        </p:spPr>
+        <p:txBody>
+          <a:bodyPr wrap="square" lIns="0" tIns="0" rIns="0" bIns="0" rtlCol="0" anchor="ctr"/>
+          <a:lstStyle/>
+          <a:p>
+            <a:pPr marL="0" indent="0">
+              <a:buNone/>
+            </a:pPr>
+            <a:r>
+              <a:rPr lang="en-US" sz="3200" b="1" dirty="0">
+                <a:solidFill>
+                  <a:srgbClr val="1E2761"/>
+                </a:solidFill>
+                <a:latin typeface="Cambria" pitchFamily="34" charset="0"/>
+                <a:ea typeface="Cambria" pitchFamily="34" charset="-122"/>
+                <a:cs typeface="Cambria" pitchFamily="34" charset="-120"/>
+              </a:rPr>
+              <a:t>El ciclo de captación-colocación</a:t>
+            </a:r>
+            <a:endParaRPr lang="en-US" sz="3200" dirty="0"/>
+          </a:p>
+        </p:txBody>
+      </p:sp>
+      <p:sp>
+        <p:nvSpPr>
+          <p:cNvPr id="6" name="Text 3"/>
+          <p:cNvSpPr/>
+          <p:nvPr/>
+        </p:nvSpPr>
+        <p:spPr>
+          <a:xfrm>
+            <a:off x="640080" y="1481328"/>
+            <a:ext cx="9692640" cy="365760"/>
+          </a:xfrm>
+          <a:prstGeom prst="rect">
+            <a:avLst/>
+          </a:prstGeom>
+          <a:noFill/>
+          <a:ln/>
+        </p:spPr>
+        <p:txBody>
+          <a:bodyPr wrap="square" lIns="0" tIns="0" rIns="0" bIns="0" rtlCol="0" anchor="ctr"/>
+          <a:lstStyle/>
+          <a:p>
+            <a:pPr marL="0" indent="0">
+              <a:buNone/>
+            </a:pPr>
+            <a:r>
+              <a:rPr lang="en-US" sz="1400" dirty="0">
+                <a:solidFill>
+                  <a:srgbClr val="5B6482"/>
+                </a:solidFill>
+                <a:latin typeface="Calibri" pitchFamily="34" charset="0"/>
+                <a:ea typeface="Calibri" pitchFamily="34" charset="-122"/>
+                <a:cs typeface="Calibri" pitchFamily="34" charset="-120"/>
+              </a:rPr>
+              <a:t>Así es como el banco conecta al ahorrador con el deudor, paso a paso.</a:t>
+            </a:r>
+            <a:endParaRPr lang="en-US" sz="1400" dirty="0"/>
+          </a:p>
+        </p:txBody>
+      </p:sp>
+      <p:sp>
+        <p:nvSpPr>
+          <p:cNvPr id="7" name="Shape 4"/>
+          <p:cNvSpPr/>
+          <p:nvPr/>
+        </p:nvSpPr>
+        <p:spPr>
+          <a:xfrm>
+            <a:off x="640080" y="1965960"/>
+            <a:ext cx="10908792" cy="960120"/>
+          </a:xfrm>
+          <a:prstGeom prst="roundRect">
+            <a:avLst>
+              <a:gd name="adj" fmla="val 8571"/>
+            </a:avLst>
           </a:prstGeom>
           <a:solidFill>
             <a:srgbClr val="EEF3FC"/>
@@ -5206,40 +5037,43 @@
           </a:p>
         </p:txBody>
       </p:sp>
-      <p:pic>
-        <p:nvPicPr>
-          <p:cNvPr id="4" name="Image 0" descr="/tmp/work/deck/icons/exchange_navy.png"/>
-          <p:cNvPicPr>
-            <a:picLocks noChangeAspect="1"/>
-          </p:cNvPicPr>
-          <p:nvPr/>
-        </p:nvPicPr>
-        <p:blipFill>
-          <a:blip r:embed="rId3"/>
-          <a:stretch>
-            <a:fillRect/>
-          </a:stretch>
-        </p:blipFill>
-        <p:spPr>
-          <a:xfrm>
-            <a:off x="10931652" y="617220"/>
-            <a:ext cx="320040" cy="320040"/>
-          </a:xfrm>
-          <a:prstGeom prst="rect">
-            <a:avLst/>
-          </a:prstGeom>
-        </p:spPr>
-      </p:pic>
-      <p:sp>
-        <p:nvSpPr>
-          <p:cNvPr id="5" name="Text 2"/>
-          <p:cNvSpPr/>
-          <p:nvPr/>
-        </p:nvSpPr>
-        <p:spPr>
-          <a:xfrm>
-            <a:off x="640080" y="749808"/>
-            <a:ext cx="9601200" cy="777240"/>
+      <p:sp>
+        <p:nvSpPr>
+          <p:cNvPr id="8" name="Shape 5"/>
+          <p:cNvSpPr/>
+          <p:nvPr/>
+        </p:nvSpPr>
+        <p:spPr>
+          <a:xfrm>
+            <a:off x="822960" y="2162556"/>
+            <a:ext cx="566928" cy="566928"/>
+          </a:xfrm>
+          <a:prstGeom prst="ellipse">
+            <a:avLst/>
+          </a:prstGeom>
+          <a:solidFill>
+            <a:srgbClr val="1E2761"/>
+          </a:solidFill>
+          <a:ln/>
+        </p:spPr>
+        <p:txBody>
+          <a:bodyPr/>
+          <a:lstStyle/>
+          <a:p>
+            <a:endParaRPr/>
+          </a:p>
+        </p:txBody>
+      </p:sp>
+      <p:sp>
+        <p:nvSpPr>
+          <p:cNvPr id="9" name="Text 6"/>
+          <p:cNvSpPr/>
+          <p:nvPr/>
+        </p:nvSpPr>
+        <p:spPr>
+          <a:xfrm>
+            <a:off x="822960" y="2162556"/>
+            <a:ext cx="566928" cy="566928"/>
           </a:xfrm>
           <a:prstGeom prst="rect">
             <a:avLst/>
@@ -5251,34 +5085,34 @@
           <a:bodyPr wrap="square" lIns="0" tIns="0" rIns="0" bIns="0" rtlCol="0" anchor="ctr"/>
           <a:lstStyle/>
           <a:p>
-            <a:pPr marL="0" indent="0">
-              <a:buNone/>
-            </a:pPr>
-            <a:r>
-              <a:rPr lang="en-US" sz="3200" b="1" dirty="0">
-                <a:solidFill>
-                  <a:srgbClr val="1E2761"/>
+            <a:pPr marL="0" indent="0" algn="ctr">
+              <a:buNone/>
+            </a:pPr>
+            <a:r>
+              <a:rPr lang="en-US" sz="2000" b="1" dirty="0">
+                <a:solidFill>
+                  <a:srgbClr val="C9A227"/>
                 </a:solidFill>
                 <a:latin typeface="Cambria" pitchFamily="34" charset="0"/>
                 <a:ea typeface="Cambria" pitchFamily="34" charset="-122"/>
                 <a:cs typeface="Cambria" pitchFamily="34" charset="-120"/>
               </a:rPr>
-              <a:t>Intermediación financiera</a:t>
-            </a:r>
-            <a:endParaRPr lang="en-US" sz="3200" dirty="0"/>
-          </a:p>
-        </p:txBody>
-      </p:sp>
-      <p:sp>
-        <p:nvSpPr>
-          <p:cNvPr id="6" name="Text 3"/>
-          <p:cNvSpPr/>
-          <p:nvPr/>
-        </p:nvSpPr>
-        <p:spPr>
-          <a:xfrm>
-            <a:off x="640080" y="1481328"/>
-            <a:ext cx="9692640" cy="365760"/>
+              <a:t>1</a:t>
+            </a:r>
+            <a:endParaRPr lang="en-US" sz="2000" dirty="0"/>
+          </a:p>
+        </p:txBody>
+      </p:sp>
+      <p:sp>
+        <p:nvSpPr>
+          <p:cNvPr id="10" name="Text 7"/>
+          <p:cNvSpPr/>
+          <p:nvPr/>
+        </p:nvSpPr>
+        <p:spPr>
+          <a:xfrm>
+            <a:off x="1600200" y="2084832"/>
+            <a:ext cx="9326880" cy="292608"/>
           </a:xfrm>
           <a:prstGeom prst="rect">
             <a:avLst/>
@@ -5294,34 +5128,257 @@
               <a:buNone/>
             </a:pPr>
             <a:r>
-              <a:rPr lang="en-US" sz="1400" dirty="0">
-                <a:solidFill>
-                  <a:srgbClr val="5B6482"/>
+              <a:rPr lang="en-US" sz="1350" b="1" dirty="0">
+                <a:solidFill>
+                  <a:srgbClr val="1E2761"/>
                 </a:solidFill>
                 <a:latin typeface="Calibri" pitchFamily="34" charset="0"/>
                 <a:ea typeface="Calibri" pitchFamily="34" charset="-122"/>
                 <a:cs typeface="Calibri" pitchFamily="34" charset="-120"/>
               </a:rPr>
-              <a:t>El mercado financiero canaliza recursos de quienes ahorran hacia quienes los necesitan.</a:t>
-            </a:r>
-            <a:endParaRPr lang="en-US" sz="1400" dirty="0"/>
-          </a:p>
-        </p:txBody>
-      </p:sp>
-      <p:sp>
-        <p:nvSpPr>
-          <p:cNvPr id="7" name="Shape 4"/>
-          <p:cNvSpPr/>
-          <p:nvPr/>
-        </p:nvSpPr>
-        <p:spPr>
-          <a:xfrm>
-            <a:off x="640080" y="1965960"/>
-            <a:ext cx="4114800" cy="2926080"/>
+              <a:t>Captación de recursos</a:t>
+            </a:r>
+            <a:endParaRPr lang="en-US" sz="1350" dirty="0"/>
+          </a:p>
+        </p:txBody>
+      </p:sp>
+      <p:sp>
+        <p:nvSpPr>
+          <p:cNvPr id="11" name="Text 8"/>
+          <p:cNvSpPr/>
+          <p:nvPr/>
+        </p:nvSpPr>
+        <p:spPr>
+          <a:xfrm>
+            <a:off x="1600200" y="2386584"/>
+            <a:ext cx="9326880" cy="502920"/>
+          </a:xfrm>
+          <a:prstGeom prst="rect">
+            <a:avLst/>
+          </a:prstGeom>
+          <a:noFill/>
+          <a:ln/>
+        </p:spPr>
+        <p:txBody>
+          <a:bodyPr wrap="square" lIns="0" tIns="0" rIns="0" bIns="0" rtlCol="0" anchor="ctr"/>
+          <a:lstStyle/>
+          <a:p>
+            <a:pPr marL="0" indent="0">
+              <a:lnSpc>
+                <a:spcPct val="112000"/>
+              </a:lnSpc>
+              <a:buNone/>
+            </a:pPr>
+            <a:r>
+              <a:rPr lang="en-US" sz="1050" dirty="0">
+                <a:solidFill>
+                  <a:srgbClr val="27314D"/>
+                </a:solidFill>
+                <a:latin typeface="Calibri" pitchFamily="34" charset="0"/>
+                <a:ea typeface="Calibri" pitchFamily="34" charset="-122"/>
+                <a:cs typeface="Calibri" pitchFamily="34" charset="-120"/>
+              </a:rPr>
+              <a:t>El banco capta recursos del ahorrador —depósitos, pagarés, certificados— y se compromete a devolverlos con un rendimiento: la tasa pasiva.</a:t>
+            </a:r>
+            <a:endParaRPr lang="en-US" sz="1050" dirty="0"/>
+          </a:p>
+        </p:txBody>
+      </p:sp>
+      <p:sp>
+        <p:nvSpPr>
+          <p:cNvPr id="12" name="Shape 9"/>
+          <p:cNvSpPr/>
+          <p:nvPr/>
+        </p:nvSpPr>
+        <p:spPr>
+          <a:xfrm>
+            <a:off x="640080" y="3063240"/>
+            <a:ext cx="10908792" cy="960120"/>
           </a:xfrm>
           <a:prstGeom prst="roundRect">
             <a:avLst>
-              <a:gd name="adj" fmla="val 3125"/>
+              <a:gd name="adj" fmla="val 8571"/>
+            </a:avLst>
+          </a:prstGeom>
+          <a:solidFill>
+            <a:srgbClr val="FFFFFF"/>
+          </a:solidFill>
+          <a:ln w="12700">
+            <a:solidFill>
+              <a:srgbClr val="E1E7F5"/>
+            </a:solidFill>
+            <a:prstDash val="solid"/>
+          </a:ln>
+        </p:spPr>
+        <p:txBody>
+          <a:bodyPr/>
+          <a:lstStyle/>
+          <a:p>
+            <a:endParaRPr/>
+          </a:p>
+        </p:txBody>
+      </p:sp>
+      <p:sp>
+        <p:nvSpPr>
+          <p:cNvPr id="13" name="Shape 10"/>
+          <p:cNvSpPr/>
+          <p:nvPr/>
+        </p:nvSpPr>
+        <p:spPr>
+          <a:xfrm>
+            <a:off x="822960" y="3259836"/>
+            <a:ext cx="566928" cy="566928"/>
+          </a:xfrm>
+          <a:prstGeom prst="ellipse">
+            <a:avLst/>
+          </a:prstGeom>
+          <a:solidFill>
+            <a:srgbClr val="1E2761"/>
+          </a:solidFill>
+          <a:ln/>
+        </p:spPr>
+        <p:txBody>
+          <a:bodyPr/>
+          <a:lstStyle/>
+          <a:p>
+            <a:endParaRPr/>
+          </a:p>
+        </p:txBody>
+      </p:sp>
+      <p:sp>
+        <p:nvSpPr>
+          <p:cNvPr id="14" name="Text 11"/>
+          <p:cNvSpPr/>
+          <p:nvPr/>
+        </p:nvSpPr>
+        <p:spPr>
+          <a:xfrm>
+            <a:off x="822960" y="3259836"/>
+            <a:ext cx="566928" cy="566928"/>
+          </a:xfrm>
+          <a:prstGeom prst="rect">
+            <a:avLst/>
+          </a:prstGeom>
+          <a:noFill/>
+          <a:ln/>
+        </p:spPr>
+        <p:txBody>
+          <a:bodyPr wrap="square" lIns="0" tIns="0" rIns="0" bIns="0" rtlCol="0" anchor="ctr"/>
+          <a:lstStyle/>
+          <a:p>
+            <a:pPr marL="0" indent="0" algn="ctr">
+              <a:buNone/>
+            </a:pPr>
+            <a:r>
+              <a:rPr lang="en-US" sz="2000" b="1" dirty="0">
+                <a:solidFill>
+                  <a:srgbClr val="C9A227"/>
+                </a:solidFill>
+                <a:latin typeface="Cambria" pitchFamily="34" charset="0"/>
+                <a:ea typeface="Cambria" pitchFamily="34" charset="-122"/>
+                <a:cs typeface="Cambria" pitchFamily="34" charset="-120"/>
+              </a:rPr>
+              <a:t>2</a:t>
+            </a:r>
+            <a:endParaRPr lang="en-US" sz="2000" dirty="0"/>
+          </a:p>
+        </p:txBody>
+      </p:sp>
+      <p:sp>
+        <p:nvSpPr>
+          <p:cNvPr id="15" name="Text 12"/>
+          <p:cNvSpPr/>
+          <p:nvPr/>
+        </p:nvSpPr>
+        <p:spPr>
+          <a:xfrm>
+            <a:off x="1600200" y="3182112"/>
+            <a:ext cx="9326880" cy="292608"/>
+          </a:xfrm>
+          <a:prstGeom prst="rect">
+            <a:avLst/>
+          </a:prstGeom>
+          <a:noFill/>
+          <a:ln/>
+        </p:spPr>
+        <p:txBody>
+          <a:bodyPr wrap="square" lIns="0" tIns="0" rIns="0" bIns="0" rtlCol="0" anchor="ctr"/>
+          <a:lstStyle/>
+          <a:p>
+            <a:pPr marL="0" indent="0">
+              <a:buNone/>
+            </a:pPr>
+            <a:r>
+              <a:rPr lang="en-US" sz="1350" b="1" dirty="0">
+                <a:solidFill>
+                  <a:srgbClr val="1E2761"/>
+                </a:solidFill>
+                <a:latin typeface="Calibri" pitchFamily="34" charset="0"/>
+                <a:ea typeface="Calibri" pitchFamily="34" charset="-122"/>
+                <a:cs typeface="Calibri" pitchFamily="34" charset="-120"/>
+              </a:rPr>
+              <a:t>Colocación del crédito</a:t>
+            </a:r>
+            <a:endParaRPr lang="en-US" sz="1350" dirty="0"/>
+          </a:p>
+        </p:txBody>
+      </p:sp>
+      <p:sp>
+        <p:nvSpPr>
+          <p:cNvPr id="16" name="Text 13"/>
+          <p:cNvSpPr/>
+          <p:nvPr/>
+        </p:nvSpPr>
+        <p:spPr>
+          <a:xfrm>
+            <a:off x="1600200" y="3483864"/>
+            <a:ext cx="9326880" cy="502920"/>
+          </a:xfrm>
+          <a:prstGeom prst="rect">
+            <a:avLst/>
+          </a:prstGeom>
+          <a:noFill/>
+          <a:ln/>
+        </p:spPr>
+        <p:txBody>
+          <a:bodyPr wrap="square" lIns="0" tIns="0" rIns="0" bIns="0" rtlCol="0" anchor="ctr"/>
+          <a:lstStyle/>
+          <a:p>
+            <a:pPr marL="0" indent="0">
+              <a:lnSpc>
+                <a:spcPct val="112000"/>
+              </a:lnSpc>
+              <a:buNone/>
+            </a:pPr>
+            <a:r>
+              <a:rPr lang="en-US" sz="1050" dirty="0">
+                <a:solidFill>
+                  <a:srgbClr val="27314D"/>
+                </a:solidFill>
+                <a:latin typeface="Calibri" pitchFamily="34" charset="0"/>
+                <a:ea typeface="Calibri" pitchFamily="34" charset="-122"/>
+                <a:cs typeface="Calibri" pitchFamily="34" charset="-120"/>
+              </a:rPr>
+              <a:t>El banco presta esos recursos a empresas, personas o gobierno cobrando una tasa activa, mayor a la pasiva, y asume el riesgo de crédito.</a:t>
+            </a:r>
+            <a:endParaRPr lang="en-US" sz="1050" dirty="0"/>
+          </a:p>
+        </p:txBody>
+      </p:sp>
+      <p:sp>
+        <p:nvSpPr>
+          <p:cNvPr id="17" name="Shape 14"/>
+          <p:cNvSpPr/>
+          <p:nvPr/>
+        </p:nvSpPr>
+        <p:spPr>
+          <a:xfrm>
+            <a:off x="640080" y="4160520"/>
+            <a:ext cx="10908792" cy="960120"/>
+          </a:xfrm>
+          <a:prstGeom prst="roundRect">
+            <a:avLst>
+              <a:gd name="adj" fmla="val 8571"/>
             </a:avLst>
           </a:prstGeom>
           <a:solidFill>
@@ -5339,14 +5396,14 @@
       </p:sp>
       <p:sp>
         <p:nvSpPr>
-          <p:cNvPr id="8" name="Shape 5"/>
-          <p:cNvSpPr/>
-          <p:nvPr/>
-        </p:nvSpPr>
-        <p:spPr>
-          <a:xfrm>
-            <a:off x="1005840" y="2286000"/>
-            <a:ext cx="621792" cy="621792"/>
+          <p:cNvPr id="18" name="Shape 15"/>
+          <p:cNvSpPr/>
+          <p:nvPr/>
+        </p:nvSpPr>
+        <p:spPr>
+          <a:xfrm>
+            <a:off x="822960" y="4357116"/>
+            <a:ext cx="566928" cy="566928"/>
           </a:xfrm>
           <a:prstGeom prst="ellipse">
             <a:avLst/>
@@ -5364,40 +5421,16 @@
           </a:p>
         </p:txBody>
       </p:sp>
-      <p:pic>
-        <p:nvPicPr>
-          <p:cNvPr id="9" name="Image 1" descr="/tmp/work/deck/icons/piggy_white.png"/>
-          <p:cNvPicPr>
-            <a:picLocks noChangeAspect="1"/>
-          </p:cNvPicPr>
-          <p:nvPr/>
-        </p:nvPicPr>
-        <p:blipFill>
-          <a:blip r:embed="rId4"/>
-          <a:stretch>
-            <a:fillRect/>
-          </a:stretch>
-        </p:blipFill>
-        <p:spPr>
-          <a:xfrm>
-            <a:off x="1155070" y="2435230"/>
-            <a:ext cx="323332" cy="323332"/>
-          </a:xfrm>
-          <a:prstGeom prst="rect">
-            <a:avLst/>
-          </a:prstGeom>
-        </p:spPr>
-      </p:pic>
-      <p:sp>
-        <p:nvSpPr>
-          <p:cNvPr id="10" name="Text 6"/>
-          <p:cNvSpPr/>
-          <p:nvPr/>
-        </p:nvSpPr>
-        <p:spPr>
-          <a:xfrm>
-            <a:off x="1005840" y="3063240"/>
-            <a:ext cx="3383280" cy="457200"/>
+      <p:sp>
+        <p:nvSpPr>
+          <p:cNvPr id="19" name="Text 16"/>
+          <p:cNvSpPr/>
+          <p:nvPr/>
+        </p:nvSpPr>
+        <p:spPr>
+          <a:xfrm>
+            <a:off x="822960" y="4357116"/>
+            <a:ext cx="566928" cy="566928"/>
           </a:xfrm>
           <a:prstGeom prst="rect">
             <a:avLst/>
@@ -5409,34 +5442,34 @@
           <a:bodyPr wrap="square" lIns="0" tIns="0" rIns="0" bIns="0" rtlCol="0" anchor="ctr"/>
           <a:lstStyle/>
           <a:p>
-            <a:pPr marL="0" indent="0">
-              <a:buNone/>
-            </a:pPr>
-            <a:r>
-              <a:rPr lang="en-US" sz="1600" b="1" dirty="0">
-                <a:solidFill>
-                  <a:srgbClr val="1E2761"/>
+            <a:pPr marL="0" indent="0" algn="ctr">
+              <a:buNone/>
+            </a:pPr>
+            <a:r>
+              <a:rPr lang="en-US" sz="2000" b="1" dirty="0">
+                <a:solidFill>
+                  <a:srgbClr val="C9A227"/>
                 </a:solidFill>
                 <a:latin typeface="Cambria" pitchFamily="34" charset="0"/>
                 <a:ea typeface="Cambria" pitchFamily="34" charset="-122"/>
                 <a:cs typeface="Cambria" pitchFamily="34" charset="-120"/>
               </a:rPr>
-              <a:t>Unidades superavitarias</a:t>
-            </a:r>
-            <a:endParaRPr lang="en-US" sz="1600" dirty="0"/>
-          </a:p>
-        </p:txBody>
-      </p:sp>
-      <p:sp>
-        <p:nvSpPr>
-          <p:cNvPr id="11" name="Text 7"/>
-          <p:cNvSpPr/>
-          <p:nvPr/>
-        </p:nvSpPr>
-        <p:spPr>
-          <a:xfrm>
-            <a:off x="1005840" y="3538728"/>
-            <a:ext cx="3383280" cy="1234440"/>
+              <a:t>3</a:t>
+            </a:r>
+            <a:endParaRPr lang="en-US" sz="2000" dirty="0"/>
+          </a:p>
+        </p:txBody>
+      </p:sp>
+      <p:sp>
+        <p:nvSpPr>
+          <p:cNvPr id="20" name="Text 17"/>
+          <p:cNvSpPr/>
+          <p:nvPr/>
+        </p:nvSpPr>
+        <p:spPr>
+          <a:xfrm>
+            <a:off x="1600200" y="4279392"/>
+            <a:ext cx="9326880" cy="292608"/>
           </a:xfrm>
           <a:prstGeom prst="rect">
             <a:avLst/>
@@ -5449,36 +5482,33 @@
           <a:lstStyle/>
           <a:p>
             <a:pPr marL="0" indent="0">
-              <a:lnSpc>
-                <a:spcPct val="120000"/>
-              </a:lnSpc>
-              <a:buNone/>
-            </a:pPr>
-            <a:r>
-              <a:rPr lang="en-US" sz="1200" dirty="0">
-                <a:solidFill>
-                  <a:srgbClr val="27314D"/>
+              <a:buNone/>
+            </a:pPr>
+            <a:r>
+              <a:rPr lang="en-US" sz="1350" b="1" dirty="0">
+                <a:solidFill>
+                  <a:srgbClr val="1E2761"/>
                 </a:solidFill>
                 <a:latin typeface="Calibri" pitchFamily="34" charset="0"/>
                 <a:ea typeface="Calibri" pitchFamily="34" charset="-122"/>
                 <a:cs typeface="Calibri" pitchFamily="34" charset="-120"/>
               </a:rPr>
-              <a:t>Ahorradores e inversionistas: agentes que generan excedentes de recursos y buscan colocarlos con seguridad y liquidez.</a:t>
-            </a:r>
-            <a:endParaRPr lang="en-US" sz="1200" dirty="0"/>
-          </a:p>
-        </p:txBody>
-      </p:sp>
-      <p:sp>
-        <p:nvSpPr>
-          <p:cNvPr id="12" name="Text 8"/>
-          <p:cNvSpPr/>
-          <p:nvPr/>
-        </p:nvSpPr>
-        <p:spPr>
-          <a:xfrm>
-            <a:off x="4892040" y="2350008"/>
-            <a:ext cx="1691640" cy="566928"/>
+              <a:t>Recuperación del crédito</a:t>
+            </a:r>
+            <a:endParaRPr lang="en-US" sz="1350" dirty="0"/>
+          </a:p>
+        </p:txBody>
+      </p:sp>
+      <p:sp>
+        <p:nvSpPr>
+          <p:cNvPr id="21" name="Text 18"/>
+          <p:cNvSpPr/>
+          <p:nvPr/>
+        </p:nvSpPr>
+        <p:spPr>
+          <a:xfrm>
+            <a:off x="1600200" y="4581144"/>
+            <a:ext cx="9326880" cy="502920"/>
           </a:xfrm>
           <a:prstGeom prst="rect">
             <a:avLst/>
@@ -5490,34 +5520,98 @@
           <a:bodyPr wrap="square" lIns="0" tIns="0" rIns="0" bIns="0" rtlCol="0" anchor="ctr"/>
           <a:lstStyle/>
           <a:p>
-            <a:pPr marL="0" indent="0" algn="ctr">
-              <a:buNone/>
-            </a:pPr>
-            <a:r>
-              <a:rPr lang="en-US" sz="2600" b="1" dirty="0">
-                <a:solidFill>
-                  <a:srgbClr val="C9A227"/>
+            <a:pPr marL="0" indent="0">
+              <a:lnSpc>
+                <a:spcPct val="112000"/>
+              </a:lnSpc>
+              <a:buNone/>
+            </a:pPr>
+            <a:r>
+              <a:rPr lang="en-US" sz="1050" dirty="0">
+                <a:solidFill>
+                  <a:srgbClr val="27314D"/>
                 </a:solidFill>
                 <a:latin typeface="Calibri" pitchFamily="34" charset="0"/>
                 <a:ea typeface="Calibri" pitchFamily="34" charset="-122"/>
                 <a:cs typeface="Calibri" pitchFamily="34" charset="-120"/>
               </a:rPr>
-              <a:t>→</a:t>
-            </a:r>
-            <a:endParaRPr lang="en-US" sz="2600" dirty="0"/>
-          </a:p>
-        </p:txBody>
-      </p:sp>
-      <p:sp>
-        <p:nvSpPr>
-          <p:cNvPr id="13" name="Text 9"/>
-          <p:cNvSpPr/>
-          <p:nvPr/>
-        </p:nvSpPr>
-        <p:spPr>
-          <a:xfrm>
-            <a:off x="4617720" y="2880360"/>
-            <a:ext cx="2148840" cy="457200"/>
+              <a:t>El deudor devuelve al banco el capital más los intereses pactados conforme transcurre el plazo del crédito.</a:t>
+            </a:r>
+            <a:endParaRPr lang="en-US" sz="1050" dirty="0"/>
+          </a:p>
+        </p:txBody>
+      </p:sp>
+      <p:sp>
+        <p:nvSpPr>
+          <p:cNvPr id="22" name="Shape 19"/>
+          <p:cNvSpPr/>
+          <p:nvPr/>
+        </p:nvSpPr>
+        <p:spPr>
+          <a:xfrm>
+            <a:off x="640080" y="5257800"/>
+            <a:ext cx="10908792" cy="960120"/>
+          </a:xfrm>
+          <a:prstGeom prst="roundRect">
+            <a:avLst>
+              <a:gd name="adj" fmla="val 8571"/>
+            </a:avLst>
+          </a:prstGeom>
+          <a:solidFill>
+            <a:srgbClr val="FFFFFF"/>
+          </a:solidFill>
+          <a:ln w="12700">
+            <a:solidFill>
+              <a:srgbClr val="E1E7F5"/>
+            </a:solidFill>
+            <a:prstDash val="solid"/>
+          </a:ln>
+        </p:spPr>
+        <p:txBody>
+          <a:bodyPr/>
+          <a:lstStyle/>
+          <a:p>
+            <a:endParaRPr/>
+          </a:p>
+        </p:txBody>
+      </p:sp>
+      <p:sp>
+        <p:nvSpPr>
+          <p:cNvPr id="23" name="Shape 20"/>
+          <p:cNvSpPr/>
+          <p:nvPr/>
+        </p:nvSpPr>
+        <p:spPr>
+          <a:xfrm>
+            <a:off x="822960" y="5454396"/>
+            <a:ext cx="566928" cy="566928"/>
+          </a:xfrm>
+          <a:prstGeom prst="ellipse">
+            <a:avLst/>
+          </a:prstGeom>
+          <a:solidFill>
+            <a:srgbClr val="1E2761"/>
+          </a:solidFill>
+          <a:ln/>
+        </p:spPr>
+        <p:txBody>
+          <a:bodyPr/>
+          <a:lstStyle/>
+          <a:p>
+            <a:endParaRPr/>
+          </a:p>
+        </p:txBody>
+      </p:sp>
+      <p:sp>
+        <p:nvSpPr>
+          <p:cNvPr id="24" name="Text 21"/>
+          <p:cNvSpPr/>
+          <p:nvPr/>
+        </p:nvSpPr>
+        <p:spPr>
+          <a:xfrm>
+            <a:off x="822960" y="5454396"/>
+            <a:ext cx="566928" cy="566928"/>
           </a:xfrm>
           <a:prstGeom prst="rect">
             <a:avLst/>
@@ -5530,432 +5624,146 @@
           <a:lstStyle/>
           <a:p>
             <a:pPr marL="0" indent="0" algn="ctr">
-              <a:lnSpc>
-                <a:spcPct val="105000"/>
-              </a:lnSpc>
-              <a:buNone/>
-            </a:pPr>
-            <a:r>
-              <a:rPr lang="en-US" sz="950" b="1" dirty="0">
-                <a:solidFill>
-                  <a:srgbClr val="5B6482"/>
+              <a:buNone/>
+            </a:pPr>
+            <a:r>
+              <a:rPr lang="en-US" sz="2000" b="1" dirty="0">
+                <a:solidFill>
+                  <a:srgbClr val="C9A227"/>
+                </a:solidFill>
+                <a:latin typeface="Cambria" pitchFamily="34" charset="0"/>
+                <a:ea typeface="Cambria" pitchFamily="34" charset="-122"/>
+                <a:cs typeface="Cambria" pitchFamily="34" charset="-120"/>
+              </a:rPr>
+              <a:t>4</a:t>
+            </a:r>
+            <a:endParaRPr lang="en-US" sz="2000" dirty="0"/>
+          </a:p>
+        </p:txBody>
+      </p:sp>
+      <p:sp>
+        <p:nvSpPr>
+          <p:cNvPr id="25" name="Text 22"/>
+          <p:cNvSpPr/>
+          <p:nvPr/>
+        </p:nvSpPr>
+        <p:spPr>
+          <a:xfrm>
+            <a:off x="1600200" y="5376672"/>
+            <a:ext cx="9326880" cy="292608"/>
+          </a:xfrm>
+          <a:prstGeom prst="rect">
+            <a:avLst/>
+          </a:prstGeom>
+          <a:noFill/>
+          <a:ln/>
+        </p:spPr>
+        <p:txBody>
+          <a:bodyPr wrap="square" lIns="0" tIns="0" rIns="0" bIns="0" rtlCol="0" anchor="ctr"/>
+          <a:lstStyle/>
+          <a:p>
+            <a:pPr marL="0" indent="0">
+              <a:buNone/>
+            </a:pPr>
+            <a:r>
+              <a:rPr lang="en-US" sz="1350" b="1" dirty="0">
+                <a:solidFill>
+                  <a:srgbClr val="1E2761"/>
                 </a:solidFill>
                 <a:latin typeface="Calibri" pitchFamily="34" charset="0"/>
                 <a:ea typeface="Calibri" pitchFamily="34" charset="-122"/>
                 <a:cs typeface="Calibri" pitchFamily="34" charset="-120"/>
               </a:rPr>
-              <a:t>recursos</a:t>
-            </a:r>
-            <a:endParaRPr lang="en-US" sz="950" dirty="0"/>
-          </a:p>
-          <a:p>
-            <a:pPr marL="0" indent="0" algn="ctr">
+              <a:t>Cierre del ciclo</a:t>
+            </a:r>
+            <a:endParaRPr lang="en-US" sz="1350" dirty="0"/>
+          </a:p>
+        </p:txBody>
+      </p:sp>
+      <p:sp>
+        <p:nvSpPr>
+          <p:cNvPr id="26" name="Text 23"/>
+          <p:cNvSpPr/>
+          <p:nvPr/>
+        </p:nvSpPr>
+        <p:spPr>
+          <a:xfrm>
+            <a:off x="1600200" y="5678424"/>
+            <a:ext cx="9326880" cy="502920"/>
+          </a:xfrm>
+          <a:prstGeom prst="rect">
+            <a:avLst/>
+          </a:prstGeom>
+          <a:noFill/>
+          <a:ln/>
+        </p:spPr>
+        <p:txBody>
+          <a:bodyPr wrap="square" lIns="0" tIns="0" rIns="0" bIns="0" rtlCol="0" anchor="ctr"/>
+          <a:lstStyle/>
+          <a:p>
+            <a:pPr marL="0" indent="0">
               <a:lnSpc>
-                <a:spcPct val="105000"/>
+                <a:spcPct val="112000"/>
               </a:lnSpc>
               <a:buNone/>
             </a:pPr>
             <a:r>
-              <a:rPr lang="en-US" sz="950" b="1" dirty="0">
-                <a:solidFill>
-                  <a:srgbClr val="5B6482"/>
+              <a:rPr lang="en-US" sz="1050" dirty="0">
+                <a:solidFill>
+                  <a:srgbClr val="27314D"/>
                 </a:solidFill>
                 <a:latin typeface="Calibri" pitchFamily="34" charset="0"/>
                 <a:ea typeface="Calibri" pitchFamily="34" charset="-122"/>
                 <a:cs typeface="Calibri" pitchFamily="34" charset="-120"/>
               </a:rPr>
-              <a:t>(dinero)</a:t>
-            </a:r>
-            <a:endParaRPr lang="en-US" sz="950" dirty="0"/>
-          </a:p>
-        </p:txBody>
-      </p:sp>
-      <p:sp>
-        <p:nvSpPr>
-          <p:cNvPr id="14" name="Text 10"/>
-          <p:cNvSpPr/>
-          <p:nvPr/>
-        </p:nvSpPr>
-        <p:spPr>
-          <a:xfrm>
-            <a:off x="4892040" y="3447288"/>
-            <a:ext cx="1691640" cy="566928"/>
-          </a:xfrm>
-          <a:prstGeom prst="rect">
-            <a:avLst/>
-          </a:prstGeom>
-          <a:noFill/>
-          <a:ln/>
-        </p:spPr>
-        <p:txBody>
-          <a:bodyPr wrap="square" lIns="0" tIns="0" rIns="0" bIns="0" rtlCol="0" anchor="ctr"/>
-          <a:lstStyle/>
-          <a:p>
-            <a:pPr marL="0" indent="0" algn="ctr">
-              <a:buNone/>
-            </a:pPr>
-            <a:r>
-              <a:rPr lang="en-US" sz="2600" b="1" dirty="0">
-                <a:solidFill>
-                  <a:srgbClr val="1E2761"/>
+              <a:t>El banco paga al ahorrador su depósito con rendimiento; la diferencia entre tasa activa y pasiva es su margen financiero (spread).</a:t>
+            </a:r>
+            <a:endParaRPr lang="en-US" sz="1050" dirty="0"/>
+          </a:p>
+        </p:txBody>
+      </p:sp>
+      <p:sp>
+        <p:nvSpPr>
+          <p:cNvPr id="27" name="Text 24"/>
+          <p:cNvSpPr/>
+          <p:nvPr/>
+        </p:nvSpPr>
+        <p:spPr>
+          <a:xfrm>
+            <a:off x="640080" y="6400800"/>
+            <a:ext cx="9418320" cy="274320"/>
+          </a:xfrm>
+          <a:prstGeom prst="rect">
+            <a:avLst/>
+          </a:prstGeom>
+          <a:noFill/>
+          <a:ln/>
+        </p:spPr>
+        <p:txBody>
+          <a:bodyPr wrap="square" rtlCol="0" anchor="ctr"/>
+          <a:lstStyle/>
+          <a:p>
+            <a:pPr marL="0" indent="0">
+              <a:buNone/>
+            </a:pPr>
+            <a:r>
+              <a:rPr lang="en-US" sz="950" i="1" dirty="0">
+                <a:solidFill>
+                  <a:srgbClr val="5B6482"/>
                 </a:solidFill>
                 <a:latin typeface="Calibri" pitchFamily="34" charset="0"/>
                 <a:ea typeface="Calibri" pitchFamily="34" charset="-122"/>
                 <a:cs typeface="Calibri" pitchFamily="34" charset="-120"/>
               </a:rPr>
-              <a:t>←</a:t>
-            </a:r>
-            <a:endParaRPr lang="en-US" sz="2600" dirty="0"/>
-          </a:p>
-        </p:txBody>
-      </p:sp>
-      <p:sp>
-        <p:nvSpPr>
-          <p:cNvPr id="15" name="Text 11"/>
-          <p:cNvSpPr/>
-          <p:nvPr/>
-        </p:nvSpPr>
-        <p:spPr>
-          <a:xfrm>
-            <a:off x="4617720" y="3977640"/>
-            <a:ext cx="2148840" cy="457200"/>
-          </a:xfrm>
-          <a:prstGeom prst="rect">
-            <a:avLst/>
-          </a:prstGeom>
-          <a:noFill/>
-          <a:ln/>
-        </p:spPr>
-        <p:txBody>
-          <a:bodyPr wrap="square" lIns="0" tIns="0" rIns="0" bIns="0" rtlCol="0" anchor="ctr"/>
-          <a:lstStyle/>
-          <a:p>
-            <a:pPr marL="0" indent="0" algn="ctr">
-              <a:lnSpc>
-                <a:spcPct val="105000"/>
-              </a:lnSpc>
-              <a:buNone/>
-            </a:pPr>
-            <a:r>
-              <a:rPr lang="en-US" sz="950" b="1" dirty="0">
-                <a:solidFill>
-                  <a:srgbClr val="5B6482"/>
-                </a:solidFill>
-                <a:latin typeface="Calibri" pitchFamily="34" charset="0"/>
-                <a:ea typeface="Calibri" pitchFamily="34" charset="-122"/>
-                <a:cs typeface="Calibri" pitchFamily="34" charset="-120"/>
-              </a:rPr>
-              <a:t>a cambio de un</a:t>
+              <a:t>El margen entre tasa activa y pasiva (spread) es la utilidad del banco por intermediar. Fuente: Mántey de Anguiano, G. (2024), Lección 2, UNAM.</a:t>
             </a:r>
             <a:endParaRPr lang="en-US" sz="950" dirty="0"/>
           </a:p>
-          <a:p>
-            <a:pPr marL="0" indent="0" algn="ctr">
-              <a:lnSpc>
-                <a:spcPct val="105000"/>
-              </a:lnSpc>
-              <a:buNone/>
-            </a:pPr>
-            <a:r>
-              <a:rPr lang="en-US" sz="950" b="1" dirty="0">
-                <a:solidFill>
-                  <a:srgbClr val="5B6482"/>
-                </a:solidFill>
-                <a:latin typeface="Calibri" pitchFamily="34" charset="0"/>
-                <a:ea typeface="Calibri" pitchFamily="34" charset="-122"/>
-                <a:cs typeface="Calibri" pitchFamily="34" charset="-120"/>
-              </a:rPr>
-              <a:t>activo financiero</a:t>
-            </a:r>
-            <a:endParaRPr lang="en-US" sz="950" dirty="0"/>
-          </a:p>
-        </p:txBody>
-      </p:sp>
-      <p:sp>
-        <p:nvSpPr>
-          <p:cNvPr id="16" name="Shape 12"/>
-          <p:cNvSpPr/>
-          <p:nvPr/>
-        </p:nvSpPr>
-        <p:spPr>
-          <a:xfrm>
-            <a:off x="7452360" y="1965960"/>
-            <a:ext cx="4114800" cy="2926080"/>
-          </a:xfrm>
-          <a:prstGeom prst="roundRect">
-            <a:avLst>
-              <a:gd name="adj" fmla="val 3125"/>
-            </a:avLst>
-          </a:prstGeom>
-          <a:solidFill>
-            <a:srgbClr val="1E2761"/>
-          </a:solidFill>
-          <a:ln/>
-        </p:spPr>
-        <p:txBody>
-          <a:bodyPr/>
-          <a:lstStyle/>
-          <a:p>
-            <a:endParaRPr/>
-          </a:p>
-        </p:txBody>
-      </p:sp>
-      <p:sp>
-        <p:nvSpPr>
-          <p:cNvPr id="17" name="Shape 13"/>
-          <p:cNvSpPr/>
-          <p:nvPr/>
-        </p:nvSpPr>
-        <p:spPr>
-          <a:xfrm>
-            <a:off x="7818120" y="2286000"/>
-            <a:ext cx="621792" cy="621792"/>
-          </a:xfrm>
-          <a:prstGeom prst="ellipse">
-            <a:avLst/>
-          </a:prstGeom>
-          <a:solidFill>
-            <a:srgbClr val="C9A227"/>
-          </a:solidFill>
-          <a:ln/>
-        </p:spPr>
-        <p:txBody>
-          <a:bodyPr/>
-          <a:lstStyle/>
-          <a:p>
-            <a:endParaRPr/>
-          </a:p>
-        </p:txBody>
-      </p:sp>
-      <p:pic>
-        <p:nvPicPr>
-          <p:cNvPr id="18" name="Image 2" descr="/tmp/work/deck/icons/handholding_navy.png"/>
-          <p:cNvPicPr>
-            <a:picLocks noChangeAspect="1"/>
-          </p:cNvPicPr>
-          <p:nvPr/>
-        </p:nvPicPr>
-        <p:blipFill>
-          <a:blip r:embed="rId5"/>
-          <a:stretch>
-            <a:fillRect/>
-          </a:stretch>
-        </p:blipFill>
-        <p:spPr>
-          <a:xfrm>
-            <a:off x="7967350" y="2435230"/>
-            <a:ext cx="323332" cy="323332"/>
-          </a:xfrm>
-          <a:prstGeom prst="rect">
-            <a:avLst/>
-          </a:prstGeom>
-        </p:spPr>
-      </p:pic>
-      <p:sp>
-        <p:nvSpPr>
-          <p:cNvPr id="19" name="Text 14"/>
-          <p:cNvSpPr/>
-          <p:nvPr/>
-        </p:nvSpPr>
-        <p:spPr>
-          <a:xfrm>
-            <a:off x="7818120" y="3063240"/>
-            <a:ext cx="3383280" cy="457200"/>
-          </a:xfrm>
-          <a:prstGeom prst="rect">
-            <a:avLst/>
-          </a:prstGeom>
-          <a:noFill/>
-          <a:ln/>
-        </p:spPr>
-        <p:txBody>
-          <a:bodyPr wrap="square" lIns="0" tIns="0" rIns="0" bIns="0" rtlCol="0" anchor="ctr"/>
-          <a:lstStyle/>
-          <a:p>
-            <a:pPr marL="0" indent="0">
-              <a:buNone/>
-            </a:pPr>
-            <a:r>
-              <a:rPr lang="en-US" sz="1600" b="1" dirty="0">
-                <a:solidFill>
-                  <a:srgbClr val="FFFFFF"/>
-                </a:solidFill>
-                <a:latin typeface="Cambria" pitchFamily="34" charset="0"/>
-                <a:ea typeface="Cambria" pitchFamily="34" charset="-122"/>
-                <a:cs typeface="Cambria" pitchFamily="34" charset="-120"/>
-              </a:rPr>
-              <a:t>Unidades deficitarias</a:t>
-            </a:r>
-            <a:endParaRPr lang="en-US" sz="1600" dirty="0"/>
-          </a:p>
-        </p:txBody>
-      </p:sp>
-      <p:sp>
-        <p:nvSpPr>
-          <p:cNvPr id="20" name="Text 15"/>
-          <p:cNvSpPr/>
-          <p:nvPr/>
-        </p:nvSpPr>
-        <p:spPr>
-          <a:xfrm>
-            <a:off x="7818120" y="3538728"/>
-            <a:ext cx="3383280" cy="1234440"/>
-          </a:xfrm>
-          <a:prstGeom prst="rect">
-            <a:avLst/>
-          </a:prstGeom>
-          <a:noFill/>
-          <a:ln/>
-        </p:spPr>
-        <p:txBody>
-          <a:bodyPr wrap="square" lIns="0" tIns="0" rIns="0" bIns="0" rtlCol="0" anchor="ctr"/>
-          <a:lstStyle/>
-          <a:p>
-            <a:pPr marL="0" indent="0">
-              <a:lnSpc>
-                <a:spcPct val="120000"/>
-              </a:lnSpc>
-              <a:buNone/>
-            </a:pPr>
-            <a:r>
-              <a:rPr lang="en-US" sz="1200" dirty="0">
-                <a:solidFill>
-                  <a:srgbClr val="CADCFC"/>
-                </a:solidFill>
-                <a:latin typeface="Calibri" pitchFamily="34" charset="0"/>
-                <a:ea typeface="Calibri" pitchFamily="34" charset="-122"/>
-                <a:cs typeface="Calibri" pitchFamily="34" charset="-120"/>
-              </a:rPr>
-              <a:t>Empresas, gobierno y personas que necesitan financiamiento para operar, invertir o consumir.</a:t>
-            </a:r>
-            <a:endParaRPr lang="en-US" sz="1200" dirty="0"/>
-          </a:p>
-        </p:txBody>
-      </p:sp>
-      <p:sp>
-        <p:nvSpPr>
-          <p:cNvPr id="21" name="Shape 16"/>
-          <p:cNvSpPr/>
-          <p:nvPr/>
-        </p:nvSpPr>
-        <p:spPr>
-          <a:xfrm>
-            <a:off x="640080" y="5120640"/>
-            <a:ext cx="10908792" cy="914400"/>
-          </a:xfrm>
-          <a:prstGeom prst="roundRect">
-            <a:avLst>
-              <a:gd name="adj" fmla="val 8000"/>
-            </a:avLst>
-          </a:prstGeom>
-          <a:solidFill>
-            <a:srgbClr val="EEF3FC"/>
-          </a:solidFill>
-          <a:ln/>
-        </p:spPr>
-        <p:txBody>
-          <a:bodyPr/>
-          <a:lstStyle/>
-          <a:p>
-            <a:endParaRPr/>
-          </a:p>
-        </p:txBody>
-      </p:sp>
-      <p:sp>
-        <p:nvSpPr>
-          <p:cNvPr id="22" name="Text 17"/>
-          <p:cNvSpPr/>
-          <p:nvPr/>
-        </p:nvSpPr>
-        <p:spPr>
-          <a:xfrm>
-            <a:off x="777240" y="5010912"/>
-            <a:ext cx="548640" cy="822960"/>
-          </a:xfrm>
-          <a:prstGeom prst="rect">
-            <a:avLst/>
-          </a:prstGeom>
-          <a:noFill/>
-          <a:ln/>
-        </p:spPr>
-        <p:txBody>
-          <a:bodyPr wrap="square" lIns="0" tIns="0" rIns="0" bIns="0" rtlCol="0" anchor="ctr"/>
-          <a:lstStyle/>
-          <a:p>
-            <a:pPr marL="0" indent="0">
-              <a:buNone/>
-            </a:pPr>
-            <a:r>
-              <a:rPr lang="en-US" sz="4600" b="1" dirty="0">
-                <a:solidFill>
-                  <a:srgbClr val="C9A227"/>
-                </a:solidFill>
-                <a:latin typeface="Cambria" pitchFamily="34" charset="0"/>
-                <a:ea typeface="Cambria" pitchFamily="34" charset="-122"/>
-                <a:cs typeface="Cambria" pitchFamily="34" charset="-120"/>
-              </a:rPr>
-              <a:t>“</a:t>
-            </a:r>
-            <a:endParaRPr lang="en-US" sz="4600" dirty="0"/>
-          </a:p>
-        </p:txBody>
-      </p:sp>
-      <p:sp>
-        <p:nvSpPr>
-          <p:cNvPr id="23" name="Text 18"/>
-          <p:cNvSpPr/>
-          <p:nvPr/>
-        </p:nvSpPr>
-        <p:spPr>
-          <a:xfrm>
-            <a:off x="1325880" y="5212080"/>
-            <a:ext cx="9966960" cy="731520"/>
-          </a:xfrm>
-          <a:prstGeom prst="rect">
-            <a:avLst/>
-          </a:prstGeom>
-          <a:noFill/>
-          <a:ln/>
-        </p:spPr>
-        <p:txBody>
-          <a:bodyPr wrap="square" lIns="0" tIns="0" rIns="0" bIns="0" rtlCol="0" anchor="ctr"/>
-          <a:lstStyle/>
-          <a:p>
-            <a:pPr marL="0" indent="0">
-              <a:lnSpc>
-                <a:spcPct val="115000"/>
-              </a:lnSpc>
-              <a:buNone/>
-            </a:pPr>
-            <a:r>
-              <a:rPr lang="en-US" sz="1200" i="1" dirty="0">
-                <a:solidFill>
-                  <a:srgbClr val="1E2761"/>
-                </a:solidFill>
-                <a:latin typeface="Calibri" pitchFamily="34" charset="0"/>
-                <a:ea typeface="Calibri" pitchFamily="34" charset="-122"/>
-                <a:cs typeface="Calibri" pitchFamily="34" charset="-120"/>
-              </a:rPr>
-              <a:t>El mercado financiero tiene por objeto canalizar recursos de las unidades superavitarias de la economía a las unidades deficitarias.</a:t>
-            </a:r>
-            <a:r>
-              <a:rPr lang="en-US" sz="1200" b="1" dirty="0">
-                <a:solidFill>
-                  <a:srgbClr val="5B6482"/>
-                </a:solidFill>
-                <a:latin typeface="Calibri" pitchFamily="34" charset="0"/>
-                <a:ea typeface="Calibri" pitchFamily="34" charset="-122"/>
-                <a:cs typeface="Calibri" pitchFamily="34" charset="-120"/>
-              </a:rPr>
-              <a:t>  — Mántey de Anguiano (2024), Lección 2</a:t>
-            </a:r>
-            <a:endParaRPr lang="en-US" sz="1200" dirty="0"/>
-          </a:p>
-        </p:txBody>
-      </p:sp>
-      <p:sp>
-        <p:nvSpPr>
-          <p:cNvPr id="24" name="Text 19"/>
+        </p:txBody>
+      </p:sp>
+      <p:sp>
+        <p:nvSpPr>
+          <p:cNvPr id="28" name="Text 25"/>
           <p:cNvSpPr/>
           <p:nvPr/>
         </p:nvSpPr>
@@ -6050,7 +5858,7 @@
                 <a:ea typeface="Calibri" pitchFamily="34" charset="-122"/>
                 <a:cs typeface="Calibri" pitchFamily="34" charset="-120"/>
               </a:rPr>
-              <a:t>ACTIVO FINANCIERO E INTERMEDIACIÓN · 11 MIN</a:t>
+              <a:t>INTERMEDIACIÓN FINANCIERA · 7 MIN</a:t>
             </a:r>
             <a:endParaRPr lang="en-US" sz="1200" dirty="0"/>
           </a:p>
@@ -6058,7 +5866,7 @@
       </p:sp>
       <p:sp>
         <p:nvSpPr>
-          <p:cNvPr id="3" name="Text 1"/>
+          <p:cNvPr id="5" name="Text 2"/>
           <p:cNvSpPr/>
           <p:nvPr/>
         </p:nvSpPr>
@@ -6089,7 +5897,7 @@
                 <a:ea typeface="Cambria" pitchFamily="34" charset="-122"/>
                 <a:cs typeface="Cambria" pitchFamily="34" charset="-120"/>
               </a:rPr>
-              <a:t>Dos caminos para el crédito</a:t>
+              <a:t>El ciclo del crédito directo</a:t>
             </a:r>
             <a:endParaRPr lang="en-US" sz="3200" dirty="0"/>
           </a:p>
@@ -6097,7 +5905,7 @@
       </p:sp>
       <p:sp>
         <p:nvSpPr>
-          <p:cNvPr id="4" name="Text 2"/>
+          <p:cNvPr id="6" name="Text 3"/>
           <p:cNvSpPr/>
           <p:nvPr/>
         </p:nvSpPr>
@@ -6128,7 +5936,7 @@
                 <a:ea typeface="Calibri" pitchFamily="34" charset="-122"/>
                 <a:cs typeface="Calibri" pitchFamily="34" charset="-120"/>
               </a:rPr>
-              <a:t>La intermediación bancaria y el mercado bursátil canalizan el ahorro de formas distintas.</a:t>
+              <a:t>El camino directo también tiene su propio ciclo, en espejo del de captación-colocación.</a:t>
             </a:r>
             <a:endParaRPr lang="en-US" sz="1400" dirty="0"/>
           </a:p>
@@ -6136,24 +5944,200 @@
       </p:sp>
       <p:sp>
         <p:nvSpPr>
-          <p:cNvPr id="5" name="Shape 3"/>
-          <p:cNvSpPr/>
-          <p:nvPr/>
-        </p:nvSpPr>
-        <p:spPr>
-          <a:xfrm>
-            <a:off x="640080" y="2103120"/>
-            <a:ext cx="5257800" cy="3703320"/>
+          <p:cNvPr id="7" name="Shape 4"/>
+          <p:cNvSpPr/>
+          <p:nvPr/>
+        </p:nvSpPr>
+        <p:spPr>
+          <a:xfrm>
+            <a:off x="640080" y="1965960"/>
+            <a:ext cx="10908792" cy="960120"/>
           </a:xfrm>
           <a:prstGeom prst="roundRect">
             <a:avLst>
-              <a:gd name="adj" fmla="val 2469"/>
+              <a:gd name="adj" fmla="val 8571"/>
+            </a:avLst>
+          </a:prstGeom>
+          <a:solidFill>
+            <a:srgbClr val="EEF3FC"/>
+          </a:solidFill>
+          <a:ln/>
+        </p:spPr>
+        <p:txBody>
+          <a:bodyPr/>
+          <a:lstStyle/>
+          <a:p>
+            <a:endParaRPr/>
+          </a:p>
+        </p:txBody>
+      </p:sp>
+      <p:sp>
+        <p:nvSpPr>
+          <p:cNvPr id="8" name="Shape 5"/>
+          <p:cNvSpPr/>
+          <p:nvPr/>
+        </p:nvSpPr>
+        <p:spPr>
+          <a:xfrm>
+            <a:off x="822960" y="2162556"/>
+            <a:ext cx="566928" cy="566928"/>
+          </a:xfrm>
+          <a:prstGeom prst="ellipse">
+            <a:avLst/>
+          </a:prstGeom>
+          <a:solidFill>
+            <a:srgbClr val="1E2761"/>
+          </a:solidFill>
+          <a:ln/>
+        </p:spPr>
+        <p:txBody>
+          <a:bodyPr/>
+          <a:lstStyle/>
+          <a:p>
+            <a:endParaRPr/>
+          </a:p>
+        </p:txBody>
+      </p:sp>
+      <p:sp>
+        <p:nvSpPr>
+          <p:cNvPr id="9" name="Text 6"/>
+          <p:cNvSpPr/>
+          <p:nvPr/>
+        </p:nvSpPr>
+        <p:spPr>
+          <a:xfrm>
+            <a:off x="822960" y="2162556"/>
+            <a:ext cx="566928" cy="566928"/>
+          </a:xfrm>
+          <a:prstGeom prst="rect">
+            <a:avLst/>
+          </a:prstGeom>
+          <a:noFill/>
+          <a:ln/>
+        </p:spPr>
+        <p:txBody>
+          <a:bodyPr wrap="square" lIns="0" tIns="0" rIns="0" bIns="0" rtlCol="0" anchor="ctr"/>
+          <a:lstStyle/>
+          <a:p>
+            <a:pPr marL="0" indent="0" algn="ctr">
+              <a:buNone/>
+            </a:pPr>
+            <a:r>
+              <a:rPr lang="en-US" sz="2000" b="1" dirty="0">
+                <a:solidFill>
+                  <a:srgbClr val="C9A227"/>
+                </a:solidFill>
+                <a:latin typeface="Cambria" pitchFamily="34" charset="0"/>
+                <a:ea typeface="Cambria" pitchFamily="34" charset="-122"/>
+                <a:cs typeface="Cambria" pitchFamily="34" charset="-120"/>
+              </a:rPr>
+              <a:t>1</a:t>
+            </a:r>
+            <a:endParaRPr lang="en-US" sz="2000" dirty="0"/>
+          </a:p>
+        </p:txBody>
+      </p:sp>
+      <p:sp>
+        <p:nvSpPr>
+          <p:cNvPr id="10" name="Text 7"/>
+          <p:cNvSpPr/>
+          <p:nvPr/>
+        </p:nvSpPr>
+        <p:spPr>
+          <a:xfrm>
+            <a:off x="1600200" y="2084832"/>
+            <a:ext cx="9326880" cy="292608"/>
+          </a:xfrm>
+          <a:prstGeom prst="rect">
+            <a:avLst/>
+          </a:prstGeom>
+          <a:noFill/>
+          <a:ln/>
+        </p:spPr>
+        <p:txBody>
+          <a:bodyPr wrap="square" lIns="0" tIns="0" rIns="0" bIns="0" rtlCol="0" anchor="ctr"/>
+          <a:lstStyle/>
+          <a:p>
+            <a:pPr marL="0" indent="0">
+              <a:buNone/>
+            </a:pPr>
+            <a:r>
+              <a:rPr lang="en-US" sz="1350" b="1" dirty="0">
+                <a:solidFill>
+                  <a:srgbClr val="1E2761"/>
+                </a:solidFill>
+                <a:latin typeface="Calibri" pitchFamily="34" charset="0"/>
+                <a:ea typeface="Calibri" pitchFamily="34" charset="-122"/>
+                <a:cs typeface="Calibri" pitchFamily="34" charset="-120"/>
+              </a:rPr>
+              <a:t>Emisión</a:t>
+            </a:r>
+            <a:endParaRPr lang="en-US" sz="1350" dirty="0"/>
+          </a:p>
+        </p:txBody>
+      </p:sp>
+      <p:sp>
+        <p:nvSpPr>
+          <p:cNvPr id="11" name="Text 8"/>
+          <p:cNvSpPr/>
+          <p:nvPr/>
+        </p:nvSpPr>
+        <p:spPr>
+          <a:xfrm>
+            <a:off x="1600200" y="2386584"/>
+            <a:ext cx="9326880" cy="502920"/>
+          </a:xfrm>
+          <a:prstGeom prst="rect">
+            <a:avLst/>
+          </a:prstGeom>
+          <a:noFill/>
+          <a:ln/>
+        </p:spPr>
+        <p:txBody>
+          <a:bodyPr wrap="square" lIns="0" tIns="0" rIns="0" bIns="0" rtlCol="0" anchor="ctr"/>
+          <a:lstStyle/>
+          <a:p>
+            <a:pPr marL="0" indent="0">
+              <a:lnSpc>
+                <a:spcPct val="112000"/>
+              </a:lnSpc>
+              <a:buNone/>
+            </a:pPr>
+            <a:r>
+              <a:rPr lang="en-US" sz="1050" dirty="0">
+                <a:solidFill>
+                  <a:srgbClr val="27314D"/>
+                </a:solidFill>
+                <a:latin typeface="Calibri" pitchFamily="34" charset="0"/>
+                <a:ea typeface="Calibri" pitchFamily="34" charset="-122"/>
+                <a:cs typeface="Calibri" pitchFamily="34" charset="-120"/>
+              </a:rPr>
+              <a:t>La empresa o el gobierno coloca el instrumento directamente con inversionistas, a cambio de sus recursos.</a:t>
+            </a:r>
+            <a:endParaRPr lang="en-US" sz="1050" dirty="0"/>
+          </a:p>
+        </p:txBody>
+      </p:sp>
+      <p:sp>
+        <p:nvSpPr>
+          <p:cNvPr id="12" name="Shape 9"/>
+          <p:cNvSpPr/>
+          <p:nvPr/>
+        </p:nvSpPr>
+        <p:spPr>
+          <a:xfrm>
+            <a:off x="640080" y="3063240"/>
+            <a:ext cx="10908792" cy="960120"/>
+          </a:xfrm>
+          <a:prstGeom prst="roundRect">
+            <a:avLst>
+              <a:gd name="adj" fmla="val 8571"/>
             </a:avLst>
           </a:prstGeom>
           <a:solidFill>
             <a:srgbClr val="FFFFFF"/>
           </a:solidFill>
-          <a:ln w="15875">
+          <a:ln w="12700">
             <a:solidFill>
               <a:srgbClr val="E1E7F5"/>
             </a:solidFill>
@@ -6170,14 +6154,14 @@
       </p:sp>
       <p:sp>
         <p:nvSpPr>
-          <p:cNvPr id="6" name="Shape 4"/>
-          <p:cNvSpPr/>
-          <p:nvPr/>
-        </p:nvSpPr>
-        <p:spPr>
-          <a:xfrm>
-            <a:off x="1005840" y="2468880"/>
-            <a:ext cx="621792" cy="621792"/>
+          <p:cNvPr id="13" name="Shape 10"/>
+          <p:cNvSpPr/>
+          <p:nvPr/>
+        </p:nvSpPr>
+        <p:spPr>
+          <a:xfrm>
+            <a:off x="822960" y="3259836"/>
+            <a:ext cx="566928" cy="566928"/>
           </a:xfrm>
           <a:prstGeom prst="ellipse">
             <a:avLst/>
@@ -6195,40 +6179,16 @@
           </a:p>
         </p:txBody>
       </p:sp>
-      <p:pic>
-        <p:nvPicPr>
-          <p:cNvPr id="7" name="Image 0" descr="/tmp/work/deck/icons/university_navy.png"/>
-          <p:cNvPicPr>
-            <a:picLocks noChangeAspect="1"/>
-          </p:cNvPicPr>
-          <p:nvPr/>
-        </p:nvPicPr>
-        <p:blipFill>
-          <a:blip r:embed="rId3"/>
-          <a:stretch>
-            <a:fillRect/>
-          </a:stretch>
-        </p:blipFill>
-        <p:spPr>
-          <a:xfrm>
-            <a:off x="1155070" y="2618110"/>
-            <a:ext cx="323332" cy="323332"/>
-          </a:xfrm>
-          <a:prstGeom prst="rect">
-            <a:avLst/>
-          </a:prstGeom>
-        </p:spPr>
-      </p:pic>
-      <p:sp>
-        <p:nvSpPr>
-          <p:cNvPr id="8" name="Text 5"/>
-          <p:cNvSpPr/>
-          <p:nvPr/>
-        </p:nvSpPr>
-        <p:spPr>
-          <a:xfrm>
-            <a:off x="1783080" y="2487168"/>
-            <a:ext cx="3794760" cy="347472"/>
+      <p:sp>
+        <p:nvSpPr>
+          <p:cNvPr id="14" name="Text 11"/>
+          <p:cNvSpPr/>
+          <p:nvPr/>
+        </p:nvSpPr>
+        <p:spPr>
+          <a:xfrm>
+            <a:off x="822960" y="3259836"/>
+            <a:ext cx="566928" cy="566928"/>
           </a:xfrm>
           <a:prstGeom prst="rect">
             <a:avLst/>
@@ -6240,34 +6200,34 @@
           <a:bodyPr wrap="square" lIns="0" tIns="0" rIns="0" bIns="0" rtlCol="0" anchor="ctr"/>
           <a:lstStyle/>
           <a:p>
-            <a:pPr marL="0" indent="0">
-              <a:buNone/>
-            </a:pPr>
-            <a:r>
-              <a:rPr lang="en-US" sz="1700" b="1" dirty="0">
-                <a:solidFill>
-                  <a:srgbClr val="1E2761"/>
+            <a:pPr marL="0" indent="0" algn="ctr">
+              <a:buNone/>
+            </a:pPr>
+            <a:r>
+              <a:rPr lang="en-US" sz="2000" b="1" dirty="0">
+                <a:solidFill>
+                  <a:srgbClr val="C9A227"/>
                 </a:solidFill>
                 <a:latin typeface="Cambria" pitchFamily="34" charset="0"/>
                 <a:ea typeface="Cambria" pitchFamily="34" charset="-122"/>
                 <a:cs typeface="Cambria" pitchFamily="34" charset="-120"/>
               </a:rPr>
-              <a:t>Intermediación bancaria</a:t>
-            </a:r>
-            <a:endParaRPr lang="en-US" sz="1700" dirty="0"/>
-          </a:p>
-        </p:txBody>
-      </p:sp>
-      <p:sp>
-        <p:nvSpPr>
-          <p:cNvPr id="9" name="Text 6"/>
-          <p:cNvSpPr/>
-          <p:nvPr/>
-        </p:nvSpPr>
-        <p:spPr>
-          <a:xfrm>
-            <a:off x="1783080" y="2816352"/>
-            <a:ext cx="3794760" cy="256032"/>
+              <a:t>2</a:t>
+            </a:r>
+            <a:endParaRPr lang="en-US" sz="2000" dirty="0"/>
+          </a:p>
+        </p:txBody>
+      </p:sp>
+      <p:sp>
+        <p:nvSpPr>
+          <p:cNvPr id="15" name="Text 12"/>
+          <p:cNvSpPr/>
+          <p:nvPr/>
+        </p:nvSpPr>
+        <p:spPr>
+          <a:xfrm>
+            <a:off x="1600200" y="3182112"/>
+            <a:ext cx="9326880" cy="292608"/>
           </a:xfrm>
           <a:prstGeom prst="rect">
             <a:avLst/>
@@ -6283,57 +6243,30 @@
               <a:buNone/>
             </a:pPr>
             <a:r>
-              <a:rPr lang="en-US" sz="1050" b="1" kern="0" spc="100" dirty="0">
-                <a:solidFill>
-                  <a:srgbClr val="C9A227"/>
+              <a:rPr lang="en-US" sz="1350" b="1" dirty="0">
+                <a:solidFill>
+                  <a:srgbClr val="1E2761"/>
                 </a:solidFill>
                 <a:latin typeface="Calibri" pitchFamily="34" charset="0"/>
                 <a:ea typeface="Calibri" pitchFamily="34" charset="-122"/>
                 <a:cs typeface="Calibri" pitchFamily="34" charset="-120"/>
               </a:rPr>
-              <a:t>CRÉDITO INDIRECTO</a:t>
-            </a:r>
-            <a:endParaRPr lang="en-US" sz="1050" dirty="0"/>
-          </a:p>
-        </p:txBody>
-      </p:sp>
-      <p:sp>
-        <p:nvSpPr>
-          <p:cNvPr id="10" name="Shape 7"/>
-          <p:cNvSpPr/>
-          <p:nvPr/>
-        </p:nvSpPr>
-        <p:spPr>
-          <a:xfrm>
-            <a:off x="1024128" y="3465576"/>
-            <a:ext cx="82296" cy="82296"/>
-          </a:xfrm>
-          <a:prstGeom prst="ellipse">
-            <a:avLst/>
-          </a:prstGeom>
-          <a:solidFill>
-            <a:srgbClr val="C9A227"/>
-          </a:solidFill>
-          <a:ln/>
-        </p:spPr>
-        <p:txBody>
-          <a:bodyPr/>
-          <a:lstStyle/>
-          <a:p>
-            <a:endParaRPr/>
-          </a:p>
-        </p:txBody>
-      </p:sp>
-      <p:sp>
-        <p:nvSpPr>
-          <p:cNvPr id="11" name="Text 8"/>
-          <p:cNvSpPr/>
-          <p:nvPr/>
-        </p:nvSpPr>
-        <p:spPr>
-          <a:xfrm>
-            <a:off x="1234440" y="3328416"/>
-            <a:ext cx="4297680" cy="685800"/>
+              <a:t>Negociación</a:t>
+            </a:r>
+            <a:endParaRPr lang="en-US" sz="1350" dirty="0"/>
+          </a:p>
+        </p:txBody>
+      </p:sp>
+      <p:sp>
+        <p:nvSpPr>
+          <p:cNvPr id="16" name="Text 13"/>
+          <p:cNvSpPr/>
+          <p:nvPr/>
+        </p:nvSpPr>
+        <p:spPr>
+          <a:xfrm>
+            <a:off x="1600200" y="3483864"/>
+            <a:ext cx="9326880" cy="502920"/>
           </a:xfrm>
           <a:prstGeom prst="rect">
             <a:avLst/>
@@ -6347,12 +6280,12 @@
           <a:p>
             <a:pPr marL="0" indent="0">
               <a:lnSpc>
-                <a:spcPct val="115000"/>
+                <a:spcPct val="112000"/>
               </a:lnSpc>
               <a:buNone/>
             </a:pPr>
             <a:r>
-              <a:rPr lang="en-US" sz="1200" dirty="0">
+              <a:rPr lang="en-US" sz="1050" dirty="0">
                 <a:solidFill>
                   <a:srgbClr val="27314D"/>
                 </a:solidFill>
@@ -6360,28 +6293,57 @@
                 <a:ea typeface="Calibri" pitchFamily="34" charset="-122"/>
                 <a:cs typeface="Calibri" pitchFamily="34" charset="-120"/>
               </a:rPr>
-              <a:t>El banco capta depósitos y emite deudas propias (indirectas): pagarés, certificados de depósito.</a:t>
-            </a:r>
-            <a:endParaRPr lang="en-US" sz="1200" dirty="0"/>
-          </a:p>
-        </p:txBody>
-      </p:sp>
-      <p:sp>
-        <p:nvSpPr>
-          <p:cNvPr id="12" name="Shape 9"/>
-          <p:cNvSpPr/>
-          <p:nvPr/>
-        </p:nvSpPr>
-        <p:spPr>
-          <a:xfrm>
-            <a:off x="1024128" y="4215384"/>
-            <a:ext cx="82296" cy="82296"/>
+              <a:t>El inversionista que lo compró puede revenderlo a otro inversionista antes de su vencimiento, en el mercado secundario.</a:t>
+            </a:r>
+            <a:endParaRPr lang="en-US" sz="1050" dirty="0"/>
+          </a:p>
+        </p:txBody>
+      </p:sp>
+      <p:sp>
+        <p:nvSpPr>
+          <p:cNvPr id="17" name="Shape 14"/>
+          <p:cNvSpPr/>
+          <p:nvPr/>
+        </p:nvSpPr>
+        <p:spPr>
+          <a:xfrm>
+            <a:off x="640080" y="4160520"/>
+            <a:ext cx="10908792" cy="960120"/>
+          </a:xfrm>
+          <a:prstGeom prst="roundRect">
+            <a:avLst>
+              <a:gd name="adj" fmla="val 8571"/>
+            </a:avLst>
+          </a:prstGeom>
+          <a:solidFill>
+            <a:srgbClr val="EEF3FC"/>
+          </a:solidFill>
+          <a:ln/>
+        </p:spPr>
+        <p:txBody>
+          <a:bodyPr/>
+          <a:lstStyle/>
+          <a:p>
+            <a:endParaRPr/>
+          </a:p>
+        </p:txBody>
+      </p:sp>
+      <p:sp>
+        <p:nvSpPr>
+          <p:cNvPr id="18" name="Shape 15"/>
+          <p:cNvSpPr/>
+          <p:nvPr/>
+        </p:nvSpPr>
+        <p:spPr>
+          <a:xfrm>
+            <a:off x="822960" y="4357116"/>
+            <a:ext cx="566928" cy="566928"/>
           </a:xfrm>
           <a:prstGeom prst="ellipse">
             <a:avLst/>
           </a:prstGeom>
           <a:solidFill>
-            <a:srgbClr val="C9A227"/>
+            <a:srgbClr val="1E2761"/>
           </a:solidFill>
           <a:ln/>
         </p:spPr>
@@ -6395,14 +6357,14 @@
       </p:sp>
       <p:sp>
         <p:nvSpPr>
-          <p:cNvPr id="13" name="Text 10"/>
-          <p:cNvSpPr/>
-          <p:nvPr/>
-        </p:nvSpPr>
-        <p:spPr>
-          <a:xfrm>
-            <a:off x="1234440" y="4078224"/>
-            <a:ext cx="4297680" cy="685800"/>
+          <p:cNvPr id="19" name="Text 16"/>
+          <p:cNvSpPr/>
+          <p:nvPr/>
+        </p:nvSpPr>
+        <p:spPr>
+          <a:xfrm>
+            <a:off x="822960" y="4357116"/>
+            <a:ext cx="566928" cy="566928"/>
           </a:xfrm>
           <a:prstGeom prst="rect">
             <a:avLst/>
@@ -6414,64 +6376,73 @@
           <a:bodyPr wrap="square" lIns="0" tIns="0" rIns="0" bIns="0" rtlCol="0" anchor="ctr"/>
           <a:lstStyle/>
           <a:p>
+            <a:pPr marL="0" indent="0" algn="ctr">
+              <a:buNone/>
+            </a:pPr>
+            <a:r>
+              <a:rPr lang="en-US" sz="2000" b="1" dirty="0">
+                <a:solidFill>
+                  <a:srgbClr val="C9A227"/>
+                </a:solidFill>
+                <a:latin typeface="Cambria" pitchFamily="34" charset="0"/>
+                <a:ea typeface="Cambria" pitchFamily="34" charset="-122"/>
+                <a:cs typeface="Cambria" pitchFamily="34" charset="-120"/>
+              </a:rPr>
+              <a:t>3</a:t>
+            </a:r>
+            <a:endParaRPr lang="en-US" sz="2000" dirty="0"/>
+          </a:p>
+        </p:txBody>
+      </p:sp>
+      <p:sp>
+        <p:nvSpPr>
+          <p:cNvPr id="20" name="Text 17"/>
+          <p:cNvSpPr/>
+          <p:nvPr/>
+        </p:nvSpPr>
+        <p:spPr>
+          <a:xfrm>
+            <a:off x="1600200" y="4279392"/>
+            <a:ext cx="9326880" cy="292608"/>
+          </a:xfrm>
+          <a:prstGeom prst="rect">
+            <a:avLst/>
+          </a:prstGeom>
+          <a:noFill/>
+          <a:ln/>
+        </p:spPr>
+        <p:txBody>
+          <a:bodyPr wrap="square" lIns="0" tIns="0" rIns="0" bIns="0" rtlCol="0" anchor="ctr"/>
+          <a:lstStyle/>
+          <a:p>
             <a:pPr marL="0" indent="0">
-              <a:lnSpc>
-                <a:spcPct val="115000"/>
-              </a:lnSpc>
-              <a:buNone/>
-            </a:pPr>
-            <a:r>
-              <a:rPr lang="en-US" sz="1200" dirty="0">
-                <a:solidFill>
-                  <a:srgbClr val="27314D"/>
+              <a:buNone/>
+            </a:pPr>
+            <a:r>
+              <a:rPr lang="en-US" sz="1350" b="1" dirty="0">
+                <a:solidFill>
+                  <a:srgbClr val="1E2761"/>
                 </a:solidFill>
                 <a:latin typeface="Calibri" pitchFamily="34" charset="0"/>
                 <a:ea typeface="Calibri" pitchFamily="34" charset="-122"/>
                 <a:cs typeface="Calibri" pitchFamily="34" charset="-120"/>
               </a:rPr>
-              <a:t>El banco asume el riesgo y presta directamente a empresas, personas y gobierno.</a:t>
-            </a:r>
-            <a:endParaRPr lang="en-US" sz="1200" dirty="0"/>
-          </a:p>
-        </p:txBody>
-      </p:sp>
-      <p:sp>
-        <p:nvSpPr>
-          <p:cNvPr id="14" name="Shape 11"/>
-          <p:cNvSpPr/>
-          <p:nvPr/>
-        </p:nvSpPr>
-        <p:spPr>
-          <a:xfrm>
-            <a:off x="1024128" y="4965192"/>
-            <a:ext cx="82296" cy="82296"/>
-          </a:xfrm>
-          <a:prstGeom prst="ellipse">
-            <a:avLst/>
-          </a:prstGeom>
-          <a:solidFill>
-            <a:srgbClr val="C9A227"/>
-          </a:solidFill>
-          <a:ln/>
-        </p:spPr>
-        <p:txBody>
-          <a:bodyPr/>
-          <a:lstStyle/>
-          <a:p>
-            <a:endParaRPr/>
-          </a:p>
-        </p:txBody>
-      </p:sp>
-      <p:sp>
-        <p:nvSpPr>
-          <p:cNvPr id="15" name="Text 12"/>
-          <p:cNvSpPr/>
-          <p:nvPr/>
-        </p:nvSpPr>
-        <p:spPr>
-          <a:xfrm>
-            <a:off x="1234440" y="4828032"/>
-            <a:ext cx="4297680" cy="685800"/>
+              <a:t>Liquidación</a:t>
+            </a:r>
+            <a:endParaRPr lang="en-US" sz="1350" dirty="0"/>
+          </a:p>
+        </p:txBody>
+      </p:sp>
+      <p:sp>
+        <p:nvSpPr>
+          <p:cNvPr id="21" name="Text 18"/>
+          <p:cNvSpPr/>
+          <p:nvPr/>
+        </p:nvSpPr>
+        <p:spPr>
+          <a:xfrm>
+            <a:off x="1600200" y="4581144"/>
+            <a:ext cx="9326880" cy="502920"/>
           </a:xfrm>
           <a:prstGeom prst="rect">
             <a:avLst/>
@@ -6485,12 +6456,12 @@
           <a:p>
             <a:pPr marL="0" indent="0">
               <a:lnSpc>
-                <a:spcPct val="115000"/>
+                <a:spcPct val="112000"/>
               </a:lnSpc>
               <a:buNone/>
             </a:pPr>
             <a:r>
-              <a:rPr lang="en-US" sz="1200" dirty="0">
+              <a:rPr lang="en-US" sz="1050" dirty="0">
                 <a:solidFill>
                   <a:srgbClr val="27314D"/>
                 </a:solidFill>
@@ -6498,416 +6469,46 @@
                 <a:ea typeface="Calibri" pitchFamily="34" charset="-122"/>
                 <a:cs typeface="Calibri" pitchFamily="34" charset="-120"/>
               </a:rPr>
-              <a:t>Ejemplo: una persona ahorra en el banco y este otorga un crédito a una empresa.</a:t>
-            </a:r>
-            <a:endParaRPr lang="en-US" sz="1200" dirty="0"/>
-          </a:p>
-        </p:txBody>
-      </p:sp>
-      <p:sp>
-        <p:nvSpPr>
-          <p:cNvPr id="16" name="Shape 13"/>
-          <p:cNvSpPr/>
-          <p:nvPr/>
-        </p:nvSpPr>
-        <p:spPr>
-          <a:xfrm>
-            <a:off x="6263640" y="2103120"/>
-            <a:ext cx="5257800" cy="3703320"/>
-          </a:xfrm>
-          <a:prstGeom prst="roundRect">
-            <a:avLst>
-              <a:gd name="adj" fmla="val 2469"/>
-            </a:avLst>
-          </a:prstGeom>
-          <a:solidFill>
-            <a:srgbClr val="FFFFFF"/>
-          </a:solidFill>
-          <a:ln w="15875">
-            <a:solidFill>
-              <a:srgbClr val="E1E7F5"/>
-            </a:solidFill>
-            <a:prstDash val="solid"/>
-          </a:ln>
-        </p:spPr>
-        <p:txBody>
-          <a:bodyPr/>
-          <a:lstStyle/>
-          <a:p>
-            <a:endParaRPr/>
-          </a:p>
-        </p:txBody>
-      </p:sp>
-      <p:sp>
-        <p:nvSpPr>
-          <p:cNvPr id="17" name="Shape 14"/>
-          <p:cNvSpPr/>
-          <p:nvPr/>
-        </p:nvSpPr>
-        <p:spPr>
-          <a:xfrm>
-            <a:off x="6629400" y="2468880"/>
-            <a:ext cx="621792" cy="621792"/>
-          </a:xfrm>
-          <a:prstGeom prst="ellipse">
-            <a:avLst/>
-          </a:prstGeom>
-          <a:solidFill>
-            <a:srgbClr val="1E2761"/>
-          </a:solidFill>
-          <a:ln/>
-        </p:spPr>
-        <p:txBody>
-          <a:bodyPr/>
-          <a:lstStyle/>
-          <a:p>
-            <a:endParaRPr/>
-          </a:p>
-        </p:txBody>
-      </p:sp>
-      <p:pic>
-        <p:nvPicPr>
-          <p:cNvPr id="18" name="Image 1" descr="/tmp/work/deck/icons/chartline_navy.png"/>
-          <p:cNvPicPr>
-            <a:picLocks noChangeAspect="1"/>
-          </p:cNvPicPr>
-          <p:nvPr/>
-        </p:nvPicPr>
-        <p:blipFill>
-          <a:blip r:embed="rId4"/>
-          <a:stretch>
-            <a:fillRect/>
-          </a:stretch>
-        </p:blipFill>
-        <p:spPr>
-          <a:xfrm>
-            <a:off x="6778630" y="2618110"/>
-            <a:ext cx="323332" cy="323332"/>
-          </a:xfrm>
-          <a:prstGeom prst="rect">
-            <a:avLst/>
-          </a:prstGeom>
-        </p:spPr>
-      </p:pic>
-      <p:sp>
-        <p:nvSpPr>
-          <p:cNvPr id="19" name="Text 15"/>
-          <p:cNvSpPr/>
-          <p:nvPr/>
-        </p:nvSpPr>
-        <p:spPr>
-          <a:xfrm>
-            <a:off x="7406640" y="2487168"/>
-            <a:ext cx="3794760" cy="347472"/>
-          </a:xfrm>
-          <a:prstGeom prst="rect">
-            <a:avLst/>
-          </a:prstGeom>
-          <a:noFill/>
-          <a:ln/>
-        </p:spPr>
-        <p:txBody>
-          <a:bodyPr wrap="square" lIns="0" tIns="0" rIns="0" bIns="0" rtlCol="0" anchor="ctr"/>
+              <a:t>Al vencimiento, el emisor paga directamente al tenedor final registrado en ese momento.</a:t>
+            </a:r>
+            <a:endParaRPr lang="en-US" sz="1050" dirty="0"/>
+          </a:p>
+        </p:txBody>
+      </p:sp>
+      <p:sp>
+        <p:nvSpPr>
+          <p:cNvPr id="27" name="Text 24"/>
+          <p:cNvSpPr/>
+          <p:nvPr/>
+        </p:nvSpPr>
+        <p:spPr>
+          <a:xfrm>
+            <a:off x="640080" y="6400800"/>
+            <a:ext cx="9418320" cy="274320"/>
+          </a:xfrm>
+          <a:prstGeom prst="rect">
+            <a:avLst/>
+          </a:prstGeom>
+          <a:noFill/>
+          <a:ln/>
+        </p:spPr>
+        <p:txBody>
+          <a:bodyPr wrap="square" rtlCol="0" anchor="ctr"/>
           <a:lstStyle/>
           <a:p>
             <a:pPr marL="0" indent="0">
               <a:buNone/>
             </a:pPr>
             <a:r>
-              <a:rPr lang="en-US" sz="1700" b="1" dirty="0">
-                <a:solidFill>
-                  <a:srgbClr val="1E2761"/>
-                </a:solidFill>
-                <a:latin typeface="Cambria" pitchFamily="34" charset="0"/>
-                <a:ea typeface="Cambria" pitchFamily="34" charset="-122"/>
-                <a:cs typeface="Cambria" pitchFamily="34" charset="-120"/>
-              </a:rPr>
-              <a:t>Mercado bursátil</a:t>
-            </a:r>
-            <a:endParaRPr lang="en-US" sz="1700" dirty="0"/>
-          </a:p>
-        </p:txBody>
-      </p:sp>
-      <p:sp>
-        <p:nvSpPr>
-          <p:cNvPr id="20" name="Text 16"/>
-          <p:cNvSpPr/>
-          <p:nvPr/>
-        </p:nvSpPr>
-        <p:spPr>
-          <a:xfrm>
-            <a:off x="7406640" y="2816352"/>
-            <a:ext cx="3794760" cy="256032"/>
-          </a:xfrm>
-          <a:prstGeom prst="rect">
-            <a:avLst/>
-          </a:prstGeom>
-          <a:noFill/>
-          <a:ln/>
-        </p:spPr>
-        <p:txBody>
-          <a:bodyPr wrap="square" lIns="0" tIns="0" rIns="0" bIns="0" rtlCol="0" anchor="ctr"/>
-          <a:lstStyle/>
-          <a:p>
-            <a:pPr marL="0" indent="0">
-              <a:buNone/>
-            </a:pPr>
-            <a:r>
-              <a:rPr lang="en-US" sz="1050" b="1" kern="0" spc="100" dirty="0">
-                <a:solidFill>
-                  <a:srgbClr val="C9A227"/>
+              <a:rPr lang="en-US" sz="950" i="1" dirty="0">
+                <a:solidFill>
+                  <a:srgbClr val="5B6482"/>
                 </a:solidFill>
                 <a:latin typeface="Calibri" pitchFamily="34" charset="0"/>
                 <a:ea typeface="Calibri" pitchFamily="34" charset="-122"/>
                 <a:cs typeface="Calibri" pitchFamily="34" charset="-120"/>
               </a:rPr>
-              <a:t>CRÉDITO DIRECTO</a:t>
-            </a:r>
-            <a:endParaRPr lang="en-US" sz="1050" dirty="0"/>
-          </a:p>
-        </p:txBody>
-      </p:sp>
-      <p:sp>
-        <p:nvSpPr>
-          <p:cNvPr id="21" name="Shape 17"/>
-          <p:cNvSpPr/>
-          <p:nvPr/>
-        </p:nvSpPr>
-        <p:spPr>
-          <a:xfrm>
-            <a:off x="6647688" y="3465576"/>
-            <a:ext cx="82296" cy="82296"/>
-          </a:xfrm>
-          <a:prstGeom prst="ellipse">
-            <a:avLst/>
-          </a:prstGeom>
-          <a:solidFill>
-            <a:srgbClr val="C9A227"/>
-          </a:solidFill>
-          <a:ln/>
-        </p:spPr>
-        <p:txBody>
-          <a:bodyPr/>
-          <a:lstStyle/>
-          <a:p>
-            <a:endParaRPr/>
-          </a:p>
-        </p:txBody>
-      </p:sp>
-      <p:sp>
-        <p:nvSpPr>
-          <p:cNvPr id="22" name="Text 18"/>
-          <p:cNvSpPr/>
-          <p:nvPr/>
-        </p:nvSpPr>
-        <p:spPr>
-          <a:xfrm>
-            <a:off x="6858000" y="3328416"/>
-            <a:ext cx="4297680" cy="685800"/>
-          </a:xfrm>
-          <a:prstGeom prst="rect">
-            <a:avLst/>
-          </a:prstGeom>
-          <a:noFill/>
-          <a:ln/>
-        </p:spPr>
-        <p:txBody>
-          <a:bodyPr wrap="square" lIns="0" tIns="0" rIns="0" bIns="0" rtlCol="0" anchor="ctr"/>
-          <a:lstStyle/>
-          <a:p>
-            <a:pPr marL="0" indent="0">
-              <a:lnSpc>
-                <a:spcPct val="115000"/>
-              </a:lnSpc>
-              <a:buNone/>
-            </a:pPr>
-            <a:r>
-              <a:rPr lang="en-US" sz="1200" dirty="0">
-                <a:solidFill>
-                  <a:srgbClr val="27314D"/>
-                </a:solidFill>
-                <a:latin typeface="Calibri" pitchFamily="34" charset="0"/>
-                <a:ea typeface="Calibri" pitchFamily="34" charset="-122"/>
-                <a:cs typeface="Calibri" pitchFamily="34" charset="-120"/>
-              </a:rPr>
-              <a:t>Empresas y gobierno emiten deudas propias (directas): bonos, papel comercial, acciones.</a:t>
-            </a:r>
-            <a:endParaRPr lang="en-US" sz="1200" dirty="0"/>
-          </a:p>
-        </p:txBody>
-      </p:sp>
-      <p:sp>
-        <p:nvSpPr>
-          <p:cNvPr id="23" name="Shape 19"/>
-          <p:cNvSpPr/>
-          <p:nvPr/>
-        </p:nvSpPr>
-        <p:spPr>
-          <a:xfrm>
-            <a:off x="6647688" y="4215384"/>
-            <a:ext cx="82296" cy="82296"/>
-          </a:xfrm>
-          <a:prstGeom prst="ellipse">
-            <a:avLst/>
-          </a:prstGeom>
-          <a:solidFill>
-            <a:srgbClr val="C9A227"/>
-          </a:solidFill>
-          <a:ln/>
-        </p:spPr>
-        <p:txBody>
-          <a:bodyPr/>
-          <a:lstStyle/>
-          <a:p>
-            <a:endParaRPr/>
-          </a:p>
-        </p:txBody>
-      </p:sp>
-      <p:sp>
-        <p:nvSpPr>
-          <p:cNvPr id="24" name="Text 20"/>
-          <p:cNvSpPr/>
-          <p:nvPr/>
-        </p:nvSpPr>
-        <p:spPr>
-          <a:xfrm>
-            <a:off x="6858000" y="4078224"/>
-            <a:ext cx="4297680" cy="685800"/>
-          </a:xfrm>
-          <a:prstGeom prst="rect">
-            <a:avLst/>
-          </a:prstGeom>
-          <a:noFill/>
-          <a:ln/>
-        </p:spPr>
-        <p:txBody>
-          <a:bodyPr wrap="square" lIns="0" tIns="0" rIns="0" bIns="0" rtlCol="0" anchor="ctr"/>
-          <a:lstStyle/>
-          <a:p>
-            <a:pPr marL="0" indent="0">
-              <a:lnSpc>
-                <a:spcPct val="115000"/>
-              </a:lnSpc>
-              <a:buNone/>
-            </a:pPr>
-            <a:r>
-              <a:rPr lang="en-US" sz="1200" dirty="0">
-                <a:solidFill>
-                  <a:srgbClr val="27314D"/>
-                </a:solidFill>
-                <a:latin typeface="Calibri" pitchFamily="34" charset="0"/>
-                <a:ea typeface="Calibri" pitchFamily="34" charset="-122"/>
-                <a:cs typeface="Calibri" pitchFamily="34" charset="-120"/>
-              </a:rPr>
-              <a:t>El inversionista asume el riesgo directamente frente al emisor del título.</a:t>
-            </a:r>
-            <a:endParaRPr lang="en-US" sz="1200" dirty="0"/>
-          </a:p>
-        </p:txBody>
-      </p:sp>
-      <p:sp>
-        <p:nvSpPr>
-          <p:cNvPr id="25" name="Shape 21"/>
-          <p:cNvSpPr/>
-          <p:nvPr/>
-        </p:nvSpPr>
-        <p:spPr>
-          <a:xfrm>
-            <a:off x="6647688" y="4965192"/>
-            <a:ext cx="82296" cy="82296"/>
-          </a:xfrm>
-          <a:prstGeom prst="ellipse">
-            <a:avLst/>
-          </a:prstGeom>
-          <a:solidFill>
-            <a:srgbClr val="C9A227"/>
-          </a:solidFill>
-          <a:ln/>
-        </p:spPr>
-        <p:txBody>
-          <a:bodyPr/>
-          <a:lstStyle/>
-          <a:p>
-            <a:endParaRPr/>
-          </a:p>
-        </p:txBody>
-      </p:sp>
-      <p:sp>
-        <p:nvSpPr>
-          <p:cNvPr id="26" name="Text 22"/>
-          <p:cNvSpPr/>
-          <p:nvPr/>
-        </p:nvSpPr>
-        <p:spPr>
-          <a:xfrm>
-            <a:off x="6858000" y="4828032"/>
-            <a:ext cx="4297680" cy="685800"/>
-          </a:xfrm>
-          <a:prstGeom prst="rect">
-            <a:avLst/>
-          </a:prstGeom>
-          <a:noFill/>
-          <a:ln/>
-        </p:spPr>
-        <p:txBody>
-          <a:bodyPr wrap="square" lIns="0" tIns="0" rIns="0" bIns="0" rtlCol="0" anchor="ctr"/>
-          <a:lstStyle/>
-          <a:p>
-            <a:pPr marL="0" indent="0">
-              <a:lnSpc>
-                <a:spcPct val="115000"/>
-              </a:lnSpc>
-              <a:buNone/>
-            </a:pPr>
-            <a:r>
-              <a:rPr lang="en-US" sz="1200" dirty="0">
-                <a:solidFill>
-                  <a:srgbClr val="27314D"/>
-                </a:solidFill>
-                <a:latin typeface="Calibri" pitchFamily="34" charset="0"/>
-                <a:ea typeface="Calibri" pitchFamily="34" charset="-122"/>
-                <a:cs typeface="Calibri" pitchFamily="34" charset="-120"/>
-              </a:rPr>
-              <a:t>Ejemplo: una empresa coloca certificados de deuda en la bolsa de valores.</a:t>
-            </a:r>
-            <a:endParaRPr lang="en-US" sz="1200" dirty="0"/>
-          </a:p>
-        </p:txBody>
-      </p:sp>
-      <p:sp>
-        <p:nvSpPr>
-          <p:cNvPr id="27" name="Text 23"/>
-          <p:cNvSpPr/>
-          <p:nvPr/>
-        </p:nvSpPr>
-        <p:spPr>
-          <a:xfrm>
-            <a:off x="640080" y="6400800"/>
-            <a:ext cx="9418320" cy="274320"/>
-          </a:xfrm>
-          <a:prstGeom prst="rect">
-            <a:avLst/>
-          </a:prstGeom>
-          <a:noFill/>
-          <a:ln/>
-        </p:spPr>
-        <p:txBody>
-          <a:bodyPr wrap="square" rtlCol="0" anchor="ctr"/>
-          <a:lstStyle/>
-          <a:p>
-            <a:pPr marL="0" indent="0">
-              <a:buNone/>
-            </a:pPr>
-            <a:r>
-              <a:rPr lang="en-US" sz="950" i="1" dirty="0">
-                <a:solidFill>
-                  <a:srgbClr val="5B6482"/>
-                </a:solidFill>
-                <a:latin typeface="Calibri" pitchFamily="34" charset="0"/>
-                <a:ea typeface="Calibri" pitchFamily="34" charset="-122"/>
-                <a:cs typeface="Calibri" pitchFamily="34" charset="-120"/>
-              </a:rPr>
-              <a:t>Fuente: Mántey de Anguiano, G. (2024). Lecciones de Economía Monetaria, Lección 2, UNAM.</a:t>
+              <a:t>Fuente: Mántey de Anguiano, G. (2024), Lección 2, UNAM.</a:t>
             </a:r>
             <a:endParaRPr lang="en-US" sz="950" dirty="0"/>
           </a:p>
@@ -6915,7 +6516,7 @@
       </p:sp>
       <p:sp>
         <p:nvSpPr>
-          <p:cNvPr id="28" name="Text 24"/>
+          <p:cNvPr id="28" name="Text 25"/>
           <p:cNvSpPr/>
           <p:nvPr/>
         </p:nvSpPr>
@@ -7010,7 +6611,7 @@
                 <a:ea typeface="Calibri" pitchFamily="34" charset="-122"/>
                 <a:cs typeface="Calibri" pitchFamily="34" charset="-120"/>
               </a:rPr>
-              <a:t>ACTIVO FINANCIERO E INTERMEDIACIÓN · 10 MIN</a:t>
+              <a:t>INTERMEDIACIÓN FINANCIERA · 12 MIN</a:t>
             </a:r>
             <a:endParaRPr lang="en-US" sz="1200" dirty="0"/>
           </a:p>
@@ -7018,7 +6619,7 @@
       </p:sp>
       <p:sp>
         <p:nvSpPr>
-          <p:cNvPr id="5" name="Text 2"/>
+          <p:cNvPr id="3" name="Text 1"/>
           <p:cNvSpPr/>
           <p:nvPr/>
         </p:nvSpPr>
@@ -7049,7 +6650,7 @@
                 <a:ea typeface="Cambria" pitchFamily="34" charset="-122"/>
                 <a:cs typeface="Cambria" pitchFamily="34" charset="-120"/>
               </a:rPr>
-              <a:t>El ciclo de captación-colocación</a:t>
+              <a:t>Mercado de dinero y mercado de capitales</a:t>
             </a:r>
             <a:endParaRPr lang="en-US" sz="3200" dirty="0"/>
           </a:p>
@@ -7057,14 +6658,14 @@
       </p:sp>
       <p:sp>
         <p:nvSpPr>
-          <p:cNvPr id="6" name="Text 3"/>
+          <p:cNvPr id="4" name="Text 2"/>
           <p:cNvSpPr/>
           <p:nvPr/>
         </p:nvSpPr>
         <p:spPr>
           <a:xfrm>
             <a:off x="640080" y="1481328"/>
-            <a:ext cx="9692640" cy="365760"/>
+            <a:ext cx="10058400" cy="365760"/>
           </a:xfrm>
           <a:prstGeom prst="rect">
             <a:avLst/>
@@ -7088,7 +6689,7 @@
                 <a:ea typeface="Calibri" pitchFamily="34" charset="-122"/>
                 <a:cs typeface="Calibri" pitchFamily="34" charset="-120"/>
               </a:rPr>
-              <a:t>Así es como el banco conecta al ahorrador con el deudor, paso a paso.</a:t>
+              <a:t>El mercado financiero se divide, por convención, según el plazo de los recursos que canaliza.</a:t>
             </a:r>
             <a:endParaRPr lang="en-US" sz="1400" dirty="0"/>
           </a:p>
@@ -7096,200 +6697,24 @@
       </p:sp>
       <p:sp>
         <p:nvSpPr>
-          <p:cNvPr id="7" name="Shape 4"/>
+          <p:cNvPr id="5" name="Shape 3"/>
           <p:cNvSpPr/>
           <p:nvPr/>
         </p:nvSpPr>
         <p:spPr>
           <a:xfrm>
             <a:off x="640080" y="1965960"/>
-            <a:ext cx="10908792" cy="960120"/>
+            <a:ext cx="5257800" cy="3246120"/>
           </a:xfrm>
           <a:prstGeom prst="roundRect">
             <a:avLst>
-              <a:gd name="adj" fmla="val 8571"/>
-            </a:avLst>
-          </a:prstGeom>
-          <a:solidFill>
-            <a:srgbClr val="EEF3FC"/>
-          </a:solidFill>
-          <a:ln/>
-        </p:spPr>
-        <p:txBody>
-          <a:bodyPr/>
-          <a:lstStyle/>
-          <a:p>
-            <a:endParaRPr/>
-          </a:p>
-        </p:txBody>
-      </p:sp>
-      <p:sp>
-        <p:nvSpPr>
-          <p:cNvPr id="8" name="Shape 5"/>
-          <p:cNvSpPr/>
-          <p:nvPr/>
-        </p:nvSpPr>
-        <p:spPr>
-          <a:xfrm>
-            <a:off x="822960" y="2162556"/>
-            <a:ext cx="566928" cy="566928"/>
-          </a:xfrm>
-          <a:prstGeom prst="ellipse">
-            <a:avLst/>
-          </a:prstGeom>
-          <a:solidFill>
-            <a:srgbClr val="1E2761"/>
-          </a:solidFill>
-          <a:ln/>
-        </p:spPr>
-        <p:txBody>
-          <a:bodyPr/>
-          <a:lstStyle/>
-          <a:p>
-            <a:endParaRPr/>
-          </a:p>
-        </p:txBody>
-      </p:sp>
-      <p:sp>
-        <p:nvSpPr>
-          <p:cNvPr id="9" name="Text 6"/>
-          <p:cNvSpPr/>
-          <p:nvPr/>
-        </p:nvSpPr>
-        <p:spPr>
-          <a:xfrm>
-            <a:off x="822960" y="2162556"/>
-            <a:ext cx="566928" cy="566928"/>
-          </a:xfrm>
-          <a:prstGeom prst="rect">
-            <a:avLst/>
-          </a:prstGeom>
-          <a:noFill/>
-          <a:ln/>
-        </p:spPr>
-        <p:txBody>
-          <a:bodyPr wrap="square" lIns="0" tIns="0" rIns="0" bIns="0" rtlCol="0" anchor="ctr"/>
-          <a:lstStyle/>
-          <a:p>
-            <a:pPr marL="0" indent="0" algn="ctr">
-              <a:buNone/>
-            </a:pPr>
-            <a:r>
-              <a:rPr lang="en-US" sz="2000" b="1" dirty="0">
-                <a:solidFill>
-                  <a:srgbClr val="C9A227"/>
-                </a:solidFill>
-                <a:latin typeface="Cambria" pitchFamily="34" charset="0"/>
-                <a:ea typeface="Cambria" pitchFamily="34" charset="-122"/>
-                <a:cs typeface="Cambria" pitchFamily="34" charset="-120"/>
-              </a:rPr>
-              <a:t>1</a:t>
-            </a:r>
-            <a:endParaRPr lang="en-US" sz="2000" dirty="0"/>
-          </a:p>
-        </p:txBody>
-      </p:sp>
-      <p:sp>
-        <p:nvSpPr>
-          <p:cNvPr id="10" name="Text 7"/>
-          <p:cNvSpPr/>
-          <p:nvPr/>
-        </p:nvSpPr>
-        <p:spPr>
-          <a:xfrm>
-            <a:off x="1600200" y="2084832"/>
-            <a:ext cx="9326880" cy="292608"/>
-          </a:xfrm>
-          <a:prstGeom prst="rect">
-            <a:avLst/>
-          </a:prstGeom>
-          <a:noFill/>
-          <a:ln/>
-        </p:spPr>
-        <p:txBody>
-          <a:bodyPr wrap="square" lIns="0" tIns="0" rIns="0" bIns="0" rtlCol="0" anchor="ctr"/>
-          <a:lstStyle/>
-          <a:p>
-            <a:pPr marL="0" indent="0">
-              <a:buNone/>
-            </a:pPr>
-            <a:r>
-              <a:rPr lang="en-US" sz="1350" b="1" dirty="0">
-                <a:solidFill>
-                  <a:srgbClr val="1E2761"/>
-                </a:solidFill>
-                <a:latin typeface="Calibri" pitchFamily="34" charset="0"/>
-                <a:ea typeface="Calibri" pitchFamily="34" charset="-122"/>
-                <a:cs typeface="Calibri" pitchFamily="34" charset="-120"/>
-              </a:rPr>
-              <a:t>Captación de recursos</a:t>
-            </a:r>
-            <a:endParaRPr lang="en-US" sz="1350" dirty="0"/>
-          </a:p>
-        </p:txBody>
-      </p:sp>
-      <p:sp>
-        <p:nvSpPr>
-          <p:cNvPr id="11" name="Text 8"/>
-          <p:cNvSpPr/>
-          <p:nvPr/>
-        </p:nvSpPr>
-        <p:spPr>
-          <a:xfrm>
-            <a:off x="1600200" y="2386584"/>
-            <a:ext cx="9326880" cy="502920"/>
-          </a:xfrm>
-          <a:prstGeom prst="rect">
-            <a:avLst/>
-          </a:prstGeom>
-          <a:noFill/>
-          <a:ln/>
-        </p:spPr>
-        <p:txBody>
-          <a:bodyPr wrap="square" lIns="0" tIns="0" rIns="0" bIns="0" rtlCol="0" anchor="ctr"/>
-          <a:lstStyle/>
-          <a:p>
-            <a:pPr marL="0" indent="0">
-              <a:lnSpc>
-                <a:spcPct val="112000"/>
-              </a:lnSpc>
-              <a:buNone/>
-            </a:pPr>
-            <a:r>
-              <a:rPr lang="en-US" sz="1050" dirty="0">
-                <a:solidFill>
-                  <a:srgbClr val="27314D"/>
-                </a:solidFill>
-                <a:latin typeface="Calibri" pitchFamily="34" charset="0"/>
-                <a:ea typeface="Calibri" pitchFamily="34" charset="-122"/>
-                <a:cs typeface="Calibri" pitchFamily="34" charset="-120"/>
-              </a:rPr>
-              <a:t>El banco capta recursos del ahorrador —depósitos, pagarés, certificados— y se compromete a devolverlos con un rendimiento: la tasa pasiva.</a:t>
-            </a:r>
-            <a:endParaRPr lang="en-US" sz="1050" dirty="0"/>
-          </a:p>
-        </p:txBody>
-      </p:sp>
-      <p:sp>
-        <p:nvSpPr>
-          <p:cNvPr id="12" name="Shape 9"/>
-          <p:cNvSpPr/>
-          <p:nvPr/>
-        </p:nvSpPr>
-        <p:spPr>
-          <a:xfrm>
-            <a:off x="640080" y="3063240"/>
-            <a:ext cx="10908792" cy="960120"/>
-          </a:xfrm>
-          <a:prstGeom prst="roundRect">
-            <a:avLst>
-              <a:gd name="adj" fmla="val 8571"/>
+              <a:gd name="adj" fmla="val 2817"/>
             </a:avLst>
           </a:prstGeom>
           <a:solidFill>
             <a:srgbClr val="FFFFFF"/>
           </a:solidFill>
-          <a:ln w="12700">
+          <a:ln w="15875">
             <a:solidFill>
               <a:srgbClr val="E1E7F5"/>
             </a:solidFill>
@@ -7306,13 +6731,13 @@
       </p:sp>
       <p:sp>
         <p:nvSpPr>
-          <p:cNvPr id="13" name="Shape 10"/>
-          <p:cNvSpPr/>
-          <p:nvPr/>
-        </p:nvSpPr>
-        <p:spPr>
-          <a:xfrm>
-            <a:off x="822960" y="3259836"/>
+          <p:cNvPr id="6" name="Shape 4"/>
+          <p:cNvSpPr/>
+          <p:nvPr/>
+        </p:nvSpPr>
+        <p:spPr>
+          <a:xfrm>
+            <a:off x="1005840" y="2258568"/>
             <a:ext cx="566928" cy="566928"/>
           </a:xfrm>
           <a:prstGeom prst="ellipse">
@@ -7331,16 +6756,40 @@
           </a:p>
         </p:txBody>
       </p:sp>
-      <p:sp>
-        <p:nvSpPr>
-          <p:cNvPr id="14" name="Text 11"/>
-          <p:cNvSpPr/>
-          <p:nvPr/>
-        </p:nvSpPr>
-        <p:spPr>
-          <a:xfrm>
-            <a:off x="822960" y="3259836"/>
-            <a:ext cx="566928" cy="566928"/>
+      <p:pic>
+        <p:nvPicPr>
+          <p:cNvPr id="7" name="Image 0" descr="/tmp/work/deck/icons/coins_navy.png"/>
+          <p:cNvPicPr>
+            <a:picLocks noChangeAspect="1"/>
+          </p:cNvPicPr>
+          <p:nvPr/>
+        </p:nvPicPr>
+        <p:blipFill>
+          <a:blip r:embed="rId3"/>
+          <a:stretch>
+            <a:fillRect/>
+          </a:stretch>
+        </p:blipFill>
+        <p:spPr>
+          <a:xfrm>
+            <a:off x="1141903" y="2394631"/>
+            <a:ext cx="294803" cy="294803"/>
+          </a:xfrm>
+          <a:prstGeom prst="rect">
+            <a:avLst/>
+          </a:prstGeom>
+        </p:spPr>
+      </p:pic>
+      <p:sp>
+        <p:nvSpPr>
+          <p:cNvPr id="8" name="Text 5"/>
+          <p:cNvSpPr/>
+          <p:nvPr/>
+        </p:nvSpPr>
+        <p:spPr>
+          <a:xfrm>
+            <a:off x="1691640" y="2276856"/>
+            <a:ext cx="3886200" cy="329184"/>
           </a:xfrm>
           <a:prstGeom prst="rect">
             <a:avLst/>
@@ -7352,34 +6801,34 @@
           <a:bodyPr wrap="square" lIns="0" tIns="0" rIns="0" bIns="0" rtlCol="0" anchor="ctr"/>
           <a:lstStyle/>
           <a:p>
-            <a:pPr marL="0" indent="0" algn="ctr">
-              <a:buNone/>
-            </a:pPr>
-            <a:r>
-              <a:rPr lang="en-US" sz="2000" b="1" dirty="0">
-                <a:solidFill>
-                  <a:srgbClr val="C9A227"/>
+            <a:pPr marL="0" indent="0">
+              <a:buNone/>
+            </a:pPr>
+            <a:r>
+              <a:rPr lang="en-US" sz="1650" b="1" dirty="0">
+                <a:solidFill>
+                  <a:srgbClr val="1E2761"/>
                 </a:solidFill>
                 <a:latin typeface="Cambria" pitchFamily="34" charset="0"/>
                 <a:ea typeface="Cambria" pitchFamily="34" charset="-122"/>
                 <a:cs typeface="Cambria" pitchFamily="34" charset="-120"/>
               </a:rPr>
-              <a:t>2</a:t>
-            </a:r>
-            <a:endParaRPr lang="en-US" sz="2000" dirty="0"/>
-          </a:p>
-        </p:txBody>
-      </p:sp>
-      <p:sp>
-        <p:nvSpPr>
-          <p:cNvPr id="15" name="Text 12"/>
-          <p:cNvSpPr/>
-          <p:nvPr/>
-        </p:nvSpPr>
-        <p:spPr>
-          <a:xfrm>
-            <a:off x="1600200" y="3182112"/>
-            <a:ext cx="9326880" cy="292608"/>
+              <a:t>Mercado de dinero</a:t>
+            </a:r>
+            <a:endParaRPr lang="en-US" sz="1650" dirty="0"/>
+          </a:p>
+        </p:txBody>
+      </p:sp>
+      <p:sp>
+        <p:nvSpPr>
+          <p:cNvPr id="9" name="Text 6"/>
+          <p:cNvSpPr/>
+          <p:nvPr/>
+        </p:nvSpPr>
+        <p:spPr>
+          <a:xfrm>
+            <a:off x="1691640" y="2596896"/>
+            <a:ext cx="3886200" cy="237744"/>
           </a:xfrm>
           <a:prstGeom prst="rect">
             <a:avLst/>
@@ -7395,39 +6844,66 @@
               <a:buNone/>
             </a:pPr>
             <a:r>
-              <a:rPr lang="en-US" sz="1350" b="1" dirty="0">
-                <a:solidFill>
-                  <a:srgbClr val="1E2761"/>
+              <a:rPr lang="en-US" sz="1000" b="1" kern="0" spc="100" dirty="0">
+                <a:solidFill>
+                  <a:srgbClr val="C9A227"/>
                 </a:solidFill>
                 <a:latin typeface="Calibri" pitchFamily="34" charset="0"/>
                 <a:ea typeface="Calibri" pitchFamily="34" charset="-122"/>
                 <a:cs typeface="Calibri" pitchFamily="34" charset="-120"/>
               </a:rPr>
-              <a:t>Colocación del crédito</a:t>
-            </a:r>
-            <a:endParaRPr lang="en-US" sz="1350" dirty="0"/>
-          </a:p>
-        </p:txBody>
-      </p:sp>
-      <p:sp>
-        <p:nvSpPr>
-          <p:cNvPr id="16" name="Text 13"/>
-          <p:cNvSpPr/>
-          <p:nvPr/>
-        </p:nvSpPr>
-        <p:spPr>
-          <a:xfrm>
-            <a:off x="1600200" y="3483864"/>
-            <a:ext cx="9326880" cy="502920"/>
-          </a:xfrm>
-          <a:prstGeom prst="rect">
-            <a:avLst/>
-          </a:prstGeom>
-          <a:noFill/>
-          <a:ln/>
-        </p:spPr>
-        <p:txBody>
-          <a:bodyPr wrap="square" lIns="0" tIns="0" rIns="0" bIns="0" rtlCol="0" anchor="ctr"/>
+              <a:t>CORTO PLAZO</a:t>
+            </a:r>
+            <a:endParaRPr lang="en-US" sz="1000" dirty="0"/>
+          </a:p>
+        </p:txBody>
+      </p:sp>
+      <p:sp>
+        <p:nvSpPr>
+          <p:cNvPr id="10" name="Shape 7"/>
+          <p:cNvSpPr/>
+          <p:nvPr/>
+        </p:nvSpPr>
+        <p:spPr>
+          <a:xfrm>
+            <a:off x="1024128" y="3118104"/>
+            <a:ext cx="82296" cy="82296"/>
+          </a:xfrm>
+          <a:prstGeom prst="ellipse">
+            <a:avLst/>
+          </a:prstGeom>
+          <a:solidFill>
+            <a:srgbClr val="C9A227"/>
+          </a:solidFill>
+          <a:ln/>
+        </p:spPr>
+        <p:txBody>
+          <a:bodyPr/>
+          <a:lstStyle/>
+          <a:p>
+            <a:endParaRPr/>
+          </a:p>
+        </p:txBody>
+      </p:sp>
+      <p:sp>
+        <p:nvSpPr>
+          <p:cNvPr id="11" name="Text 8"/>
+          <p:cNvSpPr/>
+          <p:nvPr/>
+        </p:nvSpPr>
+        <p:spPr>
+          <a:xfrm>
+            <a:off x="1234440" y="2980944"/>
+            <a:ext cx="4297680" cy="658368"/>
+          </a:xfrm>
+          <a:prstGeom prst="rect">
+            <a:avLst/>
+          </a:prstGeom>
+          <a:noFill/>
+          <a:ln/>
+        </p:spPr>
+        <p:txBody>
+          <a:bodyPr wrap="square" lIns="0" tIns="0" rIns="0" bIns="0" rtlCol="0" anchor="t"/>
           <a:lstStyle/>
           <a:p>
             <a:pPr marL="0" indent="0">
@@ -7437,173 +6913,77 @@
               <a:buNone/>
             </a:pPr>
             <a:r>
-              <a:rPr lang="en-US" sz="1050" dirty="0">
-                <a:solidFill>
-                  <a:srgbClr val="27314D"/>
+              <a:rPr lang="en-US" sz="1080" b="1" dirty="0">
+                <a:solidFill>
+                  <a:srgbClr val="1E2761"/>
                 </a:solidFill>
                 <a:latin typeface="Calibri" pitchFamily="34" charset="0"/>
                 <a:ea typeface="Calibri" pitchFamily="34" charset="-122"/>
                 <a:cs typeface="Calibri" pitchFamily="34" charset="-120"/>
               </a:rPr>
-              <a:t>El banco presta esos recursos a empresas, personas o gobierno cobrando una tasa activa, mayor a la pasiva, y asume el riesgo de crédito.</a:t>
-            </a:r>
-            <a:endParaRPr lang="en-US" sz="1050" dirty="0"/>
-          </a:p>
-        </p:txBody>
-      </p:sp>
-      <p:sp>
-        <p:nvSpPr>
-          <p:cNvPr id="17" name="Shape 14"/>
-          <p:cNvSpPr/>
-          <p:nvPr/>
-        </p:nvSpPr>
-        <p:spPr>
-          <a:xfrm>
-            <a:off x="640080" y="4160520"/>
-            <a:ext cx="10908792" cy="960120"/>
-          </a:xfrm>
-          <a:prstGeom prst="roundRect">
-            <a:avLst>
-              <a:gd name="adj" fmla="val 8571"/>
-            </a:avLst>
-          </a:prstGeom>
-          <a:solidFill>
-            <a:srgbClr val="EEF3FC"/>
-          </a:solidFill>
-          <a:ln/>
-        </p:spPr>
-        <p:txBody>
-          <a:bodyPr/>
-          <a:lstStyle/>
-          <a:p>
-            <a:endParaRPr/>
-          </a:p>
-        </p:txBody>
-      </p:sp>
-      <p:sp>
-        <p:nvSpPr>
-          <p:cNvPr id="18" name="Shape 15"/>
-          <p:cNvSpPr/>
-          <p:nvPr/>
-        </p:nvSpPr>
-        <p:spPr>
-          <a:xfrm>
-            <a:off x="822960" y="4357116"/>
-            <a:ext cx="566928" cy="566928"/>
-          </a:xfrm>
-          <a:prstGeom prst="ellipse">
-            <a:avLst/>
-          </a:prstGeom>
-          <a:solidFill>
-            <a:srgbClr val="1E2761"/>
-          </a:solidFill>
-          <a:ln/>
-        </p:spPr>
-        <p:txBody>
-          <a:bodyPr/>
-          <a:lstStyle/>
-          <a:p>
-            <a:endParaRPr/>
-          </a:p>
-        </p:txBody>
-      </p:sp>
-      <p:sp>
-        <p:nvSpPr>
-          <p:cNvPr id="19" name="Text 16"/>
-          <p:cNvSpPr/>
-          <p:nvPr/>
-        </p:nvSpPr>
-        <p:spPr>
-          <a:xfrm>
-            <a:off x="822960" y="4357116"/>
-            <a:ext cx="566928" cy="566928"/>
-          </a:xfrm>
-          <a:prstGeom prst="rect">
-            <a:avLst/>
-          </a:prstGeom>
-          <a:noFill/>
-          <a:ln/>
-        </p:spPr>
-        <p:txBody>
-          <a:bodyPr wrap="square" lIns="0" tIns="0" rIns="0" bIns="0" rtlCol="0" anchor="ctr"/>
-          <a:lstStyle/>
-          <a:p>
-            <a:pPr marL="0" indent="0" algn="ctr">
-              <a:buNone/>
-            </a:pPr>
-            <a:r>
-              <a:rPr lang="en-US" sz="2000" b="1" dirty="0">
-                <a:solidFill>
-                  <a:srgbClr val="C9A227"/>
-                </a:solidFill>
-                <a:latin typeface="Cambria" pitchFamily="34" charset="0"/>
-                <a:ea typeface="Cambria" pitchFamily="34" charset="-122"/>
-                <a:cs typeface="Cambria" pitchFamily="34" charset="-120"/>
-              </a:rPr>
-              <a:t>3</a:t>
-            </a:r>
-            <a:endParaRPr lang="en-US" sz="2000" dirty="0"/>
-          </a:p>
-        </p:txBody>
-      </p:sp>
-      <p:sp>
-        <p:nvSpPr>
-          <p:cNvPr id="20" name="Text 17"/>
-          <p:cNvSpPr/>
-          <p:nvPr/>
-        </p:nvSpPr>
-        <p:spPr>
-          <a:xfrm>
-            <a:off x="1600200" y="4279392"/>
-            <a:ext cx="9326880" cy="292608"/>
-          </a:xfrm>
-          <a:prstGeom prst="rect">
-            <a:avLst/>
-          </a:prstGeom>
-          <a:noFill/>
-          <a:ln/>
-        </p:spPr>
-        <p:txBody>
-          <a:bodyPr wrap="square" lIns="0" tIns="0" rIns="0" bIns="0" rtlCol="0" anchor="ctr"/>
-          <a:lstStyle/>
-          <a:p>
-            <a:pPr marL="0" indent="0">
-              <a:buNone/>
-            </a:pPr>
-            <a:r>
-              <a:rPr lang="en-US" sz="1350" b="1" dirty="0">
-                <a:solidFill>
-                  <a:srgbClr val="1E2761"/>
+              <a:t>Función: </a:t>
+            </a:r>
+            <a:r>
+              <a:rPr lang="en-US" sz="1080" dirty="0">
+                <a:solidFill>
+                  <a:srgbClr val="27314D"/>
                 </a:solidFill>
                 <a:latin typeface="Calibri" pitchFamily="34" charset="0"/>
                 <a:ea typeface="Calibri" pitchFamily="34" charset="-122"/>
                 <a:cs typeface="Calibri" pitchFamily="34" charset="-120"/>
               </a:rPr>
-              <a:t>Recuperación del crédito</a:t>
-            </a:r>
-            <a:endParaRPr lang="en-US" sz="1350" dirty="0"/>
-          </a:p>
-        </p:txBody>
-      </p:sp>
-      <p:sp>
-        <p:nvSpPr>
-          <p:cNvPr id="21" name="Text 18"/>
-          <p:cNvSpPr/>
-          <p:nvPr/>
-        </p:nvSpPr>
-        <p:spPr>
-          <a:xfrm>
-            <a:off x="1600200" y="4581144"/>
-            <a:ext cx="9326880" cy="502920"/>
-          </a:xfrm>
-          <a:prstGeom prst="rect">
-            <a:avLst/>
-          </a:prstGeom>
-          <a:noFill/>
-          <a:ln/>
-        </p:spPr>
-        <p:txBody>
-          <a:bodyPr wrap="square" lIns="0" tIns="0" rIns="0" bIns="0" rtlCol="0" anchor="ctr"/>
+              <a:t>dar liquidez de corto plazo a la economía y servir de canal a la política monetaria.</a:t>
+            </a:r>
+            <a:endParaRPr lang="en-US" sz="1080" dirty="0"/>
+          </a:p>
+        </p:txBody>
+      </p:sp>
+      <p:sp>
+        <p:nvSpPr>
+          <p:cNvPr id="12" name="Shape 9"/>
+          <p:cNvSpPr/>
+          <p:nvPr/>
+        </p:nvSpPr>
+        <p:spPr>
+          <a:xfrm>
+            <a:off x="1024128" y="3813048"/>
+            <a:ext cx="82296" cy="82296"/>
+          </a:xfrm>
+          <a:prstGeom prst="ellipse">
+            <a:avLst/>
+          </a:prstGeom>
+          <a:solidFill>
+            <a:srgbClr val="C9A227"/>
+          </a:solidFill>
+          <a:ln/>
+        </p:spPr>
+        <p:txBody>
+          <a:bodyPr/>
+          <a:lstStyle/>
+          <a:p>
+            <a:endParaRPr/>
+          </a:p>
+        </p:txBody>
+      </p:sp>
+      <p:sp>
+        <p:nvSpPr>
+          <p:cNvPr id="13" name="Text 10"/>
+          <p:cNvSpPr/>
+          <p:nvPr/>
+        </p:nvSpPr>
+        <p:spPr>
+          <a:xfrm>
+            <a:off x="1234440" y="3675888"/>
+            <a:ext cx="4297680" cy="658368"/>
+          </a:xfrm>
+          <a:prstGeom prst="rect">
+            <a:avLst/>
+          </a:prstGeom>
+          <a:noFill/>
+          <a:ln/>
+        </p:spPr>
+        <p:txBody>
+          <a:bodyPr wrap="square" lIns="0" tIns="0" rIns="0" bIns="0" rtlCol="0" anchor="t"/>
           <a:lstStyle/>
           <a:p>
             <a:pPr marL="0" indent="0">
@@ -7613,7 +6993,7 @@
               <a:buNone/>
             </a:pPr>
             <a:r>
-              <a:rPr lang="en-US" sz="1050" dirty="0">
+              <a:rPr lang="en-US" sz="1080" dirty="0">
                 <a:solidFill>
                   <a:srgbClr val="27314D"/>
                 </a:solidFill>
@@ -7621,32 +7001,101 @@
                 <a:ea typeface="Calibri" pitchFamily="34" charset="-122"/>
                 <a:cs typeface="Calibri" pitchFamily="34" charset="-120"/>
               </a:rPr>
-              <a:t>El deudor devuelve al banco el capital más los intereses pactados conforme transcurre el plazo del crédito.</a:t>
-            </a:r>
-            <a:endParaRPr lang="en-US" sz="1050" dirty="0"/>
-          </a:p>
-        </p:txBody>
-      </p:sp>
-      <p:sp>
-        <p:nvSpPr>
-          <p:cNvPr id="22" name="Shape 19"/>
-          <p:cNvSpPr/>
-          <p:nvPr/>
-        </p:nvSpPr>
-        <p:spPr>
-          <a:xfrm>
-            <a:off x="640080" y="5257800"/>
-            <a:ext cx="10908792" cy="960120"/>
+              <a:t>Instituciones monetarias (bancos comerciales) emiten pasivos usables como medios de pago.</a:t>
+            </a:r>
+            <a:endParaRPr lang="en-US" sz="1080" dirty="0"/>
+          </a:p>
+        </p:txBody>
+      </p:sp>
+      <p:sp>
+        <p:nvSpPr>
+          <p:cNvPr id="14" name="Shape 11"/>
+          <p:cNvSpPr/>
+          <p:nvPr/>
+        </p:nvSpPr>
+        <p:spPr>
+          <a:xfrm>
+            <a:off x="1024128" y="4507992"/>
+            <a:ext cx="82296" cy="82296"/>
+          </a:xfrm>
+          <a:prstGeom prst="ellipse">
+            <a:avLst/>
+          </a:prstGeom>
+          <a:solidFill>
+            <a:srgbClr val="C9A227"/>
+          </a:solidFill>
+          <a:ln/>
+        </p:spPr>
+        <p:txBody>
+          <a:bodyPr/>
+          <a:lstStyle/>
+          <a:p>
+            <a:endParaRPr/>
+          </a:p>
+        </p:txBody>
+      </p:sp>
+      <p:sp>
+        <p:nvSpPr>
+          <p:cNvPr id="15" name="Text 12"/>
+          <p:cNvSpPr/>
+          <p:nvPr/>
+        </p:nvSpPr>
+        <p:spPr>
+          <a:xfrm>
+            <a:off x="1234440" y="4370832"/>
+            <a:ext cx="4297680" cy="658368"/>
+          </a:xfrm>
+          <a:prstGeom prst="rect">
+            <a:avLst/>
+          </a:prstGeom>
+          <a:noFill/>
+          <a:ln/>
+        </p:spPr>
+        <p:txBody>
+          <a:bodyPr wrap="square" lIns="0" tIns="0" rIns="0" bIns="0" rtlCol="0" anchor="t"/>
+          <a:lstStyle/>
+          <a:p>
+            <a:pPr marL="0" indent="0">
+              <a:lnSpc>
+                <a:spcPct val="112000"/>
+              </a:lnSpc>
+              <a:buNone/>
+            </a:pPr>
+            <a:r>
+              <a:rPr lang="en-US" sz="1080" dirty="0">
+                <a:solidFill>
+                  <a:srgbClr val="27314D"/>
+                </a:solidFill>
+                <a:latin typeface="Calibri" pitchFamily="34" charset="0"/>
+                <a:ea typeface="Calibri" pitchFamily="34" charset="-122"/>
+                <a:cs typeface="Calibri" pitchFamily="34" charset="-120"/>
+              </a:rPr>
+              <a:t>Ejemplo: depósitos a la vista, CETES y papel comercial a corto plazo.</a:t>
+            </a:r>
+            <a:endParaRPr lang="en-US" sz="1080" dirty="0"/>
+          </a:p>
+        </p:txBody>
+      </p:sp>
+      <p:sp>
+        <p:nvSpPr>
+          <p:cNvPr id="16" name="Shape 13"/>
+          <p:cNvSpPr/>
+          <p:nvPr/>
+        </p:nvSpPr>
+        <p:spPr>
+          <a:xfrm>
+            <a:off x="6263640" y="1965960"/>
+            <a:ext cx="5257800" cy="3246120"/>
           </a:xfrm>
           <a:prstGeom prst="roundRect">
             <a:avLst>
-              <a:gd name="adj" fmla="val 8571"/>
+              <a:gd name="adj" fmla="val 2817"/>
             </a:avLst>
           </a:prstGeom>
           <a:solidFill>
             <a:srgbClr val="FFFFFF"/>
           </a:solidFill>
-          <a:ln w="12700">
+          <a:ln w="15875">
             <a:solidFill>
               <a:srgbClr val="E1E7F5"/>
             </a:solidFill>
@@ -7663,13 +7112,13 @@
       </p:sp>
       <p:sp>
         <p:nvSpPr>
-          <p:cNvPr id="23" name="Shape 20"/>
-          <p:cNvSpPr/>
-          <p:nvPr/>
-        </p:nvSpPr>
-        <p:spPr>
-          <a:xfrm>
-            <a:off x="822960" y="5454396"/>
+          <p:cNvPr id="17" name="Shape 14"/>
+          <p:cNvSpPr/>
+          <p:nvPr/>
+        </p:nvSpPr>
+        <p:spPr>
+          <a:xfrm>
+            <a:off x="6629400" y="2258568"/>
             <a:ext cx="566928" cy="566928"/>
           </a:xfrm>
           <a:prstGeom prst="ellipse">
@@ -7688,16 +7137,40 @@
           </a:p>
         </p:txBody>
       </p:sp>
-      <p:sp>
-        <p:nvSpPr>
-          <p:cNvPr id="24" name="Text 21"/>
-          <p:cNvSpPr/>
-          <p:nvPr/>
-        </p:nvSpPr>
-        <p:spPr>
-          <a:xfrm>
-            <a:off x="822960" y="5454396"/>
-            <a:ext cx="566928" cy="566928"/>
+      <p:pic>
+        <p:nvPicPr>
+          <p:cNvPr id="18" name="Image 1" descr="/tmp/work/deck/icons/chartline_navy.png"/>
+          <p:cNvPicPr>
+            <a:picLocks noChangeAspect="1"/>
+          </p:cNvPicPr>
+          <p:nvPr/>
+        </p:nvPicPr>
+        <p:blipFill>
+          <a:blip r:embed="rId4"/>
+          <a:stretch>
+            <a:fillRect/>
+          </a:stretch>
+        </p:blipFill>
+        <p:spPr>
+          <a:xfrm>
+            <a:off x="6765463" y="2394631"/>
+            <a:ext cx="294803" cy="294803"/>
+          </a:xfrm>
+          <a:prstGeom prst="rect">
+            <a:avLst/>
+          </a:prstGeom>
+        </p:spPr>
+      </p:pic>
+      <p:sp>
+        <p:nvSpPr>
+          <p:cNvPr id="19" name="Text 15"/>
+          <p:cNvSpPr/>
+          <p:nvPr/>
+        </p:nvSpPr>
+        <p:spPr>
+          <a:xfrm>
+            <a:off x="7315200" y="2276856"/>
+            <a:ext cx="3886200" cy="329184"/>
           </a:xfrm>
           <a:prstGeom prst="rect">
             <a:avLst/>
@@ -7709,34 +7182,34 @@
           <a:bodyPr wrap="square" lIns="0" tIns="0" rIns="0" bIns="0" rtlCol="0" anchor="ctr"/>
           <a:lstStyle/>
           <a:p>
-            <a:pPr marL="0" indent="0" algn="ctr">
-              <a:buNone/>
-            </a:pPr>
-            <a:r>
-              <a:rPr lang="en-US" sz="2000" b="1" dirty="0">
-                <a:solidFill>
-                  <a:srgbClr val="C9A227"/>
+            <a:pPr marL="0" indent="0">
+              <a:buNone/>
+            </a:pPr>
+            <a:r>
+              <a:rPr lang="en-US" sz="1650" b="1" dirty="0">
+                <a:solidFill>
+                  <a:srgbClr val="1E2761"/>
                 </a:solidFill>
                 <a:latin typeface="Cambria" pitchFamily="34" charset="0"/>
                 <a:ea typeface="Cambria" pitchFamily="34" charset="-122"/>
                 <a:cs typeface="Cambria" pitchFamily="34" charset="-120"/>
               </a:rPr>
-              <a:t>4</a:t>
-            </a:r>
-            <a:endParaRPr lang="en-US" sz="2000" dirty="0"/>
-          </a:p>
-        </p:txBody>
-      </p:sp>
-      <p:sp>
-        <p:nvSpPr>
-          <p:cNvPr id="25" name="Text 22"/>
-          <p:cNvSpPr/>
-          <p:nvPr/>
-        </p:nvSpPr>
-        <p:spPr>
-          <a:xfrm>
-            <a:off x="1600200" y="5376672"/>
-            <a:ext cx="9326880" cy="292608"/>
+              <a:t>Mercado de capitales</a:t>
+            </a:r>
+            <a:endParaRPr lang="en-US" sz="1650" dirty="0"/>
+          </a:p>
+        </p:txBody>
+      </p:sp>
+      <p:sp>
+        <p:nvSpPr>
+          <p:cNvPr id="20" name="Text 16"/>
+          <p:cNvSpPr/>
+          <p:nvPr/>
+        </p:nvSpPr>
+        <p:spPr>
+          <a:xfrm>
+            <a:off x="7315200" y="2596896"/>
+            <a:ext cx="3886200" cy="237744"/>
           </a:xfrm>
           <a:prstGeom prst="rect">
             <a:avLst/>
@@ -7752,39 +7225,66 @@
               <a:buNone/>
             </a:pPr>
             <a:r>
-              <a:rPr lang="en-US" sz="1350" b="1" dirty="0">
-                <a:solidFill>
-                  <a:srgbClr val="1E2761"/>
+              <a:rPr lang="en-US" sz="1000" b="1" kern="0" spc="100" dirty="0">
+                <a:solidFill>
+                  <a:srgbClr val="C9A227"/>
                 </a:solidFill>
                 <a:latin typeface="Calibri" pitchFamily="34" charset="0"/>
                 <a:ea typeface="Calibri" pitchFamily="34" charset="-122"/>
                 <a:cs typeface="Calibri" pitchFamily="34" charset="-120"/>
               </a:rPr>
-              <a:t>Cierre del ciclo</a:t>
-            </a:r>
-            <a:endParaRPr lang="en-US" sz="1350" dirty="0"/>
-          </a:p>
-        </p:txBody>
-      </p:sp>
-      <p:sp>
-        <p:nvSpPr>
-          <p:cNvPr id="26" name="Text 23"/>
-          <p:cNvSpPr/>
-          <p:nvPr/>
-        </p:nvSpPr>
-        <p:spPr>
-          <a:xfrm>
-            <a:off x="1600200" y="5678424"/>
-            <a:ext cx="9326880" cy="502920"/>
-          </a:xfrm>
-          <a:prstGeom prst="rect">
-            <a:avLst/>
-          </a:prstGeom>
-          <a:noFill/>
-          <a:ln/>
-        </p:spPr>
-        <p:txBody>
-          <a:bodyPr wrap="square" lIns="0" tIns="0" rIns="0" bIns="0" rtlCol="0" anchor="ctr"/>
+              <a:t>LARGO PLAZO</a:t>
+            </a:r>
+            <a:endParaRPr lang="en-US" sz="1000" dirty="0"/>
+          </a:p>
+        </p:txBody>
+      </p:sp>
+      <p:sp>
+        <p:nvSpPr>
+          <p:cNvPr id="21" name="Shape 17"/>
+          <p:cNvSpPr/>
+          <p:nvPr/>
+        </p:nvSpPr>
+        <p:spPr>
+          <a:xfrm>
+            <a:off x="6647688" y="3118104"/>
+            <a:ext cx="82296" cy="82296"/>
+          </a:xfrm>
+          <a:prstGeom prst="ellipse">
+            <a:avLst/>
+          </a:prstGeom>
+          <a:solidFill>
+            <a:srgbClr val="C9A227"/>
+          </a:solidFill>
+          <a:ln/>
+        </p:spPr>
+        <p:txBody>
+          <a:bodyPr/>
+          <a:lstStyle/>
+          <a:p>
+            <a:endParaRPr/>
+          </a:p>
+        </p:txBody>
+      </p:sp>
+      <p:sp>
+        <p:nvSpPr>
+          <p:cNvPr id="22" name="Text 18"/>
+          <p:cNvSpPr/>
+          <p:nvPr/>
+        </p:nvSpPr>
+        <p:spPr>
+          <a:xfrm>
+            <a:off x="6858000" y="2980944"/>
+            <a:ext cx="4297680" cy="658368"/>
+          </a:xfrm>
+          <a:prstGeom prst="rect">
+            <a:avLst/>
+          </a:prstGeom>
+          <a:noFill/>
+          <a:ln/>
+        </p:spPr>
+        <p:txBody>
+          <a:bodyPr wrap="square" lIns="0" tIns="0" rIns="0" bIns="0" rtlCol="0" anchor="t"/>
           <a:lstStyle/>
           <a:p>
             <a:pPr marL="0" indent="0">
@@ -7794,99 +7294,388 @@
               <a:buNone/>
             </a:pPr>
             <a:r>
-              <a:rPr lang="en-US" sz="1050" dirty="0">
-                <a:solidFill>
-                  <a:srgbClr val="27314D"/>
+              <a:rPr lang="en-US" sz="1080" b="1" dirty="0">
+                <a:solidFill>
+                  <a:srgbClr val="1E2761"/>
                 </a:solidFill>
                 <a:latin typeface="Calibri" pitchFamily="34" charset="0"/>
                 <a:ea typeface="Calibri" pitchFamily="34" charset="-122"/>
                 <a:cs typeface="Calibri" pitchFamily="34" charset="-120"/>
               </a:rPr>
-              <a:t>El banco paga al ahorrador su depósito con rendimiento; la diferencia entre tasa activa y pasiva es su margen financiero (spread).</a:t>
-            </a:r>
-            <a:endParaRPr lang="en-US" sz="1050" dirty="0"/>
-          </a:p>
-        </p:txBody>
-      </p:sp>
-      <p:sp>
-        <p:nvSpPr>
-          <p:cNvPr id="27" name="Text 24"/>
-          <p:cNvSpPr/>
-          <p:nvPr/>
-        </p:nvSpPr>
-        <p:spPr>
-          <a:xfrm>
-            <a:off x="640080" y="6400800"/>
-            <a:ext cx="9418320" cy="274320"/>
-          </a:xfrm>
-          <a:prstGeom prst="rect">
-            <a:avLst/>
-          </a:prstGeom>
-          <a:noFill/>
-          <a:ln/>
-        </p:spPr>
-        <p:txBody>
-          <a:bodyPr wrap="square" rtlCol="0" anchor="ctr"/>
-          <a:lstStyle/>
-          <a:p>
-            <a:pPr marL="0" indent="0">
-              <a:buNone/>
-            </a:pPr>
-            <a:r>
-              <a:rPr lang="en-US" sz="950" i="1" dirty="0">
-                <a:solidFill>
-                  <a:srgbClr val="5B6482"/>
+              <a:t>Función: </a:t>
+            </a:r>
+            <a:r>
+              <a:rPr lang="en-US" sz="1080" dirty="0">
+                <a:solidFill>
+                  <a:srgbClr val="27314D"/>
                 </a:solidFill>
                 <a:latin typeface="Calibri" pitchFamily="34" charset="0"/>
                 <a:ea typeface="Calibri" pitchFamily="34" charset="-122"/>
                 <a:cs typeface="Calibri" pitchFamily="34" charset="-120"/>
               </a:rPr>
-              <a:t>El margen entre tasa activa y pasiva (spread) es la utilidad del banco por intermediar. Fuente: Mántey de Anguiano, G. (2024), Lección 2, UNAM.</a:t>
-            </a:r>
-            <a:endParaRPr lang="en-US" sz="950" dirty="0"/>
-          </a:p>
-        </p:txBody>
-      </p:sp>
-      <p:sp>
-        <p:nvSpPr>
-          <p:cNvPr id="28" name="Text 25"/>
-          <p:cNvSpPr/>
-          <p:nvPr/>
-        </p:nvSpPr>
-        <p:spPr>
-          <a:xfrm>
-            <a:off x="11365992" y="6446520"/>
-            <a:ext cx="548640" cy="274320"/>
-          </a:xfrm>
-          <a:prstGeom prst="rect">
-            <a:avLst/>
-          </a:prstGeom>
-          <a:noFill/>
-          <a:ln/>
-        </p:spPr>
-        <p:txBody>
-          <a:bodyPr wrap="square" rtlCol="0" anchor="ctr"/>
-          <a:lstStyle/>
-          <a:p>
-            <a:pPr marL="0" indent="0" algn="r">
-              <a:buNone/>
-            </a:pPr>
-            <a:r>
-              <a:rPr lang="en-US" sz="1000" dirty="0">
-                <a:solidFill>
-                  <a:srgbClr val="A6ADC7"/>
+              <a:t>financiar la inversión productiva de largo plazo y diversificar el riesgo entre ahorradores e inversionistas.</a:t>
+            </a:r>
+            <a:endParaRPr lang="en-US" sz="1080" dirty="0"/>
+          </a:p>
+        </p:txBody>
+      </p:sp>
+      <p:sp>
+        <p:nvSpPr>
+          <p:cNvPr id="23" name="Shape 19"/>
+          <p:cNvSpPr/>
+          <p:nvPr/>
+        </p:nvSpPr>
+        <p:spPr>
+          <a:xfrm>
+            <a:off x="6647688" y="3813048"/>
+            <a:ext cx="82296" cy="82296"/>
+          </a:xfrm>
+          <a:prstGeom prst="ellipse">
+            <a:avLst/>
+          </a:prstGeom>
+          <a:solidFill>
+            <a:srgbClr val="C9A227"/>
+          </a:solidFill>
+          <a:ln/>
+        </p:spPr>
+        <p:txBody>
+          <a:bodyPr/>
+          <a:lstStyle/>
+          <a:p>
+            <a:endParaRPr/>
+          </a:p>
+        </p:txBody>
+      </p:sp>
+      <p:sp>
+        <p:nvSpPr>
+          <p:cNvPr id="24" name="Text 20"/>
+          <p:cNvSpPr/>
+          <p:nvPr/>
+        </p:nvSpPr>
+        <p:spPr>
+          <a:xfrm>
+            <a:off x="6858000" y="3675888"/>
+            <a:ext cx="4297680" cy="658368"/>
+          </a:xfrm>
+          <a:prstGeom prst="rect">
+            <a:avLst/>
+          </a:prstGeom>
+          <a:noFill/>
+          <a:ln/>
+        </p:spPr>
+        <p:txBody>
+          <a:bodyPr wrap="square" lIns="0" tIns="0" rIns="0" bIns="0" rtlCol="0" anchor="t"/>
+          <a:lstStyle/>
+          <a:p>
+            <a:pPr marL="0" indent="0">
+              <a:lnSpc>
+                <a:spcPct val="112000"/>
+              </a:lnSpc>
+              <a:buNone/>
+            </a:pPr>
+            <a:r>
+              <a:rPr lang="en-US" sz="1080" dirty="0">
+                <a:solidFill>
+                  <a:srgbClr val="27314D"/>
                 </a:solidFill>
                 <a:latin typeface="Calibri" pitchFamily="34" charset="0"/>
                 <a:ea typeface="Calibri" pitchFamily="34" charset="-122"/>
                 <a:cs typeface="Calibri" pitchFamily="34" charset="-120"/>
               </a:rPr>
+              <a:t>Instituciones no monetarias (banca de inversión, aseguradoras, bolsa) emiten bonos y acciones.</a:t>
+            </a:r>
+            <a:endParaRPr lang="en-US" sz="1080" dirty="0"/>
+          </a:p>
+        </p:txBody>
+      </p:sp>
+      <p:sp>
+        <p:nvSpPr>
+          <p:cNvPr id="25" name="Shape 21"/>
+          <p:cNvSpPr/>
+          <p:nvPr/>
+        </p:nvSpPr>
+        <p:spPr>
+          <a:xfrm>
+            <a:off x="6647688" y="4507992"/>
+            <a:ext cx="82296" cy="82296"/>
+          </a:xfrm>
+          <a:prstGeom prst="ellipse">
+            <a:avLst/>
+          </a:prstGeom>
+          <a:solidFill>
+            <a:srgbClr val="C9A227"/>
+          </a:solidFill>
+          <a:ln/>
+        </p:spPr>
+        <p:txBody>
+          <a:bodyPr/>
+          <a:lstStyle/>
+          <a:p>
+            <a:endParaRPr/>
+          </a:p>
+        </p:txBody>
+      </p:sp>
+      <p:sp>
+        <p:nvSpPr>
+          <p:cNvPr id="26" name="Text 22"/>
+          <p:cNvSpPr/>
+          <p:nvPr/>
+        </p:nvSpPr>
+        <p:spPr>
+          <a:xfrm>
+            <a:off x="6858000" y="4370832"/>
+            <a:ext cx="4297680" cy="658368"/>
+          </a:xfrm>
+          <a:prstGeom prst="rect">
+            <a:avLst/>
+          </a:prstGeom>
+          <a:noFill/>
+          <a:ln/>
+        </p:spPr>
+        <p:txBody>
+          <a:bodyPr wrap="square" lIns="0" tIns="0" rIns="0" bIns="0" rtlCol="0" anchor="t"/>
+          <a:lstStyle/>
+          <a:p>
+            <a:pPr marL="0" indent="0">
+              <a:lnSpc>
+                <a:spcPct val="112000"/>
+              </a:lnSpc>
+              <a:buNone/>
+            </a:pPr>
+            <a:r>
+              <a:rPr lang="en-US" sz="1080" dirty="0">
+                <a:solidFill>
+                  <a:srgbClr val="27314D"/>
+                </a:solidFill>
+                <a:latin typeface="Calibri" pitchFamily="34" charset="0"/>
+                <a:ea typeface="Calibri" pitchFamily="34" charset="-122"/>
+                <a:cs typeface="Calibri" pitchFamily="34" charset="-120"/>
+              </a:rPr>
+              <a:t>Ejemplo: bonos hipotecarios y acciones ordinarias.</a:t>
+            </a:r>
+            <a:endParaRPr lang="en-US" sz="1080" dirty="0"/>
+          </a:p>
+        </p:txBody>
+      </p:sp>
+      <p:sp>
+        <p:nvSpPr>
+          <p:cNvPr id="34" name="Text 28"/>
+          <p:cNvSpPr/>
+          <p:nvPr/>
+        </p:nvSpPr>
+        <p:spPr>
+          <a:xfrm>
+            <a:off x="640080" y="6400800"/>
+            <a:ext cx="9418320" cy="274320"/>
+          </a:xfrm>
+          <a:prstGeom prst="rect">
+            <a:avLst/>
+          </a:prstGeom>
+          <a:noFill/>
+          <a:ln/>
+        </p:spPr>
+        <p:txBody>
+          <a:bodyPr wrap="square" rtlCol="0" anchor="ctr"/>
+          <a:lstStyle/>
+          <a:p>
+            <a:pPr marL="0" indent="0">
+              <a:buNone/>
+            </a:pPr>
+            <a:r>
+              <a:rPr lang="en-US" sz="950" i="1" dirty="0">
+                <a:solidFill>
+                  <a:srgbClr val="5B6482"/>
+                </a:solidFill>
+                <a:latin typeface="Calibri" pitchFamily="34" charset="0"/>
+                <a:ea typeface="Calibri" pitchFamily="34" charset="-122"/>
+                <a:cs typeface="Calibri" pitchFamily="34" charset="-120"/>
+              </a:rPr>
+              <a:t>Fuente: Mántey de Anguiano, G. (2024), Lección 2 §4, UNAM; Mishkin, F. S. y Eakins, S. G. (2014), Cap. 11, Pearson.</a:t>
+            </a:r>
+            <a:endParaRPr lang="en-US" sz="950" dirty="0"/>
+          </a:p>
+        </p:txBody>
+      </p:sp>
+      <p:sp>
+        <p:nvSpPr>
+          <p:cNvPr id="35" name="Text 29"/>
+          <p:cNvSpPr/>
+          <p:nvPr/>
+        </p:nvSpPr>
+        <p:spPr>
+          <a:xfrm>
+            <a:off x="11365992" y="6446520"/>
+            <a:ext cx="548640" cy="274320"/>
+          </a:xfrm>
+          <a:prstGeom prst="rect">
+            <a:avLst/>
+          </a:prstGeom>
+          <a:noFill/>
+          <a:ln/>
+        </p:spPr>
+        <p:txBody>
+          <a:bodyPr wrap="square" rtlCol="0" anchor="ctr"/>
+          <a:lstStyle/>
+          <a:p>
+            <a:pPr marL="0" indent="0" algn="r">
+              <a:buNone/>
+            </a:pPr>
+            <a:r>
+              <a:rPr lang="en-US" sz="1000" dirty="0">
+                <a:solidFill>
+                  <a:srgbClr val="A6ADC7"/>
+                </a:solidFill>
+                <a:latin typeface="Calibri" pitchFamily="34" charset="0"/>
+                <a:ea typeface="Calibri" pitchFamily="34" charset="-122"/>
+                <a:cs typeface="Calibri" pitchFamily="34" charset="-120"/>
+              </a:rPr>
               <a:t>08</a:t>
             </a:r>
             <a:endParaRPr lang="en-US" sz="1000" dirty="0"/>
           </a:p>
         </p:txBody>
       </p:sp>
+      <p:sp>
+        <p:nvSpPr>
+          <p:cNvPr id="36" name="TextBox 35"/>
+          <p:cNvSpPr txBox="1"/>
+          <p:nvPr/>
+        </p:nvSpPr>
+        <p:spPr>
+          <a:xfrm>
+            <a:off x="640080" y="5303520"/>
+            <a:ext cx="10908792" cy="1005840"/>
+          </a:xfrm>
+          <a:prstGeom prst="rect">
+            <a:avLst/>
+          </a:prstGeom>
+          <a:noFill/>
+        </p:spPr>
+        <p:txBody>
+          <a:bodyPr wrap="square">
+            <a:spAutoFit/>
+          </a:bodyPr>
+          <a:lstStyle/>
+          <a:p>
+            <a:pPr>
+              <a:lnSpc>
+                <a:spcPct val="105000"/>
+              </a:lnSpc>
+              <a:spcAft>
+                <a:spcPts val="300"/>
+              </a:spcAft>
+            </a:pPr>
+            <a:r>
+              <a:rPr sz="1100" b="1" i="0">
+                <a:solidFill>
+                  <a:srgbClr val="1E2761"/>
+                </a:solidFill>
+                <a:latin typeface="Calibri"/>
+              </a:rPr>
+              <a:t>•  </a:t>
+            </a:r>
+            <a:r>
+              <a:rPr sz="1100" b="0" i="0">
+                <a:solidFill>
+                  <a:srgbClr val="5B6482"/>
+                </a:solidFill>
+                <a:latin typeface="Calibri"/>
+              </a:rPr>
+              <a:t>En México, los bancos múltiples integran ambas funciones desde principios de la década de 1970.</a:t>
+            </a:r>
+          </a:p>
+          <a:p>
+            <a:pPr>
+              <a:lnSpc>
+                <a:spcPct val="105000"/>
+              </a:lnSpc>
+              <a:spcAft>
+                <a:spcPts val="300"/>
+              </a:spcAft>
+            </a:pPr>
+            <a:r>
+              <a:rPr sz="1100" b="1" i="0">
+                <a:solidFill>
+                  <a:srgbClr val="1E2761"/>
+                </a:solidFill>
+                <a:latin typeface="Calibri"/>
+              </a:rPr>
+              <a:t>•  </a:t>
+            </a:r>
+            <a:r>
+              <a:rPr sz="1100" b="0" i="0">
+                <a:solidFill>
+                  <a:srgbClr val="5B6482"/>
+                </a:solidFill>
+                <a:latin typeface="Calibri"/>
+              </a:rPr>
+              <a:t>Los mercados de derivados (futuros, opciones, swaps) son un tercer segmento, definido por el instrumento y no por el plazo.</a:t>
+            </a:r>
+          </a:p>
+          <a:p>
+            <a:pPr>
+              <a:lnSpc>
+                <a:spcPct val="105000"/>
+              </a:lnSpc>
+              <a:spcAft>
+                <a:spcPts val="300"/>
+              </a:spcAft>
+            </a:pPr>
+            <a:r>
+              <a:rPr sz="1100" b="1" i="0">
+                <a:solidFill>
+                  <a:srgbClr val="1E2761"/>
+                </a:solidFill>
+                <a:latin typeface="Calibri"/>
+              </a:rPr>
+              <a:t>•  </a:t>
+            </a:r>
+            <a:r>
+              <a:rPr sz="1100" b="0" i="0">
+                <a:solidFill>
+                  <a:srgbClr val="5B6482"/>
+                </a:solidFill>
+                <a:latin typeface="Calibri"/>
+              </a:rPr>
+              <a:t>Es, sobre todo, un mercado mayorista — CETES es la excepción accesible al público, vía Cetesdirecto.</a:t>
+            </a:r>
+          </a:p>
+          <a:p>
+            <a:pPr>
+              <a:lnSpc>
+                <a:spcPct val="105000"/>
+              </a:lnSpc>
+              <a:spcAft>
+                <a:spcPts val="300"/>
+              </a:spcAft>
+            </a:pPr>
+            <a:r>
+              <a:rPr sz="1100" b="1" i="0">
+                <a:solidFill>
+                  <a:srgbClr val="1E2761"/>
+                </a:solidFill>
+                <a:latin typeface="Calibri"/>
+              </a:rPr>
+              <a:t>•  </a:t>
+            </a:r>
+            <a:r>
+              <a:rPr sz="1100" b="0" i="0">
+                <a:solidFill>
+                  <a:srgbClr val="5B6482"/>
+                </a:solidFill>
+                <a:latin typeface="Calibri"/>
+              </a:rPr>
+              <a:t>Banxico lo usa como canal de política monetaria; ahí se mueve la TIIE, la tasa de referencia de corto plazo.</a:t>
+            </a:r>
+          </a:p>
+        </p:txBody>
+      </p:sp>
     </p:spTree>
+    <p:extLst>
+      <p:ext uri="{BB962C8B-B14F-4D97-AF65-F5344CB8AC3E}">
+        <p14:creationId xmlns:p14="http://schemas.microsoft.com/office/powerpoint/2010/main" val="673554521"/>
+      </p:ext>
+    </p:extLst>
   </p:cSld>
   <p:clrMapOvr>
     <a:masterClrMapping/>
@@ -7944,7 +7733,7 @@
                 <a:ea typeface="Calibri" pitchFamily="34" charset="-122"/>
                 <a:cs typeface="Calibri" pitchFamily="34" charset="-120"/>
               </a:rPr>
-              <a:t>ACTIVO FINANCIERO E INTERMEDIACIÓN · 7 MIN</a:t>
+              <a:t>INTERMEDIACIÓN FINANCIERA · 12 MIN</a:t>
             </a:r>
             <a:endParaRPr lang="en-US" sz="1200" dirty="0"/>
           </a:p>
@@ -7952,7 +7741,7 @@
       </p:sp>
       <p:sp>
         <p:nvSpPr>
-          <p:cNvPr id="5" name="Text 2"/>
+          <p:cNvPr id="3" name="Text 1"/>
           <p:cNvSpPr/>
           <p:nvPr/>
         </p:nvSpPr>
@@ -7975,7 +7764,7 @@
               <a:buNone/>
             </a:pPr>
             <a:r>
-              <a:rPr lang="en-US" sz="3200" b="1" dirty="0">
+              <a:rPr lang="en-US" sz="2700" b="1" dirty="0">
                 <a:solidFill>
                   <a:srgbClr val="1E2761"/>
                 </a:solidFill>
@@ -7983,22 +7772,22 @@
                 <a:ea typeface="Cambria" pitchFamily="34" charset="-122"/>
                 <a:cs typeface="Cambria" pitchFamily="34" charset="-120"/>
               </a:rPr>
-              <a:t>El ciclo del crédito directo</a:t>
-            </a:r>
-            <a:endParaRPr lang="en-US" sz="3200" dirty="0"/>
-          </a:p>
-        </p:txBody>
-      </p:sp>
-      <p:sp>
-        <p:nvSpPr>
-          <p:cNvPr id="6" name="Text 3"/>
-          <p:cNvSpPr/>
-          <p:nvPr/>
-        </p:nvSpPr>
-        <p:spPr>
-          <a:xfrm>
-            <a:off x="640080" y="1481328"/>
-            <a:ext cx="9692640" cy="365760"/>
+              <a:t>Agentes económicos y su acceso a los mercados</a:t>
+            </a:r>
+            <a:endParaRPr lang="en-US" sz="2700" dirty="0"/>
+          </a:p>
+        </p:txBody>
+      </p:sp>
+      <p:sp>
+        <p:nvSpPr>
+          <p:cNvPr id="4" name="Text 2"/>
+          <p:cNvSpPr/>
+          <p:nvPr/>
+        </p:nvSpPr>
+        <p:spPr>
+          <a:xfrm>
+            <a:off x="640080" y="1371600"/>
+            <a:ext cx="10058400" cy="365760"/>
           </a:xfrm>
           <a:prstGeom prst="rect">
             <a:avLst/>
@@ -8014,7 +7803,7 @@
               <a:buNone/>
             </a:pPr>
             <a:r>
-              <a:rPr lang="en-US" sz="1400" dirty="0">
+              <a:rPr lang="en-US" sz="1350" dirty="0">
                 <a:solidFill>
                   <a:srgbClr val="5B6482"/>
                 </a:solidFill>
@@ -8022,27 +7811,171 @@
                 <a:ea typeface="Calibri" pitchFamily="34" charset="-122"/>
                 <a:cs typeface="Calibri" pitchFamily="34" charset="-120"/>
               </a:rPr>
-              <a:t>El camino directo también tiene su propio ciclo, en espejo del de captación-colocación.</a:t>
-            </a:r>
-            <a:endParaRPr lang="en-US" sz="1400" dirty="0"/>
-          </a:p>
-        </p:txBody>
-      </p:sp>
-      <p:sp>
-        <p:nvSpPr>
-          <p:cNvPr id="7" name="Shape 4"/>
-          <p:cNvSpPr/>
-          <p:nvPr/>
-        </p:nvSpPr>
-        <p:spPr>
-          <a:xfrm>
-            <a:off x="640080" y="1965960"/>
-            <a:ext cx="10908792" cy="960120"/>
+              <a:t>Cada tipo de agente participa en el mercado de dinero y en el de capitales de forma distinta.</a:t>
+            </a:r>
+            <a:endParaRPr lang="en-US" sz="1350" dirty="0"/>
+          </a:p>
+        </p:txBody>
+      </p:sp>
+      <p:sp>
+        <p:nvSpPr>
+          <p:cNvPr id="5" name="Shape 3"/>
+          <p:cNvSpPr/>
+          <p:nvPr/>
+        </p:nvSpPr>
+        <p:spPr>
+          <a:xfrm>
+            <a:off x="640080" y="1783080"/>
+            <a:ext cx="10908792" cy="457200"/>
           </a:xfrm>
           <a:prstGeom prst="roundRect">
             <a:avLst>
-              <a:gd name="adj" fmla="val 8571"/>
+              <a:gd name="adj" fmla="val 16000"/>
             </a:avLst>
+          </a:prstGeom>
+          <a:solidFill>
+            <a:srgbClr val="1E2761"/>
+          </a:solidFill>
+          <a:ln/>
+        </p:spPr>
+        <p:txBody>
+          <a:bodyPr/>
+          <a:lstStyle/>
+          <a:p>
+            <a:endParaRPr/>
+          </a:p>
+        </p:txBody>
+      </p:sp>
+      <p:sp>
+        <p:nvSpPr>
+          <p:cNvPr id="6" name="Text 4"/>
+          <p:cNvSpPr/>
+          <p:nvPr/>
+        </p:nvSpPr>
+        <p:spPr>
+          <a:xfrm>
+            <a:off x="822960" y="1783080"/>
+            <a:ext cx="2423160" cy="457200"/>
+          </a:xfrm>
+          <a:prstGeom prst="rect">
+            <a:avLst/>
+          </a:prstGeom>
+          <a:noFill/>
+          <a:ln/>
+        </p:spPr>
+        <p:txBody>
+          <a:bodyPr wrap="square" lIns="0" tIns="0" rIns="0" bIns="0" rtlCol="0" anchor="ctr"/>
+          <a:lstStyle/>
+          <a:p>
+            <a:pPr marL="0" indent="0">
+              <a:buNone/>
+            </a:pPr>
+            <a:r>
+              <a:rPr lang="en-US" sz="1000" b="1" kern="0" spc="50" dirty="0">
+                <a:solidFill>
+                  <a:srgbClr val="C9A227"/>
+                </a:solidFill>
+                <a:latin typeface="Calibri" pitchFamily="34" charset="0"/>
+                <a:ea typeface="Calibri" pitchFamily="34" charset="-122"/>
+                <a:cs typeface="Calibri" pitchFamily="34" charset="-120"/>
+              </a:rPr>
+              <a:t>AGENTE ECONÓMICO</a:t>
+            </a:r>
+            <a:endParaRPr lang="en-US" sz="1000" dirty="0"/>
+          </a:p>
+        </p:txBody>
+      </p:sp>
+      <p:sp>
+        <p:nvSpPr>
+          <p:cNvPr id="7" name="Text 5"/>
+          <p:cNvSpPr/>
+          <p:nvPr/>
+        </p:nvSpPr>
+        <p:spPr>
+          <a:xfrm>
+            <a:off x="3383280" y="1783080"/>
+            <a:ext cx="3977640" cy="457200"/>
+          </a:xfrm>
+          <a:prstGeom prst="rect">
+            <a:avLst/>
+          </a:prstGeom>
+          <a:noFill/>
+          <a:ln/>
+        </p:spPr>
+        <p:txBody>
+          <a:bodyPr wrap="square" lIns="0" tIns="0" rIns="0" bIns="0" rtlCol="0" anchor="ctr"/>
+          <a:lstStyle/>
+          <a:p>
+            <a:pPr marL="0" indent="0">
+              <a:buNone/>
+            </a:pPr>
+            <a:r>
+              <a:rPr lang="en-US" sz="1000" b="1" kern="0" spc="50" dirty="0">
+                <a:solidFill>
+                  <a:srgbClr val="FFFFFF"/>
+                </a:solidFill>
+                <a:latin typeface="Calibri" pitchFamily="34" charset="0"/>
+                <a:ea typeface="Calibri" pitchFamily="34" charset="-122"/>
+                <a:cs typeface="Calibri" pitchFamily="34" charset="-120"/>
+              </a:rPr>
+              <a:t>MERCADO DE DINERO (corto plazo)</a:t>
+            </a:r>
+            <a:endParaRPr lang="en-US" sz="1000" dirty="0"/>
+          </a:p>
+        </p:txBody>
+      </p:sp>
+      <p:sp>
+        <p:nvSpPr>
+          <p:cNvPr id="8" name="Text 6"/>
+          <p:cNvSpPr/>
+          <p:nvPr/>
+        </p:nvSpPr>
+        <p:spPr>
+          <a:xfrm>
+            <a:off x="7498080" y="1783080"/>
+            <a:ext cx="3867912" cy="457200"/>
+          </a:xfrm>
+          <a:prstGeom prst="rect">
+            <a:avLst/>
+          </a:prstGeom>
+          <a:noFill/>
+          <a:ln/>
+        </p:spPr>
+        <p:txBody>
+          <a:bodyPr wrap="square" lIns="0" tIns="0" rIns="0" bIns="0" rtlCol="0" anchor="ctr"/>
+          <a:lstStyle/>
+          <a:p>
+            <a:pPr marL="0" indent="0">
+              <a:buNone/>
+            </a:pPr>
+            <a:r>
+              <a:rPr lang="en-US" sz="1000" b="1" kern="0" spc="50" dirty="0">
+                <a:solidFill>
+                  <a:srgbClr val="FFFFFF"/>
+                </a:solidFill>
+                <a:latin typeface="Calibri" pitchFamily="34" charset="0"/>
+                <a:ea typeface="Calibri" pitchFamily="34" charset="-122"/>
+                <a:cs typeface="Calibri" pitchFamily="34" charset="-120"/>
+              </a:rPr>
+              <a:t>MERCADO DE CAPITALES (largo plazo)</a:t>
+            </a:r>
+            <a:endParaRPr lang="en-US" sz="1000" dirty="0"/>
+          </a:p>
+        </p:txBody>
+      </p:sp>
+      <p:sp>
+        <p:nvSpPr>
+          <p:cNvPr id="9" name="Shape 7"/>
+          <p:cNvSpPr/>
+          <p:nvPr/>
+        </p:nvSpPr>
+        <p:spPr>
+          <a:xfrm>
+            <a:off x="640080" y="2240280"/>
+            <a:ext cx="10908792" cy="658368"/>
+          </a:xfrm>
+          <a:prstGeom prst="rect">
+            <a:avLst/>
           </a:prstGeom>
           <a:solidFill>
             <a:srgbClr val="EEF3FC"/>
@@ -8059,14 +7992,14 @@
       </p:sp>
       <p:sp>
         <p:nvSpPr>
-          <p:cNvPr id="8" name="Shape 5"/>
-          <p:cNvSpPr/>
-          <p:nvPr/>
-        </p:nvSpPr>
-        <p:spPr>
-          <a:xfrm>
-            <a:off x="822960" y="2162556"/>
-            <a:ext cx="566928" cy="566928"/>
+          <p:cNvPr id="10" name="Shape 8"/>
+          <p:cNvSpPr/>
+          <p:nvPr/>
+        </p:nvSpPr>
+        <p:spPr>
+          <a:xfrm>
+            <a:off x="822960" y="2377440"/>
+            <a:ext cx="384048" cy="384048"/>
           </a:xfrm>
           <a:prstGeom prst="ellipse">
             <a:avLst/>
@@ -8084,16 +8017,40 @@
           </a:p>
         </p:txBody>
       </p:sp>
-      <p:sp>
-        <p:nvSpPr>
-          <p:cNvPr id="9" name="Text 6"/>
-          <p:cNvSpPr/>
-          <p:nvPr/>
-        </p:nvSpPr>
-        <p:spPr>
-          <a:xfrm>
-            <a:off x="822960" y="2162556"/>
-            <a:ext cx="566928" cy="566928"/>
+      <p:pic>
+        <p:nvPicPr>
+          <p:cNvPr id="11" name="Image 0" descr="/tmp/work/deck/icons/landmark_navy.png"/>
+          <p:cNvPicPr>
+            <a:picLocks noChangeAspect="1"/>
+          </p:cNvPicPr>
+          <p:nvPr/>
+        </p:nvPicPr>
+        <p:blipFill>
+          <a:blip r:embed="rId3"/>
+          <a:stretch>
+            <a:fillRect/>
+          </a:stretch>
+        </p:blipFill>
+        <p:spPr>
+          <a:xfrm>
+            <a:off x="915132" y="2469612"/>
+            <a:ext cx="199705" cy="199705"/>
+          </a:xfrm>
+          <a:prstGeom prst="rect">
+            <a:avLst/>
+          </a:prstGeom>
+        </p:spPr>
+      </p:pic>
+      <p:sp>
+        <p:nvSpPr>
+          <p:cNvPr id="12" name="Text 9"/>
+          <p:cNvSpPr/>
+          <p:nvPr/>
+        </p:nvSpPr>
+        <p:spPr>
+          <a:xfrm>
+            <a:off x="1316736" y="2240280"/>
+            <a:ext cx="1929384" cy="658368"/>
           </a:xfrm>
           <a:prstGeom prst="rect">
             <a:avLst/>
@@ -8105,50 +8062,14 @@
           <a:bodyPr wrap="square" lIns="0" tIns="0" rIns="0" bIns="0" rtlCol="0" anchor="ctr"/>
           <a:lstStyle/>
           <a:p>
-            <a:pPr marL="0" indent="0" algn="ctr">
-              <a:buNone/>
-            </a:pPr>
-            <a:r>
-              <a:rPr lang="en-US" sz="2000" b="1" dirty="0">
-                <a:solidFill>
-                  <a:srgbClr val="C9A227"/>
-                </a:solidFill>
-                <a:latin typeface="Cambria" pitchFamily="34" charset="0"/>
-                <a:ea typeface="Cambria" pitchFamily="34" charset="-122"/>
-                <a:cs typeface="Cambria" pitchFamily="34" charset="-120"/>
-              </a:rPr>
-              <a:t>1</a:t>
-            </a:r>
-            <a:endParaRPr lang="en-US" sz="2000" dirty="0"/>
-          </a:p>
-        </p:txBody>
-      </p:sp>
-      <p:sp>
-        <p:nvSpPr>
-          <p:cNvPr id="10" name="Text 7"/>
-          <p:cNvSpPr/>
-          <p:nvPr/>
-        </p:nvSpPr>
-        <p:spPr>
-          <a:xfrm>
-            <a:off x="1600200" y="2084832"/>
-            <a:ext cx="9326880" cy="292608"/>
-          </a:xfrm>
-          <a:prstGeom prst="rect">
-            <a:avLst/>
-          </a:prstGeom>
-          <a:noFill/>
-          <a:ln/>
-        </p:spPr>
-        <p:txBody>
-          <a:bodyPr wrap="square" lIns="0" tIns="0" rIns="0" bIns="0" rtlCol="0" anchor="ctr"/>
-          <a:lstStyle/>
-          <a:p>
             <a:pPr marL="0" indent="0">
-              <a:buNone/>
-            </a:pPr>
-            <a:r>
-              <a:rPr lang="en-US" sz="1350" b="1" dirty="0">
+              <a:lnSpc>
+                <a:spcPct val="105000"/>
+              </a:lnSpc>
+              <a:buNone/>
+            </a:pPr>
+            <a:r>
+              <a:rPr lang="en-US" sz="1050" b="1" dirty="0">
                 <a:solidFill>
                   <a:srgbClr val="1E2761"/>
                 </a:solidFill>
@@ -8156,22 +8077,22 @@
                 <a:ea typeface="Calibri" pitchFamily="34" charset="-122"/>
                 <a:cs typeface="Calibri" pitchFamily="34" charset="-120"/>
               </a:rPr>
-              <a:t>Emisión</a:t>
-            </a:r>
-            <a:endParaRPr lang="en-US" sz="1350" dirty="0"/>
-          </a:p>
-        </p:txBody>
-      </p:sp>
-      <p:sp>
-        <p:nvSpPr>
-          <p:cNvPr id="11" name="Text 8"/>
-          <p:cNvSpPr/>
-          <p:nvPr/>
-        </p:nvSpPr>
-        <p:spPr>
-          <a:xfrm>
-            <a:off x="1600200" y="2386584"/>
-            <a:ext cx="9326880" cy="502920"/>
+              <a:t>Gobierno</a:t>
+            </a:r>
+            <a:endParaRPr lang="en-US" sz="1050" dirty="0"/>
+          </a:p>
+        </p:txBody>
+      </p:sp>
+      <p:sp>
+        <p:nvSpPr>
+          <p:cNvPr id="13" name="Text 10"/>
+          <p:cNvSpPr/>
+          <p:nvPr/>
+        </p:nvSpPr>
+        <p:spPr>
+          <a:xfrm>
+            <a:off x="3383280" y="2240280"/>
+            <a:ext cx="3794760" cy="658368"/>
           </a:xfrm>
           <a:prstGeom prst="rect">
             <a:avLst/>
@@ -8185,12 +8106,12 @@
           <a:p>
             <a:pPr marL="0" indent="0">
               <a:lnSpc>
-                <a:spcPct val="112000"/>
+                <a:spcPct val="108000"/>
               </a:lnSpc>
               <a:buNone/>
             </a:pPr>
             <a:r>
-              <a:rPr lang="en-US" sz="1050" dirty="0">
+              <a:rPr lang="en-US" sz="950" dirty="0">
                 <a:solidFill>
                   <a:srgbClr val="27314D"/>
                 </a:solidFill>
@@ -8198,31 +8119,1088 @@
                 <a:ea typeface="Calibri" pitchFamily="34" charset="-122"/>
                 <a:cs typeface="Calibri" pitchFamily="34" charset="-120"/>
               </a:rPr>
-              <a:t>La empresa o el gobierno coloca el instrumento directamente con inversionistas, a cambio de sus recursos.</a:t>
-            </a:r>
-            <a:endParaRPr lang="en-US" sz="1050" dirty="0"/>
-          </a:p>
-        </p:txBody>
-      </p:sp>
-      <p:sp>
-        <p:nvSpPr>
-          <p:cNvPr id="12" name="Shape 9"/>
-          <p:cNvSpPr/>
-          <p:nvPr/>
-        </p:nvSpPr>
-        <p:spPr>
-          <a:xfrm>
-            <a:off x="640080" y="3063240"/>
-            <a:ext cx="10908792" cy="960120"/>
-          </a:xfrm>
-          <a:prstGeom prst="roundRect">
-            <a:avLst>
-              <a:gd name="adj" fmla="val 8571"/>
-            </a:avLst>
+              <a:t>CETES y otros instrumentos de deuda de corto plazo.</a:t>
+            </a:r>
+            <a:endParaRPr lang="en-US" sz="950" dirty="0"/>
+          </a:p>
+        </p:txBody>
+      </p:sp>
+      <p:sp>
+        <p:nvSpPr>
+          <p:cNvPr id="14" name="Text 11"/>
+          <p:cNvSpPr/>
+          <p:nvPr/>
+        </p:nvSpPr>
+        <p:spPr>
+          <a:xfrm>
+            <a:off x="7498080" y="2240280"/>
+            <a:ext cx="3685032" cy="658368"/>
+          </a:xfrm>
+          <a:prstGeom prst="rect">
+            <a:avLst/>
+          </a:prstGeom>
+          <a:noFill/>
+          <a:ln/>
+        </p:spPr>
+        <p:txBody>
+          <a:bodyPr wrap="square" lIns="0" tIns="0" rIns="0" bIns="0" rtlCol="0" anchor="ctr"/>
+          <a:lstStyle/>
+          <a:p>
+            <a:pPr marL="0" indent="0">
+              <a:lnSpc>
+                <a:spcPct val="108000"/>
+              </a:lnSpc>
+              <a:buNone/>
+            </a:pPr>
+            <a:r>
+              <a:rPr lang="en-US" sz="950" dirty="0">
+                <a:solidFill>
+                  <a:srgbClr val="27314D"/>
+                </a:solidFill>
+                <a:latin typeface="Calibri" pitchFamily="34" charset="0"/>
+                <a:ea typeface="Calibri" pitchFamily="34" charset="-122"/>
+                <a:cs typeface="Calibri" pitchFamily="34" charset="-120"/>
+              </a:rPr>
+              <a:t>Bonos M y Udibonos: deuda de largo plazo.</a:t>
+            </a:r>
+            <a:endParaRPr lang="en-US" sz="950" dirty="0"/>
+          </a:p>
+        </p:txBody>
+      </p:sp>
+      <p:sp>
+        <p:nvSpPr>
+          <p:cNvPr id="15" name="Shape 12"/>
+          <p:cNvSpPr/>
+          <p:nvPr/>
+        </p:nvSpPr>
+        <p:spPr>
+          <a:xfrm>
+            <a:off x="640080" y="2898648"/>
+            <a:ext cx="10908792" cy="658368"/>
+          </a:xfrm>
+          <a:prstGeom prst="rect">
+            <a:avLst/>
           </a:prstGeom>
           <a:solidFill>
             <a:srgbClr val="FFFFFF"/>
           </a:solidFill>
+          <a:ln/>
+        </p:spPr>
+        <p:txBody>
+          <a:bodyPr/>
+          <a:lstStyle/>
+          <a:p>
+            <a:endParaRPr/>
+          </a:p>
+        </p:txBody>
+      </p:sp>
+      <p:sp>
+        <p:nvSpPr>
+          <p:cNvPr id="16" name="Shape 13"/>
+          <p:cNvSpPr/>
+          <p:nvPr/>
+        </p:nvSpPr>
+        <p:spPr>
+          <a:xfrm>
+            <a:off x="822960" y="3035808"/>
+            <a:ext cx="384048" cy="384048"/>
+          </a:xfrm>
+          <a:prstGeom prst="ellipse">
+            <a:avLst/>
+          </a:prstGeom>
+          <a:solidFill>
+            <a:srgbClr val="1E2761"/>
+          </a:solidFill>
+          <a:ln/>
+        </p:spPr>
+        <p:txBody>
+          <a:bodyPr/>
+          <a:lstStyle/>
+          <a:p>
+            <a:endParaRPr/>
+          </a:p>
+        </p:txBody>
+      </p:sp>
+      <p:pic>
+        <p:nvPicPr>
+          <p:cNvPr id="17" name="Image 1" descr="/tmp/work/deck/icons/moneybill_navy.png"/>
+          <p:cNvPicPr>
+            <a:picLocks noChangeAspect="1"/>
+          </p:cNvPicPr>
+          <p:nvPr/>
+        </p:nvPicPr>
+        <p:blipFill>
+          <a:blip r:embed="rId4"/>
+          <a:stretch>
+            <a:fillRect/>
+          </a:stretch>
+        </p:blipFill>
+        <p:spPr>
+          <a:xfrm>
+            <a:off x="915132" y="3127980"/>
+            <a:ext cx="199705" cy="199705"/>
+          </a:xfrm>
+          <a:prstGeom prst="rect">
+            <a:avLst/>
+          </a:prstGeom>
+        </p:spPr>
+      </p:pic>
+      <p:sp>
+        <p:nvSpPr>
+          <p:cNvPr id="18" name="Text 14"/>
+          <p:cNvSpPr/>
+          <p:nvPr/>
+        </p:nvSpPr>
+        <p:spPr>
+          <a:xfrm>
+            <a:off x="1316736" y="2898648"/>
+            <a:ext cx="1929384" cy="658368"/>
+          </a:xfrm>
+          <a:prstGeom prst="rect">
+            <a:avLst/>
+          </a:prstGeom>
+          <a:noFill/>
+          <a:ln/>
+        </p:spPr>
+        <p:txBody>
+          <a:bodyPr wrap="square" lIns="0" tIns="0" rIns="0" bIns="0" rtlCol="0" anchor="ctr"/>
+          <a:lstStyle/>
+          <a:p>
+            <a:pPr marL="0" indent="0">
+              <a:lnSpc>
+                <a:spcPct val="105000"/>
+              </a:lnSpc>
+              <a:buNone/>
+            </a:pPr>
+            <a:r>
+              <a:rPr lang="en-US" sz="1050" b="1" dirty="0">
+                <a:solidFill>
+                  <a:srgbClr val="1E2761"/>
+                </a:solidFill>
+                <a:latin typeface="Calibri" pitchFamily="34" charset="0"/>
+                <a:ea typeface="Calibri" pitchFamily="34" charset="-122"/>
+                <a:cs typeface="Calibri" pitchFamily="34" charset="-120"/>
+              </a:rPr>
+              <a:t>Grandes empresas</a:t>
+            </a:r>
+            <a:endParaRPr lang="en-US" sz="1050" dirty="0"/>
+          </a:p>
+        </p:txBody>
+      </p:sp>
+      <p:sp>
+        <p:nvSpPr>
+          <p:cNvPr id="19" name="Text 15"/>
+          <p:cNvSpPr/>
+          <p:nvPr/>
+        </p:nvSpPr>
+        <p:spPr>
+          <a:xfrm>
+            <a:off x="3383280" y="2898648"/>
+            <a:ext cx="3794760" cy="658368"/>
+          </a:xfrm>
+          <a:prstGeom prst="rect">
+            <a:avLst/>
+          </a:prstGeom>
+          <a:noFill/>
+          <a:ln/>
+        </p:spPr>
+        <p:txBody>
+          <a:bodyPr wrap="square" lIns="0" tIns="0" rIns="0" bIns="0" rtlCol="0" anchor="ctr"/>
+          <a:lstStyle/>
+          <a:p>
+            <a:pPr marL="0" indent="0">
+              <a:lnSpc>
+                <a:spcPct val="108000"/>
+              </a:lnSpc>
+              <a:buNone/>
+            </a:pPr>
+            <a:r>
+              <a:rPr lang="en-US" sz="950" dirty="0">
+                <a:solidFill>
+                  <a:srgbClr val="27314D"/>
+                </a:solidFill>
+                <a:latin typeface="Calibri" pitchFamily="34" charset="0"/>
+                <a:ea typeface="Calibri" pitchFamily="34" charset="-122"/>
+                <a:cs typeface="Calibri" pitchFamily="34" charset="-120"/>
+              </a:rPr>
+              <a:t>Papel comercial para financiar capital de trabajo.</a:t>
+            </a:r>
+            <a:endParaRPr lang="en-US" sz="950" dirty="0"/>
+          </a:p>
+        </p:txBody>
+      </p:sp>
+      <p:sp>
+        <p:nvSpPr>
+          <p:cNvPr id="20" name="Text 16"/>
+          <p:cNvSpPr/>
+          <p:nvPr/>
+        </p:nvSpPr>
+        <p:spPr>
+          <a:xfrm>
+            <a:off x="7498080" y="2898648"/>
+            <a:ext cx="3685032" cy="658368"/>
+          </a:xfrm>
+          <a:prstGeom prst="rect">
+            <a:avLst/>
+          </a:prstGeom>
+          <a:noFill/>
+          <a:ln/>
+        </p:spPr>
+        <p:txBody>
+          <a:bodyPr wrap="square" lIns="0" tIns="0" rIns="0" bIns="0" rtlCol="0" anchor="ctr"/>
+          <a:lstStyle/>
+          <a:p>
+            <a:pPr marL="0" indent="0">
+              <a:lnSpc>
+                <a:spcPct val="108000"/>
+              </a:lnSpc>
+              <a:buNone/>
+            </a:pPr>
+            <a:r>
+              <a:rPr lang="en-US" sz="950" dirty="0">
+                <a:solidFill>
+                  <a:srgbClr val="27314D"/>
+                </a:solidFill>
+                <a:latin typeface="Calibri" pitchFamily="34" charset="0"/>
+                <a:ea typeface="Calibri" pitchFamily="34" charset="-122"/>
+                <a:cs typeface="Calibri" pitchFamily="34" charset="-120"/>
+              </a:rPr>
+              <a:t>Emisión de obligaciones y colocación de acciones en bolsa.</a:t>
+            </a:r>
+            <a:endParaRPr lang="en-US" sz="950" dirty="0"/>
+          </a:p>
+        </p:txBody>
+      </p:sp>
+      <p:sp>
+        <p:nvSpPr>
+          <p:cNvPr id="21" name="Shape 17"/>
+          <p:cNvSpPr/>
+          <p:nvPr/>
+        </p:nvSpPr>
+        <p:spPr>
+          <a:xfrm>
+            <a:off x="640080" y="3557016"/>
+            <a:ext cx="10908792" cy="658368"/>
+          </a:xfrm>
+          <a:prstGeom prst="rect">
+            <a:avLst/>
+          </a:prstGeom>
+          <a:solidFill>
+            <a:srgbClr val="EEF3FC"/>
+          </a:solidFill>
+          <a:ln/>
+        </p:spPr>
+        <p:txBody>
+          <a:bodyPr/>
+          <a:lstStyle/>
+          <a:p>
+            <a:endParaRPr/>
+          </a:p>
+        </p:txBody>
+      </p:sp>
+      <p:sp>
+        <p:nvSpPr>
+          <p:cNvPr id="22" name="Shape 18"/>
+          <p:cNvSpPr/>
+          <p:nvPr/>
+        </p:nvSpPr>
+        <p:spPr>
+          <a:xfrm>
+            <a:off x="822960" y="3694176"/>
+            <a:ext cx="384048" cy="384048"/>
+          </a:xfrm>
+          <a:prstGeom prst="ellipse">
+            <a:avLst/>
+          </a:prstGeom>
+          <a:solidFill>
+            <a:srgbClr val="1E2761"/>
+          </a:solidFill>
+          <a:ln/>
+        </p:spPr>
+        <p:txBody>
+          <a:bodyPr/>
+          <a:lstStyle/>
+          <a:p>
+            <a:endParaRPr/>
+          </a:p>
+        </p:txBody>
+      </p:sp>
+      <p:pic>
+        <p:nvPicPr>
+          <p:cNvPr id="23" name="Image 2" descr="/tmp/work/deck/icons/handholding_navy.png"/>
+          <p:cNvPicPr>
+            <a:picLocks noChangeAspect="1"/>
+          </p:cNvPicPr>
+          <p:nvPr/>
+        </p:nvPicPr>
+        <p:blipFill>
+          <a:blip r:embed="rId5"/>
+          <a:stretch>
+            <a:fillRect/>
+          </a:stretch>
+        </p:blipFill>
+        <p:spPr>
+          <a:xfrm>
+            <a:off x="915132" y="3786348"/>
+            <a:ext cx="199705" cy="199705"/>
+          </a:xfrm>
+          <a:prstGeom prst="rect">
+            <a:avLst/>
+          </a:prstGeom>
+        </p:spPr>
+      </p:pic>
+      <p:sp>
+        <p:nvSpPr>
+          <p:cNvPr id="24" name="Text 19"/>
+          <p:cNvSpPr/>
+          <p:nvPr/>
+        </p:nvSpPr>
+        <p:spPr>
+          <a:xfrm>
+            <a:off x="1316736" y="3557016"/>
+            <a:ext cx="1929384" cy="658368"/>
+          </a:xfrm>
+          <a:prstGeom prst="rect">
+            <a:avLst/>
+          </a:prstGeom>
+          <a:noFill/>
+          <a:ln/>
+        </p:spPr>
+        <p:txBody>
+          <a:bodyPr wrap="square" lIns="0" tIns="0" rIns="0" bIns="0" rtlCol="0" anchor="ctr"/>
+          <a:lstStyle/>
+          <a:p>
+            <a:pPr marL="0" indent="0">
+              <a:lnSpc>
+                <a:spcPct val="105000"/>
+              </a:lnSpc>
+              <a:buNone/>
+            </a:pPr>
+            <a:r>
+              <a:rPr lang="en-US" sz="1050" b="1" dirty="0">
+                <a:solidFill>
+                  <a:srgbClr val="1E2761"/>
+                </a:solidFill>
+                <a:latin typeface="Calibri" pitchFamily="34" charset="0"/>
+                <a:ea typeface="Calibri" pitchFamily="34" charset="-122"/>
+                <a:cs typeface="Calibri" pitchFamily="34" charset="-120"/>
+              </a:rPr>
+              <a:t>PyMEs</a:t>
+            </a:r>
+            <a:endParaRPr lang="en-US" sz="1050" dirty="0"/>
+          </a:p>
+        </p:txBody>
+      </p:sp>
+      <p:sp>
+        <p:nvSpPr>
+          <p:cNvPr id="25" name="Text 20"/>
+          <p:cNvSpPr/>
+          <p:nvPr/>
+        </p:nvSpPr>
+        <p:spPr>
+          <a:xfrm>
+            <a:off x="3383280" y="3557016"/>
+            <a:ext cx="3794760" cy="658368"/>
+          </a:xfrm>
+          <a:prstGeom prst="rect">
+            <a:avLst/>
+          </a:prstGeom>
+          <a:noFill/>
+          <a:ln/>
+        </p:spPr>
+        <p:txBody>
+          <a:bodyPr wrap="square" lIns="0" tIns="0" rIns="0" bIns="0" rtlCol="0" anchor="ctr"/>
+          <a:lstStyle/>
+          <a:p>
+            <a:pPr marL="0" indent="0">
+              <a:lnSpc>
+                <a:spcPct val="108000"/>
+              </a:lnSpc>
+              <a:buNone/>
+            </a:pPr>
+            <a:r>
+              <a:rPr lang="en-US" sz="950" dirty="0">
+                <a:solidFill>
+                  <a:srgbClr val="27314D"/>
+                </a:solidFill>
+                <a:latin typeface="Calibri" pitchFamily="34" charset="0"/>
+                <a:ea typeface="Calibri" pitchFamily="34" charset="-122"/>
+                <a:cs typeface="Calibri" pitchFamily="34" charset="-120"/>
+              </a:rPr>
+              <a:t>Crédito bancario de corto plazo, factoraje y crédito de proveedores.</a:t>
+            </a:r>
+            <a:endParaRPr lang="en-US" sz="950" dirty="0"/>
+          </a:p>
+        </p:txBody>
+      </p:sp>
+      <p:sp>
+        <p:nvSpPr>
+          <p:cNvPr id="26" name="Text 21"/>
+          <p:cNvSpPr/>
+          <p:nvPr/>
+        </p:nvSpPr>
+        <p:spPr>
+          <a:xfrm>
+            <a:off x="7498080" y="3557016"/>
+            <a:ext cx="3685032" cy="658368"/>
+          </a:xfrm>
+          <a:prstGeom prst="rect">
+            <a:avLst/>
+          </a:prstGeom>
+          <a:noFill/>
+          <a:ln/>
+        </p:spPr>
+        <p:txBody>
+          <a:bodyPr wrap="square" lIns="0" tIns="0" rIns="0" bIns="0" rtlCol="0" anchor="ctr"/>
+          <a:lstStyle/>
+          <a:p>
+            <a:pPr marL="0" indent="0">
+              <a:lnSpc>
+                <a:spcPct val="108000"/>
+              </a:lnSpc>
+              <a:buNone/>
+            </a:pPr>
+            <a:r>
+              <a:rPr lang="en-US" sz="950" dirty="0">
+                <a:solidFill>
+                  <a:srgbClr val="27314D"/>
+                </a:solidFill>
+                <a:latin typeface="Calibri" pitchFamily="34" charset="0"/>
+                <a:ea typeface="Calibri" pitchFamily="34" charset="-122"/>
+                <a:cs typeface="Calibri" pitchFamily="34" charset="-120"/>
+              </a:rPr>
+              <a:t>Acceso muy limitado; recurren a banca de desarrollo (NAFIN) en vez de la bolsa pública.</a:t>
+            </a:r>
+            <a:endParaRPr lang="en-US" sz="950" dirty="0"/>
+          </a:p>
+        </p:txBody>
+      </p:sp>
+      <p:sp>
+        <p:nvSpPr>
+          <p:cNvPr id="27" name="Shape 22"/>
+          <p:cNvSpPr/>
+          <p:nvPr/>
+        </p:nvSpPr>
+        <p:spPr>
+          <a:xfrm>
+            <a:off x="640080" y="4215384"/>
+            <a:ext cx="10908792" cy="658368"/>
+          </a:xfrm>
+          <a:prstGeom prst="rect">
+            <a:avLst/>
+          </a:prstGeom>
+          <a:solidFill>
+            <a:srgbClr val="FFFFFF"/>
+          </a:solidFill>
+          <a:ln/>
+        </p:spPr>
+        <p:txBody>
+          <a:bodyPr/>
+          <a:lstStyle/>
+          <a:p>
+            <a:endParaRPr/>
+          </a:p>
+        </p:txBody>
+      </p:sp>
+      <p:sp>
+        <p:nvSpPr>
+          <p:cNvPr id="28" name="Shape 23"/>
+          <p:cNvSpPr/>
+          <p:nvPr/>
+        </p:nvSpPr>
+        <p:spPr>
+          <a:xfrm>
+            <a:off x="822960" y="4352544"/>
+            <a:ext cx="384048" cy="384048"/>
+          </a:xfrm>
+          <a:prstGeom prst="ellipse">
+            <a:avLst/>
+          </a:prstGeom>
+          <a:solidFill>
+            <a:srgbClr val="1E2761"/>
+          </a:solidFill>
+          <a:ln/>
+        </p:spPr>
+        <p:txBody>
+          <a:bodyPr/>
+          <a:lstStyle/>
+          <a:p>
+            <a:endParaRPr/>
+          </a:p>
+        </p:txBody>
+      </p:sp>
+      <p:pic>
+        <p:nvPicPr>
+          <p:cNvPr id="29" name="Image 3" descr="/tmp/work/deck/icons/university_navy.png"/>
+          <p:cNvPicPr>
+            <a:picLocks noChangeAspect="1"/>
+          </p:cNvPicPr>
+          <p:nvPr/>
+        </p:nvPicPr>
+        <p:blipFill>
+          <a:blip r:embed="rId6"/>
+          <a:stretch>
+            <a:fillRect/>
+          </a:stretch>
+        </p:blipFill>
+        <p:spPr>
+          <a:xfrm>
+            <a:off x="915132" y="4444716"/>
+            <a:ext cx="199705" cy="199705"/>
+          </a:xfrm>
+          <a:prstGeom prst="rect">
+            <a:avLst/>
+          </a:prstGeom>
+        </p:spPr>
+      </p:pic>
+      <p:sp>
+        <p:nvSpPr>
+          <p:cNvPr id="30" name="Text 24"/>
+          <p:cNvSpPr/>
+          <p:nvPr/>
+        </p:nvSpPr>
+        <p:spPr>
+          <a:xfrm>
+            <a:off x="1316736" y="4215384"/>
+            <a:ext cx="1929384" cy="658368"/>
+          </a:xfrm>
+          <a:prstGeom prst="rect">
+            <a:avLst/>
+          </a:prstGeom>
+          <a:noFill/>
+          <a:ln/>
+        </p:spPr>
+        <p:txBody>
+          <a:bodyPr wrap="square" lIns="0" tIns="0" rIns="0" bIns="0" rtlCol="0" anchor="ctr"/>
+          <a:lstStyle/>
+          <a:p>
+            <a:pPr marL="0" indent="0">
+              <a:lnSpc>
+                <a:spcPct val="105000"/>
+              </a:lnSpc>
+              <a:buNone/>
+            </a:pPr>
+            <a:r>
+              <a:rPr lang="en-US" sz="1050" b="1" dirty="0">
+                <a:solidFill>
+                  <a:srgbClr val="1E2761"/>
+                </a:solidFill>
+                <a:latin typeface="Calibri" pitchFamily="34" charset="0"/>
+                <a:ea typeface="Calibri" pitchFamily="34" charset="-122"/>
+                <a:cs typeface="Calibri" pitchFamily="34" charset="-120"/>
+              </a:rPr>
+              <a:t>Bancos e intermediarios</a:t>
+            </a:r>
+            <a:endParaRPr lang="en-US" sz="1050" dirty="0"/>
+          </a:p>
+        </p:txBody>
+      </p:sp>
+      <p:sp>
+        <p:nvSpPr>
+          <p:cNvPr id="31" name="Text 25"/>
+          <p:cNvSpPr/>
+          <p:nvPr/>
+        </p:nvSpPr>
+        <p:spPr>
+          <a:xfrm>
+            <a:off x="3383280" y="4215384"/>
+            <a:ext cx="3794760" cy="658368"/>
+          </a:xfrm>
+          <a:prstGeom prst="rect">
+            <a:avLst/>
+          </a:prstGeom>
+          <a:noFill/>
+          <a:ln/>
+        </p:spPr>
+        <p:txBody>
+          <a:bodyPr wrap="square" lIns="0" tIns="0" rIns="0" bIns="0" rtlCol="0" anchor="ctr"/>
+          <a:lstStyle/>
+          <a:p>
+            <a:pPr marL="0" indent="0">
+              <a:lnSpc>
+                <a:spcPct val="108000"/>
+              </a:lnSpc>
+              <a:buNone/>
+            </a:pPr>
+            <a:r>
+              <a:rPr lang="en-US" sz="950" dirty="0">
+                <a:solidFill>
+                  <a:srgbClr val="27314D"/>
+                </a:solidFill>
+                <a:latin typeface="Calibri" pitchFamily="34" charset="0"/>
+                <a:ea typeface="Calibri" pitchFamily="34" charset="-122"/>
+                <a:cs typeface="Calibri" pitchFamily="34" charset="-120"/>
+              </a:rPr>
+              <a:t>Captación de depósitos; actúan como creadores de mercado.</a:t>
+            </a:r>
+            <a:endParaRPr lang="en-US" sz="950" dirty="0"/>
+          </a:p>
+        </p:txBody>
+      </p:sp>
+      <p:sp>
+        <p:nvSpPr>
+          <p:cNvPr id="32" name="Text 26"/>
+          <p:cNvSpPr/>
+          <p:nvPr/>
+        </p:nvSpPr>
+        <p:spPr>
+          <a:xfrm>
+            <a:off x="7498080" y="4215384"/>
+            <a:ext cx="3685032" cy="658368"/>
+          </a:xfrm>
+          <a:prstGeom prst="rect">
+            <a:avLst/>
+          </a:prstGeom>
+          <a:noFill/>
+          <a:ln/>
+        </p:spPr>
+        <p:txBody>
+          <a:bodyPr wrap="square" lIns="0" tIns="0" rIns="0" bIns="0" rtlCol="0" anchor="ctr"/>
+          <a:lstStyle/>
+          <a:p>
+            <a:pPr marL="0" indent="0">
+              <a:lnSpc>
+                <a:spcPct val="108000"/>
+              </a:lnSpc>
+              <a:buNone/>
+            </a:pPr>
+            <a:r>
+              <a:rPr lang="en-US" sz="950" dirty="0">
+                <a:solidFill>
+                  <a:srgbClr val="27314D"/>
+                </a:solidFill>
+                <a:latin typeface="Calibri" pitchFamily="34" charset="0"/>
+                <a:ea typeface="Calibri" pitchFamily="34" charset="-122"/>
+                <a:cs typeface="Calibri" pitchFamily="34" charset="-120"/>
+              </a:rPr>
+              <a:t>Colocación y garantía de emisiones (banca de inversión).</a:t>
+            </a:r>
+            <a:endParaRPr lang="en-US" sz="950" dirty="0"/>
+          </a:p>
+        </p:txBody>
+      </p:sp>
+      <p:sp>
+        <p:nvSpPr>
+          <p:cNvPr id="33" name="Shape 27"/>
+          <p:cNvSpPr/>
+          <p:nvPr/>
+        </p:nvSpPr>
+        <p:spPr>
+          <a:xfrm>
+            <a:off x="640080" y="4873752"/>
+            <a:ext cx="10908792" cy="658368"/>
+          </a:xfrm>
+          <a:prstGeom prst="rect">
+            <a:avLst/>
+          </a:prstGeom>
+          <a:solidFill>
+            <a:srgbClr val="EEF3FC"/>
+          </a:solidFill>
+          <a:ln/>
+        </p:spPr>
+        <p:txBody>
+          <a:bodyPr/>
+          <a:lstStyle/>
+          <a:p>
+            <a:endParaRPr/>
+          </a:p>
+        </p:txBody>
+      </p:sp>
+      <p:sp>
+        <p:nvSpPr>
+          <p:cNvPr id="34" name="Shape 28"/>
+          <p:cNvSpPr/>
+          <p:nvPr/>
+        </p:nvSpPr>
+        <p:spPr>
+          <a:xfrm>
+            <a:off x="822960" y="5010912"/>
+            <a:ext cx="384048" cy="384048"/>
+          </a:xfrm>
+          <a:prstGeom prst="ellipse">
+            <a:avLst/>
+          </a:prstGeom>
+          <a:solidFill>
+            <a:srgbClr val="1E2761"/>
+          </a:solidFill>
+          <a:ln/>
+        </p:spPr>
+        <p:txBody>
+          <a:bodyPr/>
+          <a:lstStyle/>
+          <a:p>
+            <a:endParaRPr/>
+          </a:p>
+        </p:txBody>
+      </p:sp>
+      <p:pic>
+        <p:nvPicPr>
+          <p:cNvPr id="35" name="Image 4" descr="/tmp/work/deck/icons/piggy_navy.png"/>
+          <p:cNvPicPr>
+            <a:picLocks noChangeAspect="1"/>
+          </p:cNvPicPr>
+          <p:nvPr/>
+        </p:nvPicPr>
+        <p:blipFill>
+          <a:blip r:embed="rId7"/>
+          <a:stretch>
+            <a:fillRect/>
+          </a:stretch>
+        </p:blipFill>
+        <p:spPr>
+          <a:xfrm>
+            <a:off x="915132" y="5103084"/>
+            <a:ext cx="199705" cy="199705"/>
+          </a:xfrm>
+          <a:prstGeom prst="rect">
+            <a:avLst/>
+          </a:prstGeom>
+        </p:spPr>
+      </p:pic>
+      <p:sp>
+        <p:nvSpPr>
+          <p:cNvPr id="36" name="Text 29"/>
+          <p:cNvSpPr/>
+          <p:nvPr/>
+        </p:nvSpPr>
+        <p:spPr>
+          <a:xfrm>
+            <a:off x="1316736" y="4873752"/>
+            <a:ext cx="1929384" cy="658368"/>
+          </a:xfrm>
+          <a:prstGeom prst="rect">
+            <a:avLst/>
+          </a:prstGeom>
+          <a:noFill/>
+          <a:ln/>
+        </p:spPr>
+        <p:txBody>
+          <a:bodyPr wrap="square" lIns="0" tIns="0" rIns="0" bIns="0" rtlCol="0" anchor="ctr"/>
+          <a:lstStyle/>
+          <a:p>
+            <a:pPr marL="0" indent="0">
+              <a:lnSpc>
+                <a:spcPct val="105000"/>
+              </a:lnSpc>
+              <a:buNone/>
+            </a:pPr>
+            <a:r>
+              <a:rPr lang="en-US" sz="1050" b="1" dirty="0">
+                <a:solidFill>
+                  <a:srgbClr val="1E2761"/>
+                </a:solidFill>
+                <a:latin typeface="Calibri" pitchFamily="34" charset="0"/>
+                <a:ea typeface="Calibri" pitchFamily="34" charset="-122"/>
+                <a:cs typeface="Calibri" pitchFamily="34" charset="-120"/>
+              </a:rPr>
+              <a:t>Personas físicas</a:t>
+            </a:r>
+            <a:endParaRPr lang="en-US" sz="1050" dirty="0"/>
+          </a:p>
+        </p:txBody>
+      </p:sp>
+      <p:sp>
+        <p:nvSpPr>
+          <p:cNvPr id="37" name="Text 30"/>
+          <p:cNvSpPr/>
+          <p:nvPr/>
+        </p:nvSpPr>
+        <p:spPr>
+          <a:xfrm>
+            <a:off x="3383280" y="4873752"/>
+            <a:ext cx="3794760" cy="658368"/>
+          </a:xfrm>
+          <a:prstGeom prst="rect">
+            <a:avLst/>
+          </a:prstGeom>
+          <a:noFill/>
+          <a:ln/>
+        </p:spPr>
+        <p:txBody>
+          <a:bodyPr wrap="square" lIns="0" tIns="0" rIns="0" bIns="0" rtlCol="0" anchor="ctr"/>
+          <a:lstStyle/>
+          <a:p>
+            <a:pPr marL="0" indent="0">
+              <a:lnSpc>
+                <a:spcPct val="108000"/>
+              </a:lnSpc>
+              <a:buNone/>
+            </a:pPr>
+            <a:r>
+              <a:rPr lang="en-US" sz="950" dirty="0">
+                <a:solidFill>
+                  <a:srgbClr val="27314D"/>
+                </a:solidFill>
+                <a:latin typeface="Calibri" pitchFamily="34" charset="0"/>
+                <a:ea typeface="Calibri" pitchFamily="34" charset="-122"/>
+                <a:cs typeface="Calibri" pitchFamily="34" charset="-120"/>
+              </a:rPr>
+              <a:t>Cuentas de ahorro y depósitos a la vista o a plazo.</a:t>
+            </a:r>
+            <a:endParaRPr lang="en-US" sz="950" dirty="0"/>
+          </a:p>
+        </p:txBody>
+      </p:sp>
+      <p:sp>
+        <p:nvSpPr>
+          <p:cNvPr id="38" name="Text 31"/>
+          <p:cNvSpPr/>
+          <p:nvPr/>
+        </p:nvSpPr>
+        <p:spPr>
+          <a:xfrm>
+            <a:off x="7498080" y="4873752"/>
+            <a:ext cx="3685032" cy="658368"/>
+          </a:xfrm>
+          <a:prstGeom prst="rect">
+            <a:avLst/>
+          </a:prstGeom>
+          <a:noFill/>
+          <a:ln/>
+        </p:spPr>
+        <p:txBody>
+          <a:bodyPr wrap="square" lIns="0" tIns="0" rIns="0" bIns="0" rtlCol="0" anchor="ctr"/>
+          <a:lstStyle/>
+          <a:p>
+            <a:pPr marL="0" indent="0">
+              <a:lnSpc>
+                <a:spcPct val="108000"/>
+              </a:lnSpc>
+              <a:buNone/>
+            </a:pPr>
+            <a:r>
+              <a:rPr lang="en-US" sz="950" dirty="0">
+                <a:solidFill>
+                  <a:srgbClr val="27314D"/>
+                </a:solidFill>
+                <a:latin typeface="Calibri" pitchFamily="34" charset="0"/>
+                <a:ea typeface="Calibri" pitchFamily="34" charset="-122"/>
+                <a:cs typeface="Calibri" pitchFamily="34" charset="-120"/>
+              </a:rPr>
+              <a:t>Acceso indirecto vía fondos de inversión, Afores o casas de bolsa.</a:t>
+            </a:r>
+            <a:endParaRPr lang="en-US" sz="950" dirty="0"/>
+          </a:p>
+        </p:txBody>
+      </p:sp>
+      <p:sp>
+        <p:nvSpPr>
+          <p:cNvPr id="39" name="Shape 32"/>
+          <p:cNvSpPr/>
+          <p:nvPr/>
+        </p:nvSpPr>
+        <p:spPr>
+          <a:xfrm>
+            <a:off x="640080" y="5532120"/>
+            <a:ext cx="10908792" cy="658368"/>
+          </a:xfrm>
+          <a:prstGeom prst="rect">
+            <a:avLst/>
+          </a:prstGeom>
+          <a:solidFill>
+            <a:srgbClr val="FFFFFF"/>
+          </a:solidFill>
+          <a:ln/>
+        </p:spPr>
+        <p:txBody>
+          <a:bodyPr/>
+          <a:lstStyle/>
+          <a:p>
+            <a:endParaRPr/>
+          </a:p>
+        </p:txBody>
+      </p:sp>
+      <p:sp>
+        <p:nvSpPr>
+          <p:cNvPr id="40" name="Shape 33"/>
+          <p:cNvSpPr/>
+          <p:nvPr/>
+        </p:nvSpPr>
+        <p:spPr>
+          <a:xfrm>
+            <a:off x="822960" y="5669280"/>
+            <a:ext cx="384048" cy="384048"/>
+          </a:xfrm>
+          <a:prstGeom prst="ellipse">
+            <a:avLst/>
+          </a:prstGeom>
+          <a:solidFill>
+            <a:srgbClr val="1E2761"/>
+          </a:solidFill>
+          <a:ln/>
+        </p:spPr>
+        <p:txBody>
+          <a:bodyPr/>
+          <a:lstStyle/>
+          <a:p>
+            <a:endParaRPr/>
+          </a:p>
+        </p:txBody>
+      </p:sp>
+      <p:pic>
+        <p:nvPicPr>
+          <p:cNvPr id="41" name="Image 5" descr="/tmp/work/deck/icons/shield_navy.png"/>
+          <p:cNvPicPr>
+            <a:picLocks noChangeAspect="1"/>
+          </p:cNvPicPr>
+          <p:nvPr/>
+        </p:nvPicPr>
+        <p:blipFill>
+          <a:blip r:embed="rId8"/>
+          <a:stretch>
+            <a:fillRect/>
+          </a:stretch>
+        </p:blipFill>
+        <p:spPr>
+          <a:xfrm>
+            <a:off x="915132" y="5761452"/>
+            <a:ext cx="199705" cy="199705"/>
+          </a:xfrm>
+          <a:prstGeom prst="rect">
+            <a:avLst/>
+          </a:prstGeom>
+        </p:spPr>
+      </p:pic>
+      <p:sp>
+        <p:nvSpPr>
+          <p:cNvPr id="42" name="Text 34"/>
+          <p:cNvSpPr/>
+          <p:nvPr/>
+        </p:nvSpPr>
+        <p:spPr>
+          <a:xfrm>
+            <a:off x="1316736" y="5532120"/>
+            <a:ext cx="1929384" cy="658368"/>
+          </a:xfrm>
+          <a:prstGeom prst="rect">
+            <a:avLst/>
+          </a:prstGeom>
+          <a:noFill/>
+          <a:ln/>
+        </p:spPr>
+        <p:txBody>
+          <a:bodyPr wrap="square" lIns="0" tIns="0" rIns="0" bIns="0" rtlCol="0" anchor="ctr"/>
+          <a:lstStyle/>
+          <a:p>
+            <a:pPr marL="0" indent="0">
+              <a:lnSpc>
+                <a:spcPct val="105000"/>
+              </a:lnSpc>
+              <a:buNone/>
+            </a:pPr>
+            <a:r>
+              <a:rPr lang="en-US" sz="1050" b="1" dirty="0">
+                <a:solidFill>
+                  <a:srgbClr val="1E2761"/>
+                </a:solidFill>
+                <a:latin typeface="Calibri" pitchFamily="34" charset="0"/>
+                <a:ea typeface="Calibri" pitchFamily="34" charset="-122"/>
+                <a:cs typeface="Calibri" pitchFamily="34" charset="-120"/>
+              </a:rPr>
+              <a:t>Inversionistas institucionales</a:t>
+            </a:r>
+            <a:endParaRPr lang="en-US" sz="1050" dirty="0"/>
+          </a:p>
+        </p:txBody>
+      </p:sp>
+      <p:sp>
+        <p:nvSpPr>
+          <p:cNvPr id="43" name="Text 35"/>
+          <p:cNvSpPr/>
+          <p:nvPr/>
+        </p:nvSpPr>
+        <p:spPr>
+          <a:xfrm>
+            <a:off x="3383280" y="5532120"/>
+            <a:ext cx="3794760" cy="658368"/>
+          </a:xfrm>
+          <a:prstGeom prst="rect">
+            <a:avLst/>
+          </a:prstGeom>
+          <a:noFill/>
+          <a:ln/>
+        </p:spPr>
+        <p:txBody>
+          <a:bodyPr wrap="square" lIns="0" tIns="0" rIns="0" bIns="0" rtlCol="0" anchor="ctr"/>
+          <a:lstStyle/>
+          <a:p>
+            <a:pPr marL="0" indent="0">
+              <a:lnSpc>
+                <a:spcPct val="108000"/>
+              </a:lnSpc>
+              <a:buNone/>
+            </a:pPr>
+            <a:r>
+              <a:rPr lang="en-US" sz="950" dirty="0">
+                <a:solidFill>
+                  <a:srgbClr val="27314D"/>
+                </a:solidFill>
+                <a:latin typeface="Calibri" pitchFamily="34" charset="0"/>
+                <a:ea typeface="Calibri" pitchFamily="34" charset="-122"/>
+                <a:cs typeface="Calibri" pitchFamily="34" charset="-120"/>
+              </a:rPr>
+              <a:t>Instrumentos líquidos de tesorería de corto plazo.</a:t>
+            </a:r>
+            <a:endParaRPr lang="en-US" sz="950" dirty="0"/>
+          </a:p>
+        </p:txBody>
+      </p:sp>
+      <p:sp>
+        <p:nvSpPr>
+          <p:cNvPr id="44" name="Text 36"/>
+          <p:cNvSpPr/>
+          <p:nvPr/>
+        </p:nvSpPr>
+        <p:spPr>
+          <a:xfrm>
+            <a:off x="7498080" y="5532120"/>
+            <a:ext cx="3685032" cy="658368"/>
+          </a:xfrm>
+          <a:prstGeom prst="rect">
+            <a:avLst/>
+          </a:prstGeom>
+          <a:noFill/>
+          <a:ln/>
+        </p:spPr>
+        <p:txBody>
+          <a:bodyPr wrap="square" lIns="0" tIns="0" rIns="0" bIns="0" rtlCol="0" anchor="ctr"/>
+          <a:lstStyle/>
+          <a:p>
+            <a:pPr marL="0" indent="0">
+              <a:lnSpc>
+                <a:spcPct val="108000"/>
+              </a:lnSpc>
+              <a:buNone/>
+            </a:pPr>
+            <a:r>
+              <a:rPr lang="en-US" sz="950" dirty="0">
+                <a:solidFill>
+                  <a:srgbClr val="27314D"/>
+                </a:solidFill>
+                <a:latin typeface="Calibri" pitchFamily="34" charset="0"/>
+                <a:ea typeface="Calibri" pitchFamily="34" charset="-122"/>
+                <a:cs typeface="Calibri" pitchFamily="34" charset="-120"/>
+              </a:rPr>
+              <a:t>Principal fuente de demanda de largo plazo: bonos y acciones.</a:t>
+            </a:r>
+            <a:endParaRPr lang="en-US" sz="950" dirty="0"/>
+          </a:p>
+        </p:txBody>
+      </p:sp>
+      <p:sp>
+        <p:nvSpPr>
+          <p:cNvPr id="45" name="Shape 37"/>
+          <p:cNvSpPr/>
+          <p:nvPr/>
+        </p:nvSpPr>
+        <p:spPr>
+          <a:xfrm>
+            <a:off x="640080" y="1783080"/>
+            <a:ext cx="10908792" cy="4407408"/>
+          </a:xfrm>
+          <a:prstGeom prst="rect">
+            <a:avLst/>
+          </a:prstGeom>
           <a:ln w="12700">
             <a:solidFill>
               <a:srgbClr val="E1E7F5"/>
@@ -8240,399 +9218,76 @@
       </p:sp>
       <p:sp>
         <p:nvSpPr>
-          <p:cNvPr id="13" name="Shape 10"/>
-          <p:cNvSpPr/>
-          <p:nvPr/>
-        </p:nvSpPr>
-        <p:spPr>
-          <a:xfrm>
-            <a:off x="822960" y="3259836"/>
-            <a:ext cx="566928" cy="566928"/>
-          </a:xfrm>
-          <a:prstGeom prst="ellipse">
-            <a:avLst/>
-          </a:prstGeom>
-          <a:solidFill>
-            <a:srgbClr val="1E2761"/>
-          </a:solidFill>
-          <a:ln/>
-        </p:spPr>
-        <p:txBody>
-          <a:bodyPr/>
-          <a:lstStyle/>
-          <a:p>
-            <a:endParaRPr/>
-          </a:p>
-        </p:txBody>
-      </p:sp>
-      <p:sp>
-        <p:nvSpPr>
-          <p:cNvPr id="14" name="Text 11"/>
-          <p:cNvSpPr/>
-          <p:nvPr/>
-        </p:nvSpPr>
-        <p:spPr>
-          <a:xfrm>
-            <a:off x="822960" y="3259836"/>
-            <a:ext cx="566928" cy="566928"/>
-          </a:xfrm>
-          <a:prstGeom prst="rect">
-            <a:avLst/>
-          </a:prstGeom>
-          <a:noFill/>
-          <a:ln/>
-        </p:spPr>
-        <p:txBody>
-          <a:bodyPr wrap="square" lIns="0" tIns="0" rIns="0" bIns="0" rtlCol="0" anchor="ctr"/>
-          <a:lstStyle/>
-          <a:p>
-            <a:pPr marL="0" indent="0" algn="ctr">
-              <a:buNone/>
-            </a:pPr>
-            <a:r>
-              <a:rPr lang="en-US" sz="2000" b="1" dirty="0">
-                <a:solidFill>
-                  <a:srgbClr val="C9A227"/>
-                </a:solidFill>
-                <a:latin typeface="Cambria" pitchFamily="34" charset="0"/>
-                <a:ea typeface="Cambria" pitchFamily="34" charset="-122"/>
-                <a:cs typeface="Cambria" pitchFamily="34" charset="-120"/>
-              </a:rPr>
-              <a:t>2</a:t>
-            </a:r>
-            <a:endParaRPr lang="en-US" sz="2000" dirty="0"/>
-          </a:p>
-        </p:txBody>
-      </p:sp>
-      <p:sp>
-        <p:nvSpPr>
-          <p:cNvPr id="15" name="Text 12"/>
-          <p:cNvSpPr/>
-          <p:nvPr/>
-        </p:nvSpPr>
-        <p:spPr>
-          <a:xfrm>
-            <a:off x="1600200" y="3182112"/>
-            <a:ext cx="9326880" cy="292608"/>
-          </a:xfrm>
-          <a:prstGeom prst="rect">
-            <a:avLst/>
-          </a:prstGeom>
-          <a:noFill/>
-          <a:ln/>
-        </p:spPr>
-        <p:txBody>
-          <a:bodyPr wrap="square" lIns="0" tIns="0" rIns="0" bIns="0" rtlCol="0" anchor="ctr"/>
+          <p:cNvPr id="46" name="Text 38"/>
+          <p:cNvSpPr/>
+          <p:nvPr/>
+        </p:nvSpPr>
+        <p:spPr>
+          <a:xfrm>
+            <a:off x="640080" y="6400800"/>
+            <a:ext cx="9418320" cy="274320"/>
+          </a:xfrm>
+          <a:prstGeom prst="rect">
+            <a:avLst/>
+          </a:prstGeom>
+          <a:noFill/>
+          <a:ln/>
+        </p:spPr>
+        <p:txBody>
+          <a:bodyPr wrap="square" rtlCol="0" anchor="ctr"/>
           <a:lstStyle/>
           <a:p>
             <a:pPr marL="0" indent="0">
               <a:buNone/>
             </a:pPr>
             <a:r>
-              <a:rPr lang="en-US" sz="1350" b="1" dirty="0">
-                <a:solidFill>
-                  <a:srgbClr val="1E2761"/>
+              <a:rPr lang="en-US" sz="950" i="1" dirty="0">
+                <a:solidFill>
+                  <a:srgbClr val="5B6482"/>
                 </a:solidFill>
                 <a:latin typeface="Calibri" pitchFamily="34" charset="0"/>
                 <a:ea typeface="Calibri" pitchFamily="34" charset="-122"/>
                 <a:cs typeface="Calibri" pitchFamily="34" charset="-120"/>
               </a:rPr>
-              <a:t>Negociación</a:t>
-            </a:r>
-            <a:endParaRPr lang="en-US" sz="1350" dirty="0"/>
-          </a:p>
-        </p:txBody>
-      </p:sp>
-      <p:sp>
-        <p:nvSpPr>
-          <p:cNvPr id="16" name="Text 13"/>
-          <p:cNvSpPr/>
-          <p:nvPr/>
-        </p:nvSpPr>
-        <p:spPr>
-          <a:xfrm>
-            <a:off x="1600200" y="3483864"/>
-            <a:ext cx="9326880" cy="502920"/>
-          </a:xfrm>
-          <a:prstGeom prst="rect">
-            <a:avLst/>
-          </a:prstGeom>
-          <a:noFill/>
-          <a:ln/>
-        </p:spPr>
-        <p:txBody>
-          <a:bodyPr wrap="square" lIns="0" tIns="0" rIns="0" bIns="0" rtlCol="0" anchor="ctr"/>
-          <a:lstStyle/>
-          <a:p>
-            <a:pPr marL="0" indent="0">
-              <a:lnSpc>
-                <a:spcPct val="112000"/>
-              </a:lnSpc>
-              <a:buNone/>
-            </a:pPr>
-            <a:r>
-              <a:rPr lang="en-US" sz="1050" dirty="0">
-                <a:solidFill>
-                  <a:srgbClr val="27314D"/>
+              <a:t>Elaboración propia a partir de Mántey de Anguiano (2024), Lección 2, y la organización del mercado de valores mexicano.</a:t>
+            </a:r>
+            <a:endParaRPr lang="en-US" sz="950" dirty="0"/>
+          </a:p>
+        </p:txBody>
+      </p:sp>
+      <p:sp>
+        <p:nvSpPr>
+          <p:cNvPr id="47" name="Text 39"/>
+          <p:cNvSpPr/>
+          <p:nvPr/>
+        </p:nvSpPr>
+        <p:spPr>
+          <a:xfrm>
+            <a:off x="11365992" y="6446520"/>
+            <a:ext cx="548640" cy="274320"/>
+          </a:xfrm>
+          <a:prstGeom prst="rect">
+            <a:avLst/>
+          </a:prstGeom>
+          <a:noFill/>
+          <a:ln/>
+        </p:spPr>
+        <p:txBody>
+          <a:bodyPr wrap="square" rtlCol="0" anchor="ctr"/>
+          <a:lstStyle/>
+          <a:p>
+            <a:pPr marL="0" indent="0" algn="r">
+              <a:buNone/>
+            </a:pPr>
+            <a:r>
+              <a:rPr lang="en-US" sz="1000" dirty="0">
+                <a:solidFill>
+                  <a:srgbClr val="A6ADC7"/>
                 </a:solidFill>
                 <a:latin typeface="Calibri" pitchFamily="34" charset="0"/>
                 <a:ea typeface="Calibri" pitchFamily="34" charset="-122"/>
                 <a:cs typeface="Calibri" pitchFamily="34" charset="-120"/>
               </a:rPr>
-              <a:t>El inversionista que lo compró puede revenderlo a otro inversionista antes de su vencimiento, en el mercado secundario.</a:t>
-            </a:r>
-            <a:endParaRPr lang="en-US" sz="1050" dirty="0"/>
-          </a:p>
-        </p:txBody>
-      </p:sp>
-      <p:sp>
-        <p:nvSpPr>
-          <p:cNvPr id="17" name="Shape 14"/>
-          <p:cNvSpPr/>
-          <p:nvPr/>
-        </p:nvSpPr>
-        <p:spPr>
-          <a:xfrm>
-            <a:off x="640080" y="4160520"/>
-            <a:ext cx="10908792" cy="960120"/>
-          </a:xfrm>
-          <a:prstGeom prst="roundRect">
-            <a:avLst>
-              <a:gd name="adj" fmla="val 8571"/>
-            </a:avLst>
-          </a:prstGeom>
-          <a:solidFill>
-            <a:srgbClr val="EEF3FC"/>
-          </a:solidFill>
-          <a:ln/>
-        </p:spPr>
-        <p:txBody>
-          <a:bodyPr/>
-          <a:lstStyle/>
-          <a:p>
-            <a:endParaRPr/>
-          </a:p>
-        </p:txBody>
-      </p:sp>
-      <p:sp>
-        <p:nvSpPr>
-          <p:cNvPr id="18" name="Shape 15"/>
-          <p:cNvSpPr/>
-          <p:nvPr/>
-        </p:nvSpPr>
-        <p:spPr>
-          <a:xfrm>
-            <a:off x="822960" y="4357116"/>
-            <a:ext cx="566928" cy="566928"/>
-          </a:xfrm>
-          <a:prstGeom prst="ellipse">
-            <a:avLst/>
-          </a:prstGeom>
-          <a:solidFill>
-            <a:srgbClr val="1E2761"/>
-          </a:solidFill>
-          <a:ln/>
-        </p:spPr>
-        <p:txBody>
-          <a:bodyPr/>
-          <a:lstStyle/>
-          <a:p>
-            <a:endParaRPr/>
-          </a:p>
-        </p:txBody>
-      </p:sp>
-      <p:sp>
-        <p:nvSpPr>
-          <p:cNvPr id="19" name="Text 16"/>
-          <p:cNvSpPr/>
-          <p:nvPr/>
-        </p:nvSpPr>
-        <p:spPr>
-          <a:xfrm>
-            <a:off x="822960" y="4357116"/>
-            <a:ext cx="566928" cy="566928"/>
-          </a:xfrm>
-          <a:prstGeom prst="rect">
-            <a:avLst/>
-          </a:prstGeom>
-          <a:noFill/>
-          <a:ln/>
-        </p:spPr>
-        <p:txBody>
-          <a:bodyPr wrap="square" lIns="0" tIns="0" rIns="0" bIns="0" rtlCol="0" anchor="ctr"/>
-          <a:lstStyle/>
-          <a:p>
-            <a:pPr marL="0" indent="0" algn="ctr">
-              <a:buNone/>
-            </a:pPr>
-            <a:r>
-              <a:rPr lang="en-US" sz="2000" b="1" dirty="0">
-                <a:solidFill>
-                  <a:srgbClr val="C9A227"/>
-                </a:solidFill>
-                <a:latin typeface="Cambria" pitchFamily="34" charset="0"/>
-                <a:ea typeface="Cambria" pitchFamily="34" charset="-122"/>
-                <a:cs typeface="Cambria" pitchFamily="34" charset="-120"/>
-              </a:rPr>
-              <a:t>3</a:t>
-            </a:r>
-            <a:endParaRPr lang="en-US" sz="2000" dirty="0"/>
-          </a:p>
-        </p:txBody>
-      </p:sp>
-      <p:sp>
-        <p:nvSpPr>
-          <p:cNvPr id="20" name="Text 17"/>
-          <p:cNvSpPr/>
-          <p:nvPr/>
-        </p:nvSpPr>
-        <p:spPr>
-          <a:xfrm>
-            <a:off x="1600200" y="4279392"/>
-            <a:ext cx="9326880" cy="292608"/>
-          </a:xfrm>
-          <a:prstGeom prst="rect">
-            <a:avLst/>
-          </a:prstGeom>
-          <a:noFill/>
-          <a:ln/>
-        </p:spPr>
-        <p:txBody>
-          <a:bodyPr wrap="square" lIns="0" tIns="0" rIns="0" bIns="0" rtlCol="0" anchor="ctr"/>
-          <a:lstStyle/>
-          <a:p>
-            <a:pPr marL="0" indent="0">
-              <a:buNone/>
-            </a:pPr>
-            <a:r>
-              <a:rPr lang="en-US" sz="1350" b="1" dirty="0">
-                <a:solidFill>
-                  <a:srgbClr val="1E2761"/>
-                </a:solidFill>
-                <a:latin typeface="Calibri" pitchFamily="34" charset="0"/>
-                <a:ea typeface="Calibri" pitchFamily="34" charset="-122"/>
-                <a:cs typeface="Calibri" pitchFamily="34" charset="-120"/>
-              </a:rPr>
-              <a:t>Liquidación</a:t>
-            </a:r>
-            <a:endParaRPr lang="en-US" sz="1350" dirty="0"/>
-          </a:p>
-        </p:txBody>
-      </p:sp>
-      <p:sp>
-        <p:nvSpPr>
-          <p:cNvPr id="21" name="Text 18"/>
-          <p:cNvSpPr/>
-          <p:nvPr/>
-        </p:nvSpPr>
-        <p:spPr>
-          <a:xfrm>
-            <a:off x="1600200" y="4581144"/>
-            <a:ext cx="9326880" cy="502920"/>
-          </a:xfrm>
-          <a:prstGeom prst="rect">
-            <a:avLst/>
-          </a:prstGeom>
-          <a:noFill/>
-          <a:ln/>
-        </p:spPr>
-        <p:txBody>
-          <a:bodyPr wrap="square" lIns="0" tIns="0" rIns="0" bIns="0" rtlCol="0" anchor="ctr"/>
-          <a:lstStyle/>
-          <a:p>
-            <a:pPr marL="0" indent="0">
-              <a:lnSpc>
-                <a:spcPct val="112000"/>
-              </a:lnSpc>
-              <a:buNone/>
-            </a:pPr>
-            <a:r>
-              <a:rPr lang="en-US" sz="1050" dirty="0">
-                <a:solidFill>
-                  <a:srgbClr val="27314D"/>
-                </a:solidFill>
-                <a:latin typeface="Calibri" pitchFamily="34" charset="0"/>
-                <a:ea typeface="Calibri" pitchFamily="34" charset="-122"/>
-                <a:cs typeface="Calibri" pitchFamily="34" charset="-120"/>
-              </a:rPr>
-              <a:t>Al vencimiento, el emisor paga directamente al tenedor final registrado en ese momento.</a:t>
-            </a:r>
-            <a:endParaRPr lang="en-US" sz="1050" dirty="0"/>
-          </a:p>
-        </p:txBody>
-      </p:sp>
-      <p:sp>
-        <p:nvSpPr>
-          <p:cNvPr id="27" name="Text 24"/>
-          <p:cNvSpPr/>
-          <p:nvPr/>
-        </p:nvSpPr>
-        <p:spPr>
-          <a:xfrm>
-            <a:off x="640080" y="6400800"/>
-            <a:ext cx="9418320" cy="274320"/>
-          </a:xfrm>
-          <a:prstGeom prst="rect">
-            <a:avLst/>
-          </a:prstGeom>
-          <a:noFill/>
-          <a:ln/>
-        </p:spPr>
-        <p:txBody>
-          <a:bodyPr wrap="square" rtlCol="0" anchor="ctr"/>
-          <a:lstStyle/>
-          <a:p>
-            <a:pPr marL="0" indent="0">
-              <a:buNone/>
-            </a:pPr>
-            <a:r>
-              <a:rPr lang="en-US" sz="950" i="1" dirty="0">
-                <a:solidFill>
-                  <a:srgbClr val="5B6482"/>
-                </a:solidFill>
-                <a:latin typeface="Calibri" pitchFamily="34" charset="0"/>
-                <a:ea typeface="Calibri" pitchFamily="34" charset="-122"/>
-                <a:cs typeface="Calibri" pitchFamily="34" charset="-120"/>
-              </a:rPr>
-              <a:t>Fuente: Mántey de Anguiano, G. (2024), Lección 2, UNAM.</a:t>
-            </a:r>
-            <a:endParaRPr lang="en-US" sz="950" dirty="0"/>
-          </a:p>
-        </p:txBody>
-      </p:sp>
-      <p:sp>
-        <p:nvSpPr>
-          <p:cNvPr id="28" name="Text 25"/>
-          <p:cNvSpPr/>
-          <p:nvPr/>
-        </p:nvSpPr>
-        <p:spPr>
-          <a:xfrm>
-            <a:off x="11365992" y="6446520"/>
-            <a:ext cx="548640" cy="274320"/>
-          </a:xfrm>
-          <a:prstGeom prst="rect">
-            <a:avLst/>
-          </a:prstGeom>
-          <a:noFill/>
-          <a:ln/>
-        </p:spPr>
-        <p:txBody>
-          <a:bodyPr wrap="square" rtlCol="0" anchor="ctr"/>
-          <a:lstStyle/>
-          <a:p>
-            <a:pPr marL="0" indent="0" algn="r">
-              <a:buNone/>
-            </a:pPr>
-            <a:r>
-              <a:rPr lang="en-US" sz="1000" dirty="0">
-                <a:solidFill>
-                  <a:srgbClr val="A6ADC7"/>
-                </a:solidFill>
-                <a:latin typeface="Calibri" pitchFamily="34" charset="0"/>
-                <a:ea typeface="Calibri" pitchFamily="34" charset="-122"/>
-                <a:cs typeface="Calibri" pitchFamily="34" charset="-120"/>
-              </a:rPr>
               <a:t>09</a:t>
             </a:r>
             <a:endParaRPr lang="en-US" sz="1000" dirty="0"/>
@@ -8640,6 +9295,11 @@
         </p:txBody>
       </p:sp>
     </p:spTree>
+    <p:extLst>
+      <p:ext uri="{BB962C8B-B14F-4D97-AF65-F5344CB8AC3E}">
+        <p14:creationId xmlns:p14="http://schemas.microsoft.com/office/powerpoint/2010/main" val="1938803638"/>
+      </p:ext>
+    </p:extLst>
   </p:cSld>
   <p:clrMapOvr>
     <a:masterClrMapping/>
